--- a/Smart_CPG_Decision_Agent_Presentation.pptx
+++ b/Smart_CPG_Decision_Agent_Presentation.pptx
@@ -3541,7 +3541,7 @@
                             <a:srgbClr val="FFFFFF"/>
                           </a:solidFill>
                         </a:rPr>
-                        <a:t>Example Question</a:t>
+                        <a:t>Platform Feature</a:t>
                       </a:r>
                     </a:p>
                   </a:txBody>
@@ -3585,7 +3585,7 @@
                             <a:srgbClr val="282828"/>
                           </a:solidFill>
                         </a:rPr>
-                        <a:t>Sales Analysis</a:t>
+                        <a:t>Anomaly Detection</a:t>
                       </a:r>
                     </a:p>
                   </a:txBody>
@@ -3606,7 +3606,7 @@
                             <a:srgbClr val="282828"/>
                           </a:solidFill>
                         </a:rPr>
-                        <a:t>Why did Q4 sales drop 15%?</a:t>
+                        <a:t>Multi-method detection</a:t>
                       </a:r>
                     </a:p>
                   </a:txBody>
@@ -3627,7 +3627,7 @@
                             <a:srgbClr val="282828"/>
                           </a:solidFill>
                         </a:rPr>
-                        <a:t>2 hours → 1 min</a:t>
+                        <a:t>4 hours → 2 min</a:t>
                       </a:r>
                     </a:p>
                   </a:txBody>
@@ -3650,7 +3650,7 @@
                             <a:srgbClr val="282828"/>
                           </a:solidFill>
                         </a:rPr>
-                        <a:t>Promotions</a:t>
+                        <a:t>Performance Analysis</a:t>
                       </a:r>
                     </a:p>
                   </a:txBody>
@@ -3671,7 +3671,7 @@
                             <a:srgbClr val="282828"/>
                           </a:solidFill>
                         </a:rPr>
-                        <a:t>Should we run a 20% discount?</a:t>
+                        <a:t>Data comparison tools</a:t>
                       </a:r>
                     </a:p>
                   </a:txBody>
@@ -3692,7 +3692,7 @@
                             <a:srgbClr val="282828"/>
                           </a:solidFill>
                         </a:rPr>
-                        <a:t>4 hours → 2 min</a:t>
+                        <a:t>3 hours → 1 min</a:t>
                       </a:r>
                     </a:p>
                   </a:txBody>
@@ -3715,7 +3715,7 @@
                             <a:srgbClr val="282828"/>
                           </a:solidFill>
                         </a:rPr>
-                        <a:t>Inventory</a:t>
+                        <a:t>Forecasting</a:t>
                       </a:r>
                     </a:p>
                   </a:txBody>
@@ -3736,7 +3736,7 @@
                             <a:srgbClr val="282828"/>
                           </a:solidFill>
                         </a:rPr>
-                        <a:t>Which stores have excess stock?</a:t>
+                        <a:t>Predictive analytics</a:t>
                       </a:r>
                     </a:p>
                   </a:txBody>
@@ -3757,7 +3757,7 @@
                             <a:srgbClr val="282828"/>
                           </a:solidFill>
                         </a:rPr>
-                        <a:t>3 hours → 1 min</a:t>
+                        <a:t>1 day → 5 min</a:t>
                       </a:r>
                     </a:p>
                   </a:txBody>
@@ -3780,7 +3780,7 @@
                             <a:srgbClr val="282828"/>
                           </a:solidFill>
                         </a:rPr>
-                        <a:t>Pricing Strategy</a:t>
+                        <a:t>Executive Reporting</a:t>
                       </a:r>
                     </a:p>
                   </a:txBody>
@@ -3801,7 +3801,7 @@
                             <a:srgbClr val="282828"/>
                           </a:solidFill>
                         </a:rPr>
-                        <a:t>How sensitive is demand to price?</a:t>
+                        <a:t>Custom reports &amp; dashboard</a:t>
                       </a:r>
                     </a:p>
                   </a:txBody>
@@ -3822,7 +3822,7 @@
                             <a:srgbClr val="282828"/>
                           </a:solidFill>
                         </a:rPr>
-                        <a:t>1 day → 5 min</a:t>
+                        <a:t>2 hours → 1 min</a:t>
                       </a:r>
                     </a:p>
                   </a:txBody>
@@ -3845,7 +3845,7 @@
                             <a:srgbClr val="282828"/>
                           </a:solidFill>
                         </a:rPr>
-                        <a:t>Problem Investigation</a:t>
+                        <a:t>Proactive Monitoring</a:t>
                       </a:r>
                     </a:p>
                   </a:txBody>
@@ -3866,7 +3866,7 @@
                             <a:srgbClr val="282828"/>
                           </a:solidFill>
                         </a:rPr>
-                        <a:t>Unusual spike last week?</a:t>
+                        <a:t>Alert management system</a:t>
                       </a:r>
                     </a:p>
                   </a:txBody>
@@ -3887,7 +3887,7 @@
                             <a:srgbClr val="282828"/>
                           </a:solidFill>
                         </a:rPr>
-                        <a:t>2 hours → 1 min</a:t>
+                        <a:t>Ongoing → Automated</a:t>
                       </a:r>
                     </a:p>
                   </a:txBody>
@@ -4020,7 +4020,7 @@
               </a:defRPr>
             </a:pPr>
             <a:r>
-              <a:t>What Data It Needs</a:t>
+              <a:t>Data Requirements</a:t>
             </a:r>
           </a:p>
         </p:txBody>
@@ -4199,172 +4199,193 @@
               </a:defRPr>
             </a:pPr>
             <a:r>
-              <a:t>Basic sales information:</a:t>
-            </a:r>
-          </a:p>
-          <a:p>
-            <a:pPr>
-              <a:lnSpc>
-                <a:spcPct val="120000"/>
-              </a:lnSpc>
-              <a:spcBef>
-                <a:spcPts val="400"/>
-              </a:spcBef>
-              <a:spcAft>
-                <a:spcPts val="400"/>
-              </a:spcAft>
-              <a:defRPr sz="1600">
-                <a:solidFill>
-                  <a:srgbClr val="282828"/>
-                </a:solidFill>
-              </a:defRPr>
-            </a:pPr>
-            <a:r>
-              <a:t>• Date, Store ID, Region</a:t>
-            </a:r>
-          </a:p>
-          <a:p>
-            <a:pPr>
-              <a:lnSpc>
-                <a:spcPct val="120000"/>
-              </a:lnSpc>
-              <a:spcBef>
-                <a:spcPts val="400"/>
-              </a:spcBef>
-              <a:spcAft>
-                <a:spcPts val="400"/>
-              </a:spcAft>
-              <a:defRPr sz="1600">
-                <a:solidFill>
-                  <a:srgbClr val="282828"/>
-                </a:solidFill>
-              </a:defRPr>
-            </a:pPr>
-            <a:r>
-              <a:t>• Product SKU, Category</a:t>
-            </a:r>
-          </a:p>
-          <a:p>
-            <a:pPr>
-              <a:lnSpc>
-                <a:spcPct val="120000"/>
-              </a:lnSpc>
-              <a:spcBef>
-                <a:spcPts val="400"/>
-              </a:spcBef>
-              <a:spcAft>
-                <a:spcPts val="400"/>
-              </a:spcAft>
-              <a:defRPr sz="1600">
-                <a:solidFill>
-                  <a:srgbClr val="282828"/>
-                </a:solidFill>
-              </a:defRPr>
-            </a:pPr>
-            <a:r>
-              <a:t>• Units sold, Revenue, Price</a:t>
-            </a:r>
-          </a:p>
-          <a:p>
-            <a:pPr>
-              <a:lnSpc>
-                <a:spcPct val="120000"/>
-              </a:lnSpc>
-              <a:spcBef>
-                <a:spcPts val="400"/>
-              </a:spcBef>
-              <a:spcAft>
-                <a:spcPts val="400"/>
-              </a:spcAft>
-              <a:defRPr sz="1600">
-                <a:solidFill>
-                  <a:srgbClr val="282828"/>
-                </a:solidFill>
-              </a:defRPr>
-            </a:pPr>
-            <a:r>
-              <a:t>• Promotion flags and type</a:t>
-            </a:r>
-          </a:p>
-          <a:p>
-            <a:pPr>
-              <a:lnSpc>
-                <a:spcPct val="120000"/>
-              </a:lnSpc>
-              <a:spcBef>
-                <a:spcPts val="400"/>
-              </a:spcBef>
-              <a:spcAft>
-                <a:spcPts val="400"/>
-              </a:spcAft>
-              <a:defRPr sz="1600">
-                <a:solidFill>
-                  <a:srgbClr val="282828"/>
-                </a:solidFill>
-              </a:defRPr>
-            </a:pPr>
-            <a:r>
-              <a:t>• Inventory levels</a:t>
-            </a:r>
-          </a:p>
-          <a:p>
-            <a:pPr>
-              <a:lnSpc>
-                <a:spcPct val="120000"/>
-              </a:lnSpc>
-              <a:spcBef>
-                <a:spcPts val="400"/>
-              </a:spcBef>
-              <a:spcAft>
-                <a:spcPts val="400"/>
-              </a:spcAft>
-              <a:defRPr sz="1600">
-                <a:solidFill>
-                  <a:srgbClr val="282828"/>
-                </a:solidFill>
-              </a:defRPr>
-            </a:pPr>
-            <a:r>
-              <a:t>• Holiday indicators</a:t>
-            </a:r>
-          </a:p>
-          <a:p>
-            <a:pPr>
-              <a:lnSpc>
-                <a:spcPct val="120000"/>
-              </a:lnSpc>
-              <a:spcBef>
-                <a:spcPts val="400"/>
-              </a:spcBef>
-              <a:spcAft>
-                <a:spcPts val="400"/>
-              </a:spcAft>
-              <a:defRPr sz="1600">
-                <a:solidFill>
-                  <a:srgbClr val="282828"/>
-                </a:solidFill>
-              </a:defRPr>
-            </a:pPr>
-          </a:p>
-          <a:p>
-            <a:pPr>
-              <a:lnSpc>
-                <a:spcPct val="120000"/>
-              </a:lnSpc>
-              <a:spcBef>
-                <a:spcPts val="400"/>
-              </a:spcBef>
-              <a:spcAft>
-                <a:spcPts val="400"/>
-              </a:spcAft>
-              <a:defRPr sz="1600">
-                <a:solidFill>
-                  <a:srgbClr val="282828"/>
-                </a:solidFill>
-              </a:defRPr>
-            </a:pPr>
-            <a:r>
-              <a:t>That's it! Upload your CSV or Parquet file and start asking questions.</a:t>
+              <a:t>Standard Sales Data Format:</a:t>
+            </a:r>
+          </a:p>
+          <a:p>
+            <a:pPr>
+              <a:lnSpc>
+                <a:spcPct val="120000"/>
+              </a:lnSpc>
+              <a:spcBef>
+                <a:spcPts val="400"/>
+              </a:spcBef>
+              <a:spcAft>
+                <a:spcPts val="400"/>
+              </a:spcAft>
+              <a:defRPr sz="1600">
+                <a:solidFill>
+                  <a:srgbClr val="282828"/>
+                </a:solidFill>
+              </a:defRPr>
+            </a:pPr>
+            <a:r>
+              <a:t>• Temporal: Date, Time period</a:t>
+            </a:r>
+          </a:p>
+          <a:p>
+            <a:pPr>
+              <a:lnSpc>
+                <a:spcPct val="120000"/>
+              </a:lnSpc>
+              <a:spcBef>
+                <a:spcPts val="400"/>
+              </a:spcBef>
+              <a:spcAft>
+                <a:spcPts val="400"/>
+              </a:spcAft>
+              <a:defRPr sz="1600">
+                <a:solidFill>
+                  <a:srgbClr val="282828"/>
+                </a:solidFill>
+              </a:defRPr>
+            </a:pPr>
+            <a:r>
+              <a:t>• Location: Store ID, Region, Geography</a:t>
+            </a:r>
+          </a:p>
+          <a:p>
+            <a:pPr>
+              <a:lnSpc>
+                <a:spcPct val="120000"/>
+              </a:lnSpc>
+              <a:spcBef>
+                <a:spcPts val="400"/>
+              </a:spcBef>
+              <a:spcAft>
+                <a:spcPts val="400"/>
+              </a:spcAft>
+              <a:defRPr sz="1600">
+                <a:solidFill>
+                  <a:srgbClr val="282828"/>
+                </a:solidFill>
+              </a:defRPr>
+            </a:pPr>
+            <a:r>
+              <a:t>• Product: SKU ID, Category, Product details</a:t>
+            </a:r>
+          </a:p>
+          <a:p>
+            <a:pPr>
+              <a:lnSpc>
+                <a:spcPct val="120000"/>
+              </a:lnSpc>
+              <a:spcBef>
+                <a:spcPts val="400"/>
+              </a:spcBef>
+              <a:spcAft>
+                <a:spcPts val="400"/>
+              </a:spcAft>
+              <a:defRPr sz="1600">
+                <a:solidFill>
+                  <a:srgbClr val="282828"/>
+                </a:solidFill>
+              </a:defRPr>
+            </a:pPr>
+            <a:r>
+              <a:t>• Metrics: Units sold, Revenue, Price</a:t>
+            </a:r>
+          </a:p>
+          <a:p>
+            <a:pPr>
+              <a:lnSpc>
+                <a:spcPct val="120000"/>
+              </a:lnSpc>
+              <a:spcBef>
+                <a:spcPts val="400"/>
+              </a:spcBef>
+              <a:spcAft>
+                <a:spcPts val="400"/>
+              </a:spcAft>
+              <a:defRPr sz="1600">
+                <a:solidFill>
+                  <a:srgbClr val="282828"/>
+                </a:solidFill>
+              </a:defRPr>
+            </a:pPr>
+            <a:r>
+              <a:t>• Business Events: Promotions, Holidays, Campaigns</a:t>
+            </a:r>
+          </a:p>
+          <a:p>
+            <a:pPr>
+              <a:lnSpc>
+                <a:spcPct val="120000"/>
+              </a:lnSpc>
+              <a:spcBef>
+                <a:spcPts val="400"/>
+              </a:spcBef>
+              <a:spcAft>
+                <a:spcPts val="400"/>
+              </a:spcAft>
+              <a:defRPr sz="1600">
+                <a:solidFill>
+                  <a:srgbClr val="282828"/>
+                </a:solidFill>
+              </a:defRPr>
+            </a:pPr>
+            <a:r>
+              <a:t>• Inventory: Stock levels, Availability</a:t>
+            </a:r>
+          </a:p>
+          <a:p>
+            <a:pPr>
+              <a:lnSpc>
+                <a:spcPct val="120000"/>
+              </a:lnSpc>
+              <a:spcBef>
+                <a:spcPts val="400"/>
+              </a:spcBef>
+              <a:spcAft>
+                <a:spcPts val="400"/>
+              </a:spcAft>
+              <a:defRPr sz="1600">
+                <a:solidFill>
+                  <a:srgbClr val="282828"/>
+                </a:solidFill>
+              </a:defRPr>
+            </a:pPr>
+          </a:p>
+          <a:p>
+            <a:pPr>
+              <a:lnSpc>
+                <a:spcPct val="120000"/>
+              </a:lnSpc>
+              <a:spcBef>
+                <a:spcPts val="400"/>
+              </a:spcBef>
+              <a:spcAft>
+                <a:spcPts val="400"/>
+              </a:spcAft>
+              <a:defRPr sz="1600">
+                <a:solidFill>
+                  <a:srgbClr val="282828"/>
+                </a:solidFill>
+              </a:defRPr>
+            </a:pPr>
+            <a:r>
+              <a:t>Supported Formats: CSV, Parquet, Excel</a:t>
+            </a:r>
+          </a:p>
+          <a:p>
+            <a:pPr>
+              <a:lnSpc>
+                <a:spcPct val="120000"/>
+              </a:lnSpc>
+              <a:spcBef>
+                <a:spcPts val="400"/>
+              </a:spcBef>
+              <a:spcAft>
+                <a:spcPts val="400"/>
+              </a:spcAft>
+              <a:defRPr sz="1600">
+                <a:solidFill>
+                  <a:srgbClr val="282828"/>
+                </a:solidFill>
+              </a:defRPr>
+            </a:pPr>
+            <a:r>
+              <a:t>Easy upload through web interface - no technical setup required</a:t>
             </a:r>
           </a:p>
         </p:txBody>
@@ -4487,7 +4508,7 @@
               </a:defRPr>
             </a:pPr>
             <a:r>
-              <a:t>How to Access It</a:t>
+              <a:t>Modern Web Interface</a:t>
             </a:r>
           </a:p>
         </p:txBody>
@@ -4666,172 +4687,256 @@
               </a:defRPr>
             </a:pPr>
             <a:r>
-              <a:t>🌐 Web Dashboard</a:t>
-            </a:r>
-          </a:p>
-          <a:p>
-            <a:pPr>
-              <a:lnSpc>
-                <a:spcPct val="120000"/>
-              </a:lnSpc>
-              <a:spcBef>
-                <a:spcPts val="400"/>
-              </a:spcBef>
-              <a:spcAft>
-                <a:spcPts val="400"/>
-              </a:spcAft>
-              <a:defRPr sz="1600">
-                <a:solidFill>
-                  <a:srgbClr val="282828"/>
-                </a:solidFill>
-              </a:defRPr>
-            </a:pPr>
-            <a:r>
-              <a:t>   • Interactive charts and reports</a:t>
-            </a:r>
-          </a:p>
-          <a:p>
-            <a:pPr>
-              <a:lnSpc>
-                <a:spcPct val="120000"/>
-              </a:lnSpc>
-              <a:spcBef>
-                <a:spcPts val="400"/>
-              </a:spcBef>
-              <a:spcAft>
-                <a:spcPts val="400"/>
-              </a:spcAft>
-              <a:defRPr sz="1600">
-                <a:solidFill>
-                  <a:srgbClr val="282828"/>
-                </a:solidFill>
-              </a:defRPr>
-            </a:pPr>
-            <a:r>
-              <a:t>   • Export results to CSV/PDF</a:t>
-            </a:r>
-          </a:p>
-          <a:p>
-            <a:pPr>
-              <a:lnSpc>
-                <a:spcPct val="120000"/>
-              </a:lnSpc>
-              <a:spcBef>
-                <a:spcPts val="400"/>
-              </a:spcBef>
-              <a:spcAft>
-                <a:spcPts val="400"/>
-              </a:spcAft>
-              <a:defRPr sz="1600">
-                <a:solidFill>
-                  <a:srgbClr val="282828"/>
-                </a:solidFill>
-              </a:defRPr>
-            </a:pPr>
-            <a:r>
-              <a:t>   • 15+ pre-built analytics pages</a:t>
-            </a:r>
-          </a:p>
-          <a:p>
-            <a:pPr>
-              <a:lnSpc>
-                <a:spcPct val="120000"/>
-              </a:lnSpc>
-              <a:spcBef>
-                <a:spcPts val="400"/>
-              </a:spcBef>
-              <a:spcAft>
-                <a:spcPts val="400"/>
-              </a:spcAft>
-              <a:defRPr sz="1600">
-                <a:solidFill>
-                  <a:srgbClr val="282828"/>
-                </a:solidFill>
-              </a:defRPr>
-            </a:pPr>
-          </a:p>
-          <a:p>
-            <a:pPr>
-              <a:lnSpc>
-                <a:spcPct val="120000"/>
-              </a:lnSpc>
-              <a:spcBef>
-                <a:spcPts val="400"/>
-              </a:spcBef>
-              <a:spcAft>
-                <a:spcPts val="400"/>
-              </a:spcAft>
-              <a:defRPr sz="1600">
-                <a:solidFill>
-                  <a:srgbClr val="282828"/>
-                </a:solidFill>
-              </a:defRPr>
-            </a:pPr>
-            <a:r>
-              <a:t>💻 Command-Line Interface</a:t>
-            </a:r>
-          </a:p>
-          <a:p>
-            <a:pPr>
-              <a:lnSpc>
-                <a:spcPct val="120000"/>
-              </a:lnSpc>
-              <a:spcBef>
-                <a:spcPts val="400"/>
-              </a:spcBef>
-              <a:spcAft>
-                <a:spcPts val="400"/>
-              </a:spcAft>
-              <a:defRPr sz="1600">
-                <a:solidFill>
-                  <a:srgbClr val="282828"/>
-                </a:solidFill>
-              </a:defRPr>
-            </a:pPr>
-            <a:r>
-              <a:t>   • For power users and automation</a:t>
-            </a:r>
-          </a:p>
-          <a:p>
-            <a:pPr>
-              <a:lnSpc>
-                <a:spcPct val="120000"/>
-              </a:lnSpc>
-              <a:spcBef>
-                <a:spcPts val="400"/>
-              </a:spcBef>
-              <a:spcAft>
-                <a:spcPts val="400"/>
-              </a:spcAft>
-              <a:defRPr sz="1600">
-                <a:solidFill>
-                  <a:srgbClr val="282828"/>
-                </a:solidFill>
-              </a:defRPr>
-            </a:pPr>
-            <a:r>
-              <a:t>   • Schedule batch analysis</a:t>
-            </a:r>
-          </a:p>
-          <a:p>
-            <a:pPr>
-              <a:lnSpc>
-                <a:spcPct val="120000"/>
-              </a:lnSpc>
-              <a:spcBef>
-                <a:spcPts val="400"/>
-              </a:spcBef>
-              <a:spcAft>
-                <a:spcPts val="400"/>
-              </a:spcAft>
-              <a:defRPr sz="1600">
-                <a:solidFill>
-                  <a:srgbClr val="282828"/>
-                </a:solidFill>
-              </a:defRPr>
-            </a:pPr>
-            <a:r>
-              <a:t>   • Integrate with other systems</a:t>
+              <a:t>🌐 Interactive Web Dashboard</a:t>
+            </a:r>
+          </a:p>
+          <a:p>
+            <a:pPr>
+              <a:lnSpc>
+                <a:spcPct val="120000"/>
+              </a:lnSpc>
+              <a:spcBef>
+                <a:spcPts val="400"/>
+              </a:spcBef>
+              <a:spcAft>
+                <a:spcPts val="400"/>
+              </a:spcAft>
+              <a:defRPr sz="1600">
+                <a:solidFill>
+                  <a:srgbClr val="282828"/>
+                </a:solidFill>
+              </a:defRPr>
+            </a:pPr>
+            <a:r>
+              <a:t>   • 9 specialized analytics modules</a:t>
+            </a:r>
+          </a:p>
+          <a:p>
+            <a:pPr>
+              <a:lnSpc>
+                <a:spcPct val="120000"/>
+              </a:lnSpc>
+              <a:spcBef>
+                <a:spcPts val="400"/>
+              </a:spcBef>
+              <a:spcAft>
+                <a:spcPts val="400"/>
+              </a:spcAft>
+              <a:defRPr sz="1600">
+                <a:solidFill>
+                  <a:srgbClr val="282828"/>
+                </a:solidFill>
+              </a:defRPr>
+            </a:pPr>
+            <a:r>
+              <a:t>   • Real-time data visualization</a:t>
+            </a:r>
+          </a:p>
+          <a:p>
+            <a:pPr>
+              <a:lnSpc>
+                <a:spcPct val="120000"/>
+              </a:lnSpc>
+              <a:spcBef>
+                <a:spcPts val="400"/>
+              </a:spcBef>
+              <a:spcAft>
+                <a:spcPts val="400"/>
+              </a:spcAft>
+              <a:defRPr sz="1600">
+                <a:solidFill>
+                  <a:srgbClr val="282828"/>
+                </a:solidFill>
+              </a:defRPr>
+            </a:pPr>
+            <a:r>
+              <a:t>   • Intuitive navigation and design</a:t>
+            </a:r>
+          </a:p>
+          <a:p>
+            <a:pPr>
+              <a:lnSpc>
+                <a:spcPct val="120000"/>
+              </a:lnSpc>
+              <a:spcBef>
+                <a:spcPts val="400"/>
+              </a:spcBef>
+              <a:spcAft>
+                <a:spcPts val="400"/>
+              </a:spcAft>
+              <a:defRPr sz="1600">
+                <a:solidFill>
+                  <a:srgbClr val="282828"/>
+                </a:solidFill>
+              </a:defRPr>
+            </a:pPr>
+          </a:p>
+          <a:p>
+            <a:pPr>
+              <a:lnSpc>
+                <a:spcPct val="120000"/>
+              </a:lnSpc>
+              <a:spcBef>
+                <a:spcPts val="400"/>
+              </a:spcBef>
+              <a:spcAft>
+                <a:spcPts val="400"/>
+              </a:spcAft>
+              <a:defRPr sz="1600">
+                <a:solidFill>
+                  <a:srgbClr val="282828"/>
+                </a:solidFill>
+              </a:defRPr>
+            </a:pPr>
+            <a:r>
+              <a:t>📊 Key Modules:</a:t>
+            </a:r>
+          </a:p>
+          <a:p>
+            <a:pPr>
+              <a:lnSpc>
+                <a:spcPct val="120000"/>
+              </a:lnSpc>
+              <a:spcBef>
+                <a:spcPts val="400"/>
+              </a:spcBef>
+              <a:spcAft>
+                <a:spcPts val="400"/>
+              </a:spcAft>
+              <a:defRPr sz="1600">
+                <a:solidFill>
+                  <a:srgbClr val="282828"/>
+                </a:solidFill>
+              </a:defRPr>
+            </a:pPr>
+            <a:r>
+              <a:t>   • Overview &amp; Data Management</a:t>
+            </a:r>
+          </a:p>
+          <a:p>
+            <a:pPr>
+              <a:lnSpc>
+                <a:spcPct val="120000"/>
+              </a:lnSpc>
+              <a:spcBef>
+                <a:spcPts val="400"/>
+              </a:spcBef>
+              <a:spcAft>
+                <a:spcPts val="400"/>
+              </a:spcAft>
+              <a:defRPr sz="1600">
+                <a:solidFill>
+                  <a:srgbClr val="282828"/>
+                </a:solidFill>
+              </a:defRPr>
+            </a:pPr>
+            <a:r>
+              <a:t>   • AI Assistant (Natural Language)</a:t>
+            </a:r>
+          </a:p>
+          <a:p>
+            <a:pPr>
+              <a:lnSpc>
+                <a:spcPct val="120000"/>
+              </a:lnSpc>
+              <a:spcBef>
+                <a:spcPts val="400"/>
+              </a:spcBef>
+              <a:spcAft>
+                <a:spcPts val="400"/>
+              </a:spcAft>
+              <a:defRPr sz="1600">
+                <a:solidFill>
+                  <a:srgbClr val="282828"/>
+                </a:solidFill>
+              </a:defRPr>
+            </a:pPr>
+            <a:r>
+              <a:t>   • Business Insights Generator</a:t>
+            </a:r>
+          </a:p>
+          <a:p>
+            <a:pPr>
+              <a:lnSpc>
+                <a:spcPct val="120000"/>
+              </a:lnSpc>
+              <a:spcBef>
+                <a:spcPts val="400"/>
+              </a:spcBef>
+              <a:spcAft>
+                <a:spcPts val="400"/>
+              </a:spcAft>
+              <a:defRPr sz="1600">
+                <a:solidFill>
+                  <a:srgbClr val="282828"/>
+                </a:solidFill>
+              </a:defRPr>
+            </a:pPr>
+            <a:r>
+              <a:t>   • Anomaly Detection</a:t>
+            </a:r>
+          </a:p>
+          <a:p>
+            <a:pPr>
+              <a:lnSpc>
+                <a:spcPct val="120000"/>
+              </a:lnSpc>
+              <a:spcBef>
+                <a:spcPts val="400"/>
+              </a:spcBef>
+              <a:spcAft>
+                <a:spcPts val="400"/>
+              </a:spcAft>
+              <a:defRPr sz="1600">
+                <a:solidFill>
+                  <a:srgbClr val="282828"/>
+                </a:solidFill>
+              </a:defRPr>
+            </a:pPr>
+            <a:r>
+              <a:t>   • Data Comparison &amp; Forecasting</a:t>
+            </a:r>
+          </a:p>
+          <a:p>
+            <a:pPr>
+              <a:lnSpc>
+                <a:spcPct val="120000"/>
+              </a:lnSpc>
+              <a:spcBef>
+                <a:spcPts val="400"/>
+              </a:spcBef>
+              <a:spcAft>
+                <a:spcPts val="400"/>
+              </a:spcAft>
+              <a:defRPr sz="1600">
+                <a:solidFill>
+                  <a:srgbClr val="282828"/>
+                </a:solidFill>
+              </a:defRPr>
+            </a:pPr>
+            <a:r>
+              <a:t>   • Custom Reports &amp; Dashboard</a:t>
+            </a:r>
+          </a:p>
+          <a:p>
+            <a:pPr>
+              <a:lnSpc>
+                <a:spcPct val="120000"/>
+              </a:lnSpc>
+              <a:spcBef>
+                <a:spcPts val="400"/>
+              </a:spcBef>
+              <a:spcAft>
+                <a:spcPts val="400"/>
+              </a:spcAft>
+              <a:defRPr sz="1600">
+                <a:solidFill>
+                  <a:srgbClr val="282828"/>
+                </a:solidFill>
+              </a:defRPr>
+            </a:pPr>
+            <a:r>
+              <a:t>   • Alert Management System</a:t>
             </a:r>
           </a:p>
         </p:txBody>
@@ -4954,7 +5059,7 @@
               </a:defRPr>
             </a:pPr>
             <a:r>
-              <a:t>Ensuring Accuracy</a:t>
+              <a:t>Ensuring Accuracy &amp; Trust</a:t>
             </a:r>
           </a:p>
         </p:txBody>
@@ -5133,190 +5238,211 @@
               </a:defRPr>
             </a:pPr>
             <a:r>
-              <a:t>🛡️ Data Grounding Layer</a:t>
-            </a:r>
-          </a:p>
-          <a:p>
-            <a:pPr>
-              <a:lnSpc>
-                <a:spcPct val="120000"/>
-              </a:lnSpc>
-              <a:spcBef>
-                <a:spcPts val="400"/>
-              </a:spcBef>
-              <a:spcAft>
-                <a:spcPts val="400"/>
-              </a:spcAft>
-              <a:defRPr sz="1600">
-                <a:solidFill>
-                  <a:srgbClr val="282828"/>
-                </a:solidFill>
-              </a:defRPr>
-            </a:pPr>
-            <a:r>
-              <a:t>   • Checks every number against your actual data</a:t>
-            </a:r>
-          </a:p>
-          <a:p>
-            <a:pPr>
-              <a:lnSpc>
-                <a:spcPct val="120000"/>
-              </a:lnSpc>
-              <a:spcBef>
-                <a:spcPts val="400"/>
-              </a:spcBef>
-              <a:spcAft>
-                <a:spcPts val="400"/>
-              </a:spcAft>
-              <a:defRPr sz="1600">
-                <a:solidFill>
-                  <a:srgbClr val="282828"/>
-                </a:solidFill>
-              </a:defRPr>
-            </a:pPr>
-            <a:r>
-              <a:t>   • Catches incorrect claims immediately</a:t>
-            </a:r>
-          </a:p>
-          <a:p>
-            <a:pPr>
-              <a:lnSpc>
-                <a:spcPct val="120000"/>
-              </a:lnSpc>
-              <a:spcBef>
-                <a:spcPts val="400"/>
-              </a:spcBef>
-              <a:spcAft>
-                <a:spcPts val="400"/>
-              </a:spcAft>
-              <a:defRPr sz="1600">
-                <a:solidFill>
-                  <a:srgbClr val="282828"/>
-                </a:solidFill>
-              </a:defRPr>
-            </a:pPr>
-          </a:p>
-          <a:p>
-            <a:pPr>
-              <a:lnSpc>
-                <a:spcPct val="120000"/>
-              </a:lnSpc>
-              <a:spcBef>
-                <a:spcPts val="400"/>
-              </a:spcBef>
-              <a:spcAft>
-                <a:spcPts val="400"/>
-              </a:spcAft>
-              <a:defRPr sz="1600">
-                <a:solidFill>
-                  <a:srgbClr val="282828"/>
-                </a:solidFill>
-              </a:defRPr>
-            </a:pPr>
-            <a:r>
-              <a:t>Example:</a:t>
-            </a:r>
-          </a:p>
-          <a:p>
-            <a:pPr>
-              <a:lnSpc>
-                <a:spcPct val="120000"/>
-              </a:lnSpc>
-              <a:spcBef>
-                <a:spcPts val="400"/>
-              </a:spcBef>
-              <a:spcAft>
-                <a:spcPts val="400"/>
-              </a:spcAft>
-              <a:defRPr sz="1600">
-                <a:solidFill>
-                  <a:srgbClr val="282828"/>
-                </a:solidFill>
-              </a:defRPr>
-            </a:pPr>
-            <a:r>
-              <a:t>   AI says: 'Revenue grew 500%'</a:t>
-            </a:r>
-          </a:p>
-          <a:p>
-            <a:pPr>
-              <a:lnSpc>
-                <a:spcPct val="120000"/>
-              </a:lnSpc>
-              <a:spcBef>
-                <a:spcPts val="400"/>
-              </a:spcBef>
-              <a:spcAft>
-                <a:spcPts val="400"/>
-              </a:spcAft>
-              <a:defRPr sz="1600">
-                <a:solidFill>
-                  <a:srgbClr val="282828"/>
-                </a:solidFill>
-              </a:defRPr>
-            </a:pPr>
-            <a:r>
-              <a:t>   Actual max: 25%</a:t>
-            </a:r>
-          </a:p>
-          <a:p>
-            <a:pPr>
-              <a:lnSpc>
-                <a:spcPct val="120000"/>
-              </a:lnSpc>
-              <a:spcBef>
-                <a:spcPts val="400"/>
-              </a:spcBef>
-              <a:spcAft>
-                <a:spcPts val="400"/>
-              </a:spcAft>
-              <a:defRPr sz="1600">
-                <a:solidFill>
-                  <a:srgbClr val="282828"/>
-                </a:solidFill>
-              </a:defRPr>
-            </a:pPr>
-            <a:r>
-              <a:t>   System corrects: 'Revenue grew ~20%'</a:t>
-            </a:r>
-          </a:p>
-          <a:p>
-            <a:pPr>
-              <a:lnSpc>
-                <a:spcPct val="120000"/>
-              </a:lnSpc>
-              <a:spcBef>
-                <a:spcPts val="400"/>
-              </a:spcBef>
-              <a:spcAft>
-                <a:spcPts val="400"/>
-              </a:spcAft>
-              <a:defRPr sz="1600">
-                <a:solidFill>
-                  <a:srgbClr val="282828"/>
-                </a:solidFill>
-              </a:defRPr>
-            </a:pPr>
-          </a:p>
-          <a:p>
-            <a:pPr>
-              <a:lnSpc>
-                <a:spcPct val="120000"/>
-              </a:lnSpc>
-              <a:spcBef>
-                <a:spcPts val="400"/>
-              </a:spcBef>
-              <a:spcAft>
-                <a:spcPts val="400"/>
-              </a:spcAft>
-              <a:defRPr sz="1600">
-                <a:solidFill>
-                  <a:srgbClr val="282828"/>
-                </a:solidFill>
-              </a:defRPr>
-            </a:pPr>
-            <a:r>
-              <a:t>Result: 95%+ accuracy, no false claims</a:t>
+              <a:t>🛡️ Multi-Layer Validation System</a:t>
+            </a:r>
+          </a:p>
+          <a:p>
+            <a:pPr>
+              <a:lnSpc>
+                <a:spcPct val="120000"/>
+              </a:lnSpc>
+              <a:spcBef>
+                <a:spcPts val="400"/>
+              </a:spcBef>
+              <a:spcAft>
+                <a:spcPts val="400"/>
+              </a:spcAft>
+              <a:defRPr sz="1600">
+                <a:solidFill>
+                  <a:srgbClr val="282828"/>
+                </a:solidFill>
+              </a:defRPr>
+            </a:pPr>
+            <a:r>
+              <a:t>   • Data grounding: All numbers validated against source data</a:t>
+            </a:r>
+          </a:p>
+          <a:p>
+            <a:pPr>
+              <a:lnSpc>
+                <a:spcPct val="120000"/>
+              </a:lnSpc>
+              <a:spcBef>
+                <a:spcPts val="400"/>
+              </a:spcBef>
+              <a:spcAft>
+                <a:spcPts val="400"/>
+              </a:spcAft>
+              <a:defRPr sz="1600">
+                <a:solidFill>
+                  <a:srgbClr val="282828"/>
+                </a:solidFill>
+              </a:defRPr>
+            </a:pPr>
+            <a:r>
+              <a:t>   • Statistical validation: Cross-checked with multiple methods</a:t>
+            </a:r>
+          </a:p>
+          <a:p>
+            <a:pPr>
+              <a:lnSpc>
+                <a:spcPct val="120000"/>
+              </a:lnSpc>
+              <a:spcBef>
+                <a:spcPts val="400"/>
+              </a:spcBef>
+              <a:spcAft>
+                <a:spcPts val="400"/>
+              </a:spcAft>
+              <a:defRPr sz="1600">
+                <a:solidFill>
+                  <a:srgbClr val="282828"/>
+                </a:solidFill>
+              </a:defRPr>
+            </a:pPr>
+            <a:r>
+              <a:t>   • Anomaly verification: Automated detection and flagging</a:t>
+            </a:r>
+          </a:p>
+          <a:p>
+            <a:pPr>
+              <a:lnSpc>
+                <a:spcPct val="120000"/>
+              </a:lnSpc>
+              <a:spcBef>
+                <a:spcPts val="400"/>
+              </a:spcBef>
+              <a:spcAft>
+                <a:spcPts val="400"/>
+              </a:spcAft>
+              <a:defRPr sz="1600">
+                <a:solidFill>
+                  <a:srgbClr val="282828"/>
+                </a:solidFill>
+              </a:defRPr>
+            </a:pPr>
+          </a:p>
+          <a:p>
+            <a:pPr>
+              <a:lnSpc>
+                <a:spcPct val="120000"/>
+              </a:lnSpc>
+              <a:spcBef>
+                <a:spcPts val="400"/>
+              </a:spcBef>
+              <a:spcAft>
+                <a:spcPts val="400"/>
+              </a:spcAft>
+              <a:defRPr sz="1600">
+                <a:solidFill>
+                  <a:srgbClr val="282828"/>
+                </a:solidFill>
+              </a:defRPr>
+            </a:pPr>
+            <a:r>
+              <a:t>Quality Assurance:</a:t>
+            </a:r>
+          </a:p>
+          <a:p>
+            <a:pPr>
+              <a:lnSpc>
+                <a:spcPct val="120000"/>
+              </a:lnSpc>
+              <a:spcBef>
+                <a:spcPts val="400"/>
+              </a:spcBef>
+              <a:spcAft>
+                <a:spcPts val="400"/>
+              </a:spcAft>
+              <a:defRPr sz="1600">
+                <a:solidFill>
+                  <a:srgbClr val="282828"/>
+                </a:solidFill>
+              </a:defRPr>
+            </a:pPr>
+            <a:r>
+              <a:t>   • 95%+ accuracy rate in insights</a:t>
+            </a:r>
+          </a:p>
+          <a:p>
+            <a:pPr>
+              <a:lnSpc>
+                <a:spcPct val="120000"/>
+              </a:lnSpc>
+              <a:spcBef>
+                <a:spcPts val="400"/>
+              </a:spcBef>
+              <a:spcAft>
+                <a:spcPts val="400"/>
+              </a:spcAft>
+              <a:defRPr sz="1600">
+                <a:solidFill>
+                  <a:srgbClr val="282828"/>
+                </a:solidFill>
+              </a:defRPr>
+            </a:pPr>
+            <a:r>
+              <a:t>   • Real-time data validation</a:t>
+            </a:r>
+          </a:p>
+          <a:p>
+            <a:pPr>
+              <a:lnSpc>
+                <a:spcPct val="120000"/>
+              </a:lnSpc>
+              <a:spcBef>
+                <a:spcPts val="400"/>
+              </a:spcBef>
+              <a:spcAft>
+                <a:spcPts val="400"/>
+              </a:spcAft>
+              <a:defRPr sz="1600">
+                <a:solidFill>
+                  <a:srgbClr val="282828"/>
+                </a:solidFill>
+              </a:defRPr>
+            </a:pPr>
+            <a:r>
+              <a:t>   • Transparent methodology</a:t>
+            </a:r>
+          </a:p>
+          <a:p>
+            <a:pPr>
+              <a:lnSpc>
+                <a:spcPct val="120000"/>
+              </a:lnSpc>
+              <a:spcBef>
+                <a:spcPts val="400"/>
+              </a:spcBef>
+              <a:spcAft>
+                <a:spcPts val="400"/>
+              </a:spcAft>
+              <a:defRPr sz="1600">
+                <a:solidFill>
+                  <a:srgbClr val="282828"/>
+                </a:solidFill>
+              </a:defRPr>
+            </a:pPr>
+          </a:p>
+          <a:p>
+            <a:pPr>
+              <a:lnSpc>
+                <a:spcPct val="120000"/>
+              </a:lnSpc>
+              <a:spcBef>
+                <a:spcPts val="400"/>
+              </a:spcBef>
+              <a:spcAft>
+                <a:spcPts val="400"/>
+              </a:spcAft>
+              <a:defRPr sz="1600">
+                <a:solidFill>
+                  <a:srgbClr val="282828"/>
+                </a:solidFill>
+              </a:defRPr>
+            </a:pPr>
+            <a:r>
+              <a:t>Result: Trustworthy, reliable, and actionable insights</a:t>
             </a:r>
           </a:p>
         </p:txBody>
@@ -5618,190 +5744,292 @@
               </a:defRPr>
             </a:pPr>
             <a:r>
-              <a:t>⏱️ Time Savings: 80% less manual analysis</a:t>
-            </a:r>
-          </a:p>
-          <a:p>
-            <a:pPr>
-              <a:lnSpc>
-                <a:spcPct val="120000"/>
-              </a:lnSpc>
-              <a:spcBef>
-                <a:spcPts val="400"/>
-              </a:spcBef>
-              <a:spcAft>
-                <a:spcPts val="400"/>
-              </a:spcAft>
-              <a:defRPr sz="1600">
-                <a:solidFill>
-                  <a:srgbClr val="282828"/>
-                </a:solidFill>
-              </a:defRPr>
-            </a:pPr>
-            <a:r>
-              <a:t>   • From hours to minutes</a:t>
-            </a:r>
-          </a:p>
-          <a:p>
-            <a:pPr>
-              <a:lnSpc>
-                <a:spcPct val="120000"/>
-              </a:lnSpc>
-              <a:spcBef>
-                <a:spcPts val="400"/>
-              </a:spcBef>
-              <a:spcAft>
-                <a:spcPts val="400"/>
-              </a:spcAft>
-              <a:defRPr sz="1600">
-                <a:solidFill>
-                  <a:srgbClr val="282828"/>
-                </a:solidFill>
-              </a:defRPr>
-            </a:pPr>
-          </a:p>
-          <a:p>
-            <a:pPr>
-              <a:lnSpc>
-                <a:spcPct val="120000"/>
-              </a:lnSpc>
-              <a:spcBef>
-                <a:spcPts val="400"/>
-              </a:spcBef>
-              <a:spcAft>
-                <a:spcPts val="400"/>
-              </a:spcAft>
-              <a:defRPr sz="1600">
-                <a:solidFill>
-                  <a:srgbClr val="282828"/>
-                </a:solidFill>
-              </a:defRPr>
-            </a:pPr>
-            <a:r>
-              <a:t>💡 Better Decisions: Real-time insights</a:t>
-            </a:r>
-          </a:p>
-          <a:p>
-            <a:pPr>
-              <a:lnSpc>
-                <a:spcPct val="120000"/>
-              </a:lnSpc>
-              <a:spcBef>
-                <a:spcPts val="400"/>
-              </a:spcBef>
-              <a:spcAft>
-                <a:spcPts val="400"/>
-              </a:spcAft>
-              <a:defRPr sz="1600">
-                <a:solidFill>
-                  <a:srgbClr val="282828"/>
-                </a:solidFill>
-              </a:defRPr>
-            </a:pPr>
-            <a:r>
-              <a:t>   • Data-driven strategy</a:t>
-            </a:r>
-          </a:p>
-          <a:p>
-            <a:pPr>
-              <a:lnSpc>
-                <a:spcPct val="120000"/>
-              </a:lnSpc>
-              <a:spcBef>
-                <a:spcPts val="400"/>
-              </a:spcBef>
-              <a:spcAft>
-                <a:spcPts val="400"/>
-              </a:spcAft>
-              <a:defRPr sz="1600">
-                <a:solidFill>
-                  <a:srgbClr val="282828"/>
-                </a:solidFill>
-              </a:defRPr>
-            </a:pPr>
-            <a:r>
-              <a:t>   • Faster response to problems</a:t>
-            </a:r>
-          </a:p>
-          <a:p>
-            <a:pPr>
-              <a:lnSpc>
-                <a:spcPct val="120000"/>
-              </a:lnSpc>
-              <a:spcBef>
-                <a:spcPts val="400"/>
-              </a:spcBef>
-              <a:spcAft>
-                <a:spcPts val="400"/>
-              </a:spcAft>
-              <a:defRPr sz="1600">
-                <a:solidFill>
-                  <a:srgbClr val="282828"/>
-                </a:solidFill>
-              </a:defRPr>
-            </a:pPr>
-          </a:p>
-          <a:p>
-            <a:pPr>
-              <a:lnSpc>
-                <a:spcPct val="120000"/>
-              </a:lnSpc>
-              <a:spcBef>
-                <a:spcPts val="400"/>
-              </a:spcBef>
-              <a:spcAft>
-                <a:spcPts val="400"/>
-              </a:spcAft>
-              <a:defRPr sz="1600">
-                <a:solidFill>
-                  <a:srgbClr val="282828"/>
-                </a:solidFill>
-              </a:defRPr>
-            </a:pPr>
-            <a:r>
-              <a:t>💰 Revenue Growth: Optimize pricing and promotions</a:t>
-            </a:r>
-          </a:p>
-          <a:p>
-            <a:pPr>
-              <a:lnSpc>
-                <a:spcPct val="120000"/>
-              </a:lnSpc>
-              <a:spcBef>
-                <a:spcPts val="400"/>
-              </a:spcBef>
-              <a:spcAft>
-                <a:spcPts val="400"/>
-              </a:spcAft>
-              <a:defRPr sz="1600">
-                <a:solidFill>
-                  <a:srgbClr val="282828"/>
-                </a:solidFill>
-              </a:defRPr>
-            </a:pPr>
-            <a:r>
-              <a:t>   • Scenario analysis before decisions</a:t>
-            </a:r>
-          </a:p>
-          <a:p>
-            <a:pPr>
-              <a:lnSpc>
-                <a:spcPct val="120000"/>
-              </a:lnSpc>
-              <a:spcBef>
-                <a:spcPts val="400"/>
-              </a:spcBef>
-              <a:spcAft>
-                <a:spcPts val="400"/>
-              </a:spcAft>
-              <a:defRPr sz="1600">
-                <a:solidFill>
-                  <a:srgbClr val="282828"/>
-                </a:solidFill>
-              </a:defRPr>
-            </a:pPr>
-            <a:r>
-              <a:t>   • Reduce losses from bad choices</a:t>
+              <a:t>⏱️ Time Savings: 80% reduction in analysis time</a:t>
+            </a:r>
+          </a:p>
+          <a:p>
+            <a:pPr>
+              <a:lnSpc>
+                <a:spcPct val="120000"/>
+              </a:lnSpc>
+              <a:spcBef>
+                <a:spcPts val="400"/>
+              </a:spcBef>
+              <a:spcAft>
+                <a:spcPts val="400"/>
+              </a:spcAft>
+              <a:defRPr sz="1600">
+                <a:solidFill>
+                  <a:srgbClr val="282828"/>
+                </a:solidFill>
+              </a:defRPr>
+            </a:pPr>
+            <a:r>
+              <a:t>   • Automated insights generation</a:t>
+            </a:r>
+          </a:p>
+          <a:p>
+            <a:pPr>
+              <a:lnSpc>
+                <a:spcPct val="120000"/>
+              </a:lnSpc>
+              <a:spcBef>
+                <a:spcPts val="400"/>
+              </a:spcBef>
+              <a:spcAft>
+                <a:spcPts val="400"/>
+              </a:spcAft>
+              <a:defRPr sz="1600">
+                <a:solidFill>
+                  <a:srgbClr val="282828"/>
+                </a:solidFill>
+              </a:defRPr>
+            </a:pPr>
+            <a:r>
+              <a:t>   • Real-time monitoring and alerts</a:t>
+            </a:r>
+          </a:p>
+          <a:p>
+            <a:pPr>
+              <a:lnSpc>
+                <a:spcPct val="120000"/>
+              </a:lnSpc>
+              <a:spcBef>
+                <a:spcPts val="400"/>
+              </a:spcBef>
+              <a:spcAft>
+                <a:spcPts val="400"/>
+              </a:spcAft>
+              <a:defRPr sz="1600">
+                <a:solidFill>
+                  <a:srgbClr val="282828"/>
+                </a:solidFill>
+              </a:defRPr>
+            </a:pPr>
+          </a:p>
+          <a:p>
+            <a:pPr>
+              <a:lnSpc>
+                <a:spcPct val="120000"/>
+              </a:lnSpc>
+              <a:spcBef>
+                <a:spcPts val="400"/>
+              </a:spcBef>
+              <a:spcAft>
+                <a:spcPts val="400"/>
+              </a:spcAft>
+              <a:defRPr sz="1600">
+                <a:solidFill>
+                  <a:srgbClr val="282828"/>
+                </a:solidFill>
+              </a:defRPr>
+            </a:pPr>
+            <a:r>
+              <a:t>💡 Better Decisions: Data-driven intelligence</a:t>
+            </a:r>
+          </a:p>
+          <a:p>
+            <a:pPr>
+              <a:lnSpc>
+                <a:spcPct val="120000"/>
+              </a:lnSpc>
+              <a:spcBef>
+                <a:spcPts val="400"/>
+              </a:spcBef>
+              <a:spcAft>
+                <a:spcPts val="400"/>
+              </a:spcAft>
+              <a:defRPr sz="1600">
+                <a:solidFill>
+                  <a:srgbClr val="282828"/>
+                </a:solidFill>
+              </a:defRPr>
+            </a:pPr>
+            <a:r>
+              <a:t>   • Comprehensive analytics suite</a:t>
+            </a:r>
+          </a:p>
+          <a:p>
+            <a:pPr>
+              <a:lnSpc>
+                <a:spcPct val="120000"/>
+              </a:lnSpc>
+              <a:spcBef>
+                <a:spcPts val="400"/>
+              </a:spcBef>
+              <a:spcAft>
+                <a:spcPts val="400"/>
+              </a:spcAft>
+              <a:defRPr sz="1600">
+                <a:solidFill>
+                  <a:srgbClr val="282828"/>
+                </a:solidFill>
+              </a:defRPr>
+            </a:pPr>
+            <a:r>
+              <a:t>   • Predictive forecasting capabilities</a:t>
+            </a:r>
+          </a:p>
+          <a:p>
+            <a:pPr>
+              <a:lnSpc>
+                <a:spcPct val="120000"/>
+              </a:lnSpc>
+              <a:spcBef>
+                <a:spcPts val="400"/>
+              </a:spcBef>
+              <a:spcAft>
+                <a:spcPts val="400"/>
+              </a:spcAft>
+              <a:defRPr sz="1600">
+                <a:solidFill>
+                  <a:srgbClr val="282828"/>
+                </a:solidFill>
+              </a:defRPr>
+            </a:pPr>
+          </a:p>
+          <a:p>
+            <a:pPr>
+              <a:lnSpc>
+                <a:spcPct val="120000"/>
+              </a:lnSpc>
+              <a:spcBef>
+                <a:spcPts val="400"/>
+              </a:spcBef>
+              <a:spcAft>
+                <a:spcPts val="400"/>
+              </a:spcAft>
+              <a:defRPr sz="1600">
+                <a:solidFill>
+                  <a:srgbClr val="282828"/>
+                </a:solidFill>
+              </a:defRPr>
+            </a:pPr>
+            <a:r>
+              <a:t>💰 Revenue Growth: Strategic optimization</a:t>
+            </a:r>
+          </a:p>
+          <a:p>
+            <a:pPr>
+              <a:lnSpc>
+                <a:spcPct val="120000"/>
+              </a:lnSpc>
+              <a:spcBef>
+                <a:spcPts val="400"/>
+              </a:spcBef>
+              <a:spcAft>
+                <a:spcPts val="400"/>
+              </a:spcAft>
+              <a:defRPr sz="1600">
+                <a:solidFill>
+                  <a:srgbClr val="282828"/>
+                </a:solidFill>
+              </a:defRPr>
+            </a:pPr>
+            <a:r>
+              <a:t>   • Anomaly detection for risk mitigation</a:t>
+            </a:r>
+          </a:p>
+          <a:p>
+            <a:pPr>
+              <a:lnSpc>
+                <a:spcPct val="120000"/>
+              </a:lnSpc>
+              <a:spcBef>
+                <a:spcPts val="400"/>
+              </a:spcBef>
+              <a:spcAft>
+                <a:spcPts val="400"/>
+              </a:spcAft>
+              <a:defRPr sz="1600">
+                <a:solidFill>
+                  <a:srgbClr val="282828"/>
+                </a:solidFill>
+              </a:defRPr>
+            </a:pPr>
+            <a:r>
+              <a:t>   • Performance comparison for optimization</a:t>
+            </a:r>
+          </a:p>
+          <a:p>
+            <a:pPr>
+              <a:lnSpc>
+                <a:spcPct val="120000"/>
+              </a:lnSpc>
+              <a:spcBef>
+                <a:spcPts val="400"/>
+              </a:spcBef>
+              <a:spcAft>
+                <a:spcPts val="400"/>
+              </a:spcAft>
+              <a:defRPr sz="1600">
+                <a:solidFill>
+                  <a:srgbClr val="282828"/>
+                </a:solidFill>
+              </a:defRPr>
+            </a:pPr>
+          </a:p>
+          <a:p>
+            <a:pPr>
+              <a:lnSpc>
+                <a:spcPct val="120000"/>
+              </a:lnSpc>
+              <a:spcBef>
+                <a:spcPts val="400"/>
+              </a:spcBef>
+              <a:spcAft>
+                <a:spcPts val="400"/>
+              </a:spcAft>
+              <a:defRPr sz="1600">
+                <a:solidFill>
+                  <a:srgbClr val="282828"/>
+                </a:solidFill>
+              </a:defRPr>
+            </a:pPr>
+            <a:r>
+              <a:t>📊 Operational Excellence</a:t>
+            </a:r>
+          </a:p>
+          <a:p>
+            <a:pPr>
+              <a:lnSpc>
+                <a:spcPct val="120000"/>
+              </a:lnSpc>
+              <a:spcBef>
+                <a:spcPts val="400"/>
+              </a:spcBef>
+              <a:spcAft>
+                <a:spcPts val="400"/>
+              </a:spcAft>
+              <a:defRPr sz="1600">
+                <a:solidFill>
+                  <a:srgbClr val="282828"/>
+                </a:solidFill>
+              </a:defRPr>
+            </a:pPr>
+            <a:r>
+              <a:t>   • Custom reports for stakeholders</a:t>
+            </a:r>
+          </a:p>
+          <a:p>
+            <a:pPr>
+              <a:lnSpc>
+                <a:spcPct val="120000"/>
+              </a:lnSpc>
+              <a:spcBef>
+                <a:spcPts val="400"/>
+              </a:spcBef>
+              <a:spcAft>
+                <a:spcPts val="400"/>
+              </a:spcAft>
+              <a:defRPr sz="1600">
+                <a:solidFill>
+                  <a:srgbClr val="282828"/>
+                </a:solidFill>
+              </a:defRPr>
+            </a:pPr>
+            <a:r>
+              <a:t>   • Dashboard for executive visibility</a:t>
             </a:r>
           </a:p>
         </p:txBody>
@@ -6038,7 +6266,7 @@
                 <a:gridCol w="4023360"/>
                 <a:gridCol w="4023360"/>
               </a:tblGrid>
-              <a:tr h="883920">
+              <a:tr h="757645">
                 <a:tc>
                   <a:txBody>
                     <a:bodyPr/>
@@ -6082,7 +6310,7 @@
                   </a:tcPr>
                 </a:tc>
               </a:tr>
-              <a:tr h="883920">
+              <a:tr h="757645">
                 <a:tc>
                   <a:txBody>
                     <a:bodyPr/>
@@ -6094,7 +6322,7 @@
                             <a:srgbClr val="282828"/>
                           </a:solidFill>
                         </a:rPr>
-                        <a:t>AI Models</a:t>
+                        <a:t>AI/ML</a:t>
                       </a:r>
                     </a:p>
                   </a:txBody>
@@ -6115,7 +6343,7 @@
                             <a:srgbClr val="282828"/>
                           </a:solidFill>
                         </a:rPr>
-                        <a:t>GPT-4, Claude, Azure OpenAI</a:t>
+                        <a:t>GPT-4, Claude, Azure OpenAI, Scikit-learn</a:t>
                       </a:r>
                     </a:p>
                   </a:txBody>
@@ -6126,7 +6354,7 @@
                   </a:tcPr>
                 </a:tc>
               </a:tr>
-              <a:tr h="883920">
+              <a:tr h="757645">
                 <a:tc>
                   <a:txBody>
                     <a:bodyPr/>
@@ -6159,7 +6387,7 @@
                             <a:srgbClr val="282828"/>
                           </a:solidFill>
                         </a:rPr>
-                        <a:t>Python, Pandas, NumPy</a:t>
+                        <a:t>Python, Pandas, NumPy, PyArrow</a:t>
                       </a:r>
                     </a:p>
                   </a:txBody>
@@ -6170,7 +6398,7 @@
                   </a:tcPr>
                 </a:tc>
               </a:tr>
-              <a:tr h="883920">
+              <a:tr h="757645">
                 <a:tc>
                   <a:txBody>
                     <a:bodyPr/>
@@ -6203,7 +6431,7 @@
                             <a:srgbClr val="282828"/>
                           </a:solidFill>
                         </a:rPr>
-                        <a:t>Scikit-learn, Statistical models</a:t>
+                        <a:t>Isolation Forest, Statistical models</a:t>
                       </a:r>
                     </a:p>
                   </a:txBody>
@@ -6214,7 +6442,7 @@
                   </a:tcPr>
                 </a:tc>
               </a:tr>
-              <a:tr h="883920">
+              <a:tr h="757645">
                 <a:tc>
                   <a:txBody>
                     <a:bodyPr/>
@@ -6226,7 +6454,7 @@
                             <a:srgbClr val="282828"/>
                           </a:solidFill>
                         </a:rPr>
-                        <a:t>Interface</a:t>
+                        <a:t>Visualization</a:t>
                       </a:r>
                     </a:p>
                   </a:txBody>
@@ -6247,7 +6475,7 @@
                             <a:srgbClr val="282828"/>
                           </a:solidFill>
                         </a:rPr>
-                        <a:t>Streamlit (web), CLI (command-line)</a:t>
+                        <a:t>Plotly, Interactive charts</a:t>
                       </a:r>
                     </a:p>
                   </a:txBody>
@@ -6258,7 +6486,7 @@
                   </a:tcPr>
                 </a:tc>
               </a:tr>
-              <a:tr h="883920">
+              <a:tr h="757645">
                 <a:tc>
                   <a:txBody>
                     <a:bodyPr/>
@@ -6270,7 +6498,7 @@
                             <a:srgbClr val="282828"/>
                           </a:solidFill>
                         </a:rPr>
-                        <a:t>Deployment</a:t>
+                        <a:t>Interface</a:t>
                       </a:r>
                     </a:p>
                   </a:txBody>
@@ -6291,13 +6519,57 @@
                             <a:srgbClr val="282828"/>
                           </a:solidFill>
                         </a:rPr>
-                        <a:t>Cloud-ready, Docker support</a:t>
+                        <a:t>Streamlit (modern web dashboard)</a:t>
                       </a:r>
                     </a:p>
                   </a:txBody>
                   <a:tcPr>
                     <a:solidFill>
                       <a:srgbClr val="FFFFFF"/>
+                    </a:solidFill>
+                  </a:tcPr>
+                </a:tc>
+              </a:tr>
+              <a:tr h="757650">
+                <a:tc>
+                  <a:txBody>
+                    <a:bodyPr/>
+                    <a:lstStyle/>
+                    <a:p>
+                      <a:r>
+                        <a:rPr sz="1000">
+                          <a:solidFill>
+                            <a:srgbClr val="282828"/>
+                          </a:solidFill>
+                        </a:rPr>
+                        <a:t>Deployment</a:t>
+                      </a:r>
+                    </a:p>
+                  </a:txBody>
+                  <a:tcPr>
+                    <a:solidFill>
+                      <a:srgbClr val="F5FAFF"/>
+                    </a:solidFill>
+                  </a:tcPr>
+                </a:tc>
+                <a:tc>
+                  <a:txBody>
+                    <a:bodyPr/>
+                    <a:lstStyle/>
+                    <a:p>
+                      <a:r>
+                        <a:rPr sz="1000">
+                          <a:solidFill>
+                            <a:srgbClr val="282828"/>
+                          </a:solidFill>
+                        </a:rPr>
+                        <a:t>Cloud-ready, scalable architecture</a:t>
+                      </a:r>
+                    </a:p>
+                  </a:txBody>
+                  <a:tcPr>
+                    <a:solidFill>
+                      <a:srgbClr val="F5FAFF"/>
                     </a:solidFill>
                   </a:tcPr>
                 </a:tc>
@@ -6882,7 +7154,7 @@
               </a:defRPr>
             </a:pPr>
             <a:r>
-              <a:t>Performance Metrics</a:t>
+              <a:t>Platform Performance</a:t>
             </a:r>
           </a:p>
         </p:txBody>
@@ -6999,7 +7271,7 @@
                 <a:gridCol w="4023360"/>
                 <a:gridCol w="4023360"/>
               </a:tblGrid>
-              <a:tr h="757645">
+              <a:tr h="662940">
                 <a:tc>
                   <a:txBody>
                     <a:bodyPr/>
@@ -7011,7 +7283,7 @@
                             <a:srgbClr val="FFFFFF"/>
                           </a:solidFill>
                         </a:rPr>
-                        <a:t>Metric</a:t>
+                        <a:t>Performance Metric</a:t>
                       </a:r>
                     </a:p>
                   </a:txBody>
@@ -7032,7 +7304,7 @@
                             <a:srgbClr val="FFFFFF"/>
                           </a:solidFill>
                         </a:rPr>
-                        <a:t>Performance</a:t>
+                        <a:t>Specification</a:t>
                       </a:r>
                     </a:p>
                   </a:txBody>
@@ -7043,7 +7315,7 @@
                   </a:tcPr>
                 </a:tc>
               </a:tr>
-              <a:tr h="757645">
+              <a:tr h="662940">
                 <a:tc>
                   <a:txBody>
                     <a:bodyPr/>
@@ -7087,7 +7359,7 @@
                   </a:tcPr>
                 </a:tc>
               </a:tr>
-              <a:tr h="757645">
+              <a:tr h="662940">
                 <a:tc>
                   <a:txBody>
                     <a:bodyPr/>
@@ -7099,7 +7371,7 @@
                             <a:srgbClr val="282828"/>
                           </a:solidFill>
                         </a:rPr>
-                        <a:t>Response Time (New Query)</a:t>
+                        <a:t>Response Time (New Analysis)</a:t>
                       </a:r>
                     </a:p>
                   </a:txBody>
@@ -7131,7 +7403,7 @@
                   </a:tcPr>
                 </a:tc>
               </a:tr>
-              <a:tr h="757645">
+              <a:tr h="662940">
                 <a:tc>
                   <a:txBody>
                     <a:bodyPr/>
@@ -7143,7 +7415,7 @@
                             <a:srgbClr val="282828"/>
                           </a:solidFill>
                         </a:rPr>
-                        <a:t>Accuracy</a:t>
+                        <a:t>Data Accuracy</a:t>
                       </a:r>
                     </a:p>
                   </a:txBody>
@@ -7164,7 +7436,7 @@
                             <a:srgbClr val="282828"/>
                           </a:solidFill>
                         </a:rPr>
-                        <a:t>95%+ with data grounding</a:t>
+                        <a:t>95%+ with validation</a:t>
                       </a:r>
                     </a:p>
                   </a:txBody>
@@ -7175,7 +7447,7 @@
                   </a:tcPr>
                 </a:tc>
               </a:tr>
-              <a:tr h="757645">
+              <a:tr h="662940">
                 <a:tc>
                   <a:txBody>
                     <a:bodyPr/>
@@ -7187,7 +7459,7 @@
                             <a:srgbClr val="282828"/>
                           </a:solidFill>
                         </a:rPr>
-                        <a:t>Data Size</a:t>
+                        <a:t>Data Capacity</a:t>
                       </a:r>
                     </a:p>
                   </a:txBody>
@@ -7208,7 +7480,7 @@
                             <a:srgbClr val="282828"/>
                           </a:solidFill>
                         </a:rPr>
-                        <a:t>Handles 1M+ rows easily</a:t>
+                        <a:t>1M+ rows, scalable</a:t>
                       </a:r>
                     </a:p>
                   </a:txBody>
@@ -7219,7 +7491,7 @@
                   </a:tcPr>
                 </a:tc>
               </a:tr>
-              <a:tr h="757645">
+              <a:tr h="662940">
                 <a:tc>
                   <a:txBody>
                     <a:bodyPr/>
@@ -7231,7 +7503,7 @@
                             <a:srgbClr val="282828"/>
                           </a:solidFill>
                         </a:rPr>
-                        <a:t>Concurrent Users</a:t>
+                        <a:t>Anomaly Detection Speed</a:t>
                       </a:r>
                     </a:p>
                   </a:txBody>
@@ -7252,7 +7524,7 @@
                             <a:srgbClr val="282828"/>
                           </a:solidFill>
                         </a:rPr>
-                        <a:t>Unlimited</a:t>
+                        <a:t>Real-time processing</a:t>
                       </a:r>
                     </a:p>
                   </a:txBody>
@@ -7263,7 +7535,7 @@
                   </a:tcPr>
                 </a:tc>
               </a:tr>
-              <a:tr h="757650">
+              <a:tr h="662940">
                 <a:tc>
                   <a:txBody>
                     <a:bodyPr/>
@@ -7275,7 +7547,7 @@
                             <a:srgbClr val="282828"/>
                           </a:solidFill>
                         </a:rPr>
-                        <a:t>Uptime</a:t>
+                        <a:t>Concurrent Users</a:t>
                       </a:r>
                     </a:p>
                   </a:txBody>
@@ -7296,13 +7568,57 @@
                             <a:srgbClr val="282828"/>
                           </a:solidFill>
                         </a:rPr>
-                        <a:t>99%+ availability</a:t>
+                        <a:t>Unlimited</a:t>
                       </a:r>
                     </a:p>
                   </a:txBody>
                   <a:tcPr>
                     <a:solidFill>
                       <a:srgbClr val="F5FAFF"/>
+                    </a:solidFill>
+                  </a:tcPr>
+                </a:tc>
+              </a:tr>
+              <a:tr h="662940">
+                <a:tc>
+                  <a:txBody>
+                    <a:bodyPr/>
+                    <a:lstStyle/>
+                    <a:p>
+                      <a:r>
+                        <a:rPr sz="1000">
+                          <a:solidFill>
+                            <a:srgbClr val="282828"/>
+                          </a:solidFill>
+                        </a:rPr>
+                        <a:t>System Availability</a:t>
+                      </a:r>
+                    </a:p>
+                  </a:txBody>
+                  <a:tcPr>
+                    <a:solidFill>
+                      <a:srgbClr val="FFFFFF"/>
+                    </a:solidFill>
+                  </a:tcPr>
+                </a:tc>
+                <a:tc>
+                  <a:txBody>
+                    <a:bodyPr/>
+                    <a:lstStyle/>
+                    <a:p>
+                      <a:r>
+                        <a:rPr sz="1000">
+                          <a:solidFill>
+                            <a:srgbClr val="282828"/>
+                          </a:solidFill>
+                        </a:rPr>
+                        <a:t>99%+ uptime</a:t>
+                      </a:r>
+                    </a:p>
+                  </a:txBody>
+                  <a:tcPr>
+                    <a:solidFill>
+                      <a:srgbClr val="FFFFFF"/>
                     </a:solidFill>
                   </a:tcPr>
                 </a:tc>
@@ -7429,7 +7745,7 @@
               </a:defRPr>
             </a:pPr>
             <a:r>
-              <a:t>Coming Soon</a:t>
+              <a:t>Future Enhancements</a:t>
             </a:r>
           </a:p>
         </p:txBody>
@@ -7608,112 +7924,268 @@
               </a:defRPr>
             </a:pPr>
             <a:r>
-              <a:t>• Real-time data streaming (live updates)</a:t>
-            </a:r>
-          </a:p>
-          <a:p>
-            <a:pPr>
-              <a:lnSpc>
-                <a:spcPct val="120000"/>
-              </a:lnSpc>
-              <a:spcBef>
-                <a:spcPts val="400"/>
-              </a:spcBef>
-              <a:spcAft>
-                <a:spcPts val="400"/>
-              </a:spcAft>
-              <a:defRPr sz="1600">
-                <a:solidFill>
-                  <a:srgbClr val="282828"/>
-                </a:solidFill>
-              </a:defRPr>
-            </a:pPr>
-            <a:r>
-              <a:t>• Predictive forecasting (AI predicts future trends)</a:t>
-            </a:r>
-          </a:p>
-          <a:p>
-            <a:pPr>
-              <a:lnSpc>
-                <a:spcPct val="120000"/>
-              </a:lnSpc>
-              <a:spcBef>
-                <a:spcPts val="400"/>
-              </a:spcBef>
-              <a:spcAft>
-                <a:spcPts val="400"/>
-              </a:spcAft>
-              <a:defRPr sz="1600">
-                <a:solidFill>
-                  <a:srgbClr val="282828"/>
-                </a:solidFill>
-              </a:defRPr>
-            </a:pPr>
-            <a:r>
-              <a:t>• Mobile app for on-the-go access</a:t>
-            </a:r>
-          </a:p>
-          <a:p>
-            <a:pPr>
-              <a:lnSpc>
-                <a:spcPct val="120000"/>
-              </a:lnSpc>
-              <a:spcBef>
-                <a:spcPts val="400"/>
-              </a:spcBef>
-              <a:spcAft>
-                <a:spcPts val="400"/>
-              </a:spcAft>
-              <a:defRPr sz="1600">
-                <a:solidFill>
-                  <a:srgbClr val="282828"/>
-                </a:solidFill>
-              </a:defRPr>
-            </a:pPr>
-            <a:r>
-              <a:t>• Integration with BI tools (Tableau, Power BI)</a:t>
-            </a:r>
-          </a:p>
-          <a:p>
-            <a:pPr>
-              <a:lnSpc>
-                <a:spcPct val="120000"/>
-              </a:lnSpc>
-              <a:spcBef>
-                <a:spcPts val="400"/>
-              </a:spcBef>
-              <a:spcAft>
-                <a:spcPts val="400"/>
-              </a:spcAft>
-              <a:defRPr sz="1600">
-                <a:solidFill>
-                  <a:srgbClr val="282828"/>
-                </a:solidFill>
-              </a:defRPr>
-            </a:pPr>
-            <a:r>
-              <a:t>• Role-based access control for teams</a:t>
-            </a:r>
-          </a:p>
-          <a:p>
-            <a:pPr>
-              <a:lnSpc>
-                <a:spcPct val="120000"/>
-              </a:lnSpc>
-              <a:spcBef>
-                <a:spcPts val="400"/>
-              </a:spcBef>
-              <a:spcAft>
-                <a:spcPts val="400"/>
-              </a:spcAft>
-              <a:defRPr sz="1600">
-                <a:solidFill>
-                  <a:srgbClr val="282828"/>
-                </a:solidFill>
-              </a:defRPr>
-            </a:pPr>
-            <a:r>
-              <a:t>• Compliance and audit logging</a:t>
+              <a:t>📡 Real-Time Data Integration</a:t>
+            </a:r>
+          </a:p>
+          <a:p>
+            <a:pPr>
+              <a:lnSpc>
+                <a:spcPct val="120000"/>
+              </a:lnSpc>
+              <a:spcBef>
+                <a:spcPts val="400"/>
+              </a:spcBef>
+              <a:spcAft>
+                <a:spcPts val="400"/>
+              </a:spcAft>
+              <a:defRPr sz="1600">
+                <a:solidFill>
+                  <a:srgbClr val="282828"/>
+                </a:solidFill>
+              </a:defRPr>
+            </a:pPr>
+            <a:r>
+              <a:t>   Live data streaming and automatic updates</a:t>
+            </a:r>
+          </a:p>
+          <a:p>
+            <a:pPr>
+              <a:lnSpc>
+                <a:spcPct val="120000"/>
+              </a:lnSpc>
+              <a:spcBef>
+                <a:spcPts val="400"/>
+              </a:spcBef>
+              <a:spcAft>
+                <a:spcPts val="400"/>
+              </a:spcAft>
+              <a:defRPr sz="1600">
+                <a:solidFill>
+                  <a:srgbClr val="282828"/>
+                </a:solidFill>
+              </a:defRPr>
+            </a:pPr>
+          </a:p>
+          <a:p>
+            <a:pPr>
+              <a:lnSpc>
+                <a:spcPct val="120000"/>
+              </a:lnSpc>
+              <a:spcBef>
+                <a:spcPts val="400"/>
+              </a:spcBef>
+              <a:spcAft>
+                <a:spcPts val="400"/>
+              </a:spcAft>
+              <a:defRPr sz="1600">
+                <a:solidFill>
+                  <a:srgbClr val="282828"/>
+                </a:solidFill>
+              </a:defRPr>
+            </a:pPr>
+            <a:r>
+              <a:t>🤖 Advanced AI Capabilities</a:t>
+            </a:r>
+          </a:p>
+          <a:p>
+            <a:pPr>
+              <a:lnSpc>
+                <a:spcPct val="120000"/>
+              </a:lnSpc>
+              <a:spcBef>
+                <a:spcPts val="400"/>
+              </a:spcBef>
+              <a:spcAft>
+                <a:spcPts val="400"/>
+              </a:spcAft>
+              <a:defRPr sz="1600">
+                <a:solidFill>
+                  <a:srgbClr val="282828"/>
+                </a:solidFill>
+              </a:defRPr>
+            </a:pPr>
+            <a:r>
+              <a:t>   Enhanced predictive forecasting models</a:t>
+            </a:r>
+          </a:p>
+          <a:p>
+            <a:pPr>
+              <a:lnSpc>
+                <a:spcPct val="120000"/>
+              </a:lnSpc>
+              <a:spcBef>
+                <a:spcPts val="400"/>
+              </a:spcBef>
+              <a:spcAft>
+                <a:spcPts val="400"/>
+              </a:spcAft>
+              <a:defRPr sz="1600">
+                <a:solidFill>
+                  <a:srgbClr val="282828"/>
+                </a:solidFill>
+              </a:defRPr>
+            </a:pPr>
+          </a:p>
+          <a:p>
+            <a:pPr>
+              <a:lnSpc>
+                <a:spcPct val="120000"/>
+              </a:lnSpc>
+              <a:spcBef>
+                <a:spcPts val="400"/>
+              </a:spcBef>
+              <a:spcAft>
+                <a:spcPts val="400"/>
+              </a:spcAft>
+              <a:defRPr sz="1600">
+                <a:solidFill>
+                  <a:srgbClr val="282828"/>
+                </a:solidFill>
+              </a:defRPr>
+            </a:pPr>
+            <a:r>
+              <a:t>📱 Mobile &amp; Multi-Platform</a:t>
+            </a:r>
+          </a:p>
+          <a:p>
+            <a:pPr>
+              <a:lnSpc>
+                <a:spcPct val="120000"/>
+              </a:lnSpc>
+              <a:spcBef>
+                <a:spcPts val="400"/>
+              </a:spcBef>
+              <a:spcAft>
+                <a:spcPts val="400"/>
+              </a:spcAft>
+              <a:defRPr sz="1600">
+                <a:solidFill>
+                  <a:srgbClr val="282828"/>
+                </a:solidFill>
+              </a:defRPr>
+            </a:pPr>
+            <a:r>
+              <a:t>   Mobile app and enhanced accessibility</a:t>
+            </a:r>
+          </a:p>
+          <a:p>
+            <a:pPr>
+              <a:lnSpc>
+                <a:spcPct val="120000"/>
+              </a:lnSpc>
+              <a:spcBef>
+                <a:spcPts val="400"/>
+              </a:spcBef>
+              <a:spcAft>
+                <a:spcPts val="400"/>
+              </a:spcAft>
+              <a:defRPr sz="1600">
+                <a:solidFill>
+                  <a:srgbClr val="282828"/>
+                </a:solidFill>
+              </a:defRPr>
+            </a:pPr>
+          </a:p>
+          <a:p>
+            <a:pPr>
+              <a:lnSpc>
+                <a:spcPct val="120000"/>
+              </a:lnSpc>
+              <a:spcBef>
+                <a:spcPts val="400"/>
+              </a:spcBef>
+              <a:spcAft>
+                <a:spcPts val="400"/>
+              </a:spcAft>
+              <a:defRPr sz="1600">
+                <a:solidFill>
+                  <a:srgbClr val="282828"/>
+                </a:solidFill>
+              </a:defRPr>
+            </a:pPr>
+            <a:r>
+              <a:t>🔗 Enterprise Integrations</a:t>
+            </a:r>
+          </a:p>
+          <a:p>
+            <a:pPr>
+              <a:lnSpc>
+                <a:spcPct val="120000"/>
+              </a:lnSpc>
+              <a:spcBef>
+                <a:spcPts val="400"/>
+              </a:spcBef>
+              <a:spcAft>
+                <a:spcPts val="400"/>
+              </a:spcAft>
+              <a:defRPr sz="1600">
+                <a:solidFill>
+                  <a:srgbClr val="282828"/>
+                </a:solidFill>
+              </a:defRPr>
+            </a:pPr>
+            <a:r>
+              <a:t>   BI tools (Tableau, Power BI), ERP systems</a:t>
+            </a:r>
+          </a:p>
+          <a:p>
+            <a:pPr>
+              <a:lnSpc>
+                <a:spcPct val="120000"/>
+              </a:lnSpc>
+              <a:spcBef>
+                <a:spcPts val="400"/>
+              </a:spcBef>
+              <a:spcAft>
+                <a:spcPts val="400"/>
+              </a:spcAft>
+              <a:defRPr sz="1600">
+                <a:solidFill>
+                  <a:srgbClr val="282828"/>
+                </a:solidFill>
+              </a:defRPr>
+            </a:pPr>
+          </a:p>
+          <a:p>
+            <a:pPr>
+              <a:lnSpc>
+                <a:spcPct val="120000"/>
+              </a:lnSpc>
+              <a:spcBef>
+                <a:spcPts val="400"/>
+              </a:spcBef>
+              <a:spcAft>
+                <a:spcPts val="400"/>
+              </a:spcAft>
+              <a:defRPr sz="1600">
+                <a:solidFill>
+                  <a:srgbClr val="282828"/>
+                </a:solidFill>
+              </a:defRPr>
+            </a:pPr>
+            <a:r>
+              <a:t>🔐 Enterprise Features</a:t>
+            </a:r>
+          </a:p>
+          <a:p>
+            <a:pPr>
+              <a:lnSpc>
+                <a:spcPct val="120000"/>
+              </a:lnSpc>
+              <a:spcBef>
+                <a:spcPts val="400"/>
+              </a:spcBef>
+              <a:spcAft>
+                <a:spcPts val="400"/>
+              </a:spcAft>
+              <a:defRPr sz="1600">
+                <a:solidFill>
+                  <a:srgbClr val="282828"/>
+                </a:solidFill>
+              </a:defRPr>
+            </a:pPr>
+            <a:r>
+              <a:t>   Role-based access, audit logging, compliance</a:t>
             </a:r>
           </a:p>
         </p:txBody>
@@ -8243,7 +8715,7 @@
               </a:defRPr>
             </a:pPr>
             <a:r>
-              <a:t>The Problem</a:t>
+              <a:t>The Challenge</a:t>
             </a:r>
           </a:p>
         </p:txBody>
@@ -8422,109 +8894,130 @@
               </a:defRPr>
             </a:pPr>
             <a:r>
-              <a:t>• Manual analysis takes weeks, decisions are delayed</a:t>
-            </a:r>
-          </a:p>
-          <a:p>
-            <a:pPr>
-              <a:lnSpc>
-                <a:spcPct val="120000"/>
-              </a:lnSpc>
-              <a:spcBef>
-                <a:spcPts val="400"/>
-              </a:spcBef>
-              <a:spcAft>
-                <a:spcPts val="400"/>
-              </a:spcAft>
-              <a:defRPr sz="1600">
-                <a:solidFill>
-                  <a:srgbClr val="282828"/>
-                </a:solidFill>
-              </a:defRPr>
-            </a:pPr>
-            <a:r>
-              <a:t>• Sales data scattered across different departments</a:t>
-            </a:r>
-          </a:p>
-          <a:p>
-            <a:pPr>
-              <a:lnSpc>
-                <a:spcPct val="120000"/>
-              </a:lnSpc>
-              <a:spcBef>
-                <a:spcPts val="400"/>
-              </a:spcBef>
-              <a:spcAft>
-                <a:spcPts val="400"/>
-              </a:spcAft>
-              <a:defRPr sz="1600">
-                <a:solidFill>
-                  <a:srgbClr val="282828"/>
-                </a:solidFill>
-              </a:defRPr>
-            </a:pPr>
-            <a:r>
-              <a:t>• Missing critical insights due to human error</a:t>
-            </a:r>
-          </a:p>
-          <a:p>
-            <a:pPr>
-              <a:lnSpc>
-                <a:spcPct val="120000"/>
-              </a:lnSpc>
-              <a:spcBef>
-                <a:spcPts val="400"/>
-              </a:spcBef>
-              <a:spcAft>
-                <a:spcPts val="400"/>
-              </a:spcAft>
-              <a:defRPr sz="1600">
-                <a:solidFill>
-                  <a:srgbClr val="282828"/>
-                </a:solidFill>
-              </a:defRPr>
-            </a:pPr>
-            <a:r>
-              <a:t>• Unable to answer 'what-if' questions quickly</a:t>
-            </a:r>
-          </a:p>
-          <a:p>
-            <a:pPr>
-              <a:lnSpc>
-                <a:spcPct val="120000"/>
-              </a:lnSpc>
-              <a:spcBef>
-                <a:spcPts val="400"/>
-              </a:spcBef>
-              <a:spcAft>
-                <a:spcPts val="400"/>
-              </a:spcAft>
-              <a:defRPr sz="1600">
-                <a:solidFill>
-                  <a:srgbClr val="282828"/>
-                </a:solidFill>
-              </a:defRPr>
-            </a:pPr>
-          </a:p>
-          <a:p>
-            <a:pPr>
-              <a:lnSpc>
-                <a:spcPct val="120000"/>
-              </a:lnSpc>
-              <a:spcBef>
-                <a:spcPts val="400"/>
-              </a:spcBef>
-              <a:spcAft>
-                <a:spcPts val="400"/>
-              </a:spcAft>
-              <a:defRPr sz="1600">
-                <a:solidFill>
-                  <a:srgbClr val="282828"/>
-                </a:solidFill>
-              </a:defRPr>
-            </a:pPr>
-            <a:r>
-              <a:t>Result: Missed opportunities and slow decision-making</a:t>
+              <a:t>• Manual analysis processes are time-consuming and error-prone</a:t>
+            </a:r>
+          </a:p>
+          <a:p>
+            <a:pPr>
+              <a:lnSpc>
+                <a:spcPct val="120000"/>
+              </a:lnSpc>
+              <a:spcBef>
+                <a:spcPts val="400"/>
+              </a:spcBef>
+              <a:spcAft>
+                <a:spcPts val="400"/>
+              </a:spcAft>
+              <a:defRPr sz="1600">
+                <a:solidFill>
+                  <a:srgbClr val="282828"/>
+                </a:solidFill>
+              </a:defRPr>
+            </a:pPr>
+            <a:r>
+              <a:t>• Fragmented data across multiple systems and departments</a:t>
+            </a:r>
+          </a:p>
+          <a:p>
+            <a:pPr>
+              <a:lnSpc>
+                <a:spcPct val="120000"/>
+              </a:lnSpc>
+              <a:spcBef>
+                <a:spcPts val="400"/>
+              </a:spcBef>
+              <a:spcAft>
+                <a:spcPts val="400"/>
+              </a:spcAft>
+              <a:defRPr sz="1600">
+                <a:solidFill>
+                  <a:srgbClr val="282828"/>
+                </a:solidFill>
+              </a:defRPr>
+            </a:pPr>
+            <a:r>
+              <a:t>• Lack of real-time visibility into business performance</a:t>
+            </a:r>
+          </a:p>
+          <a:p>
+            <a:pPr>
+              <a:lnSpc>
+                <a:spcPct val="120000"/>
+              </a:lnSpc>
+              <a:spcBef>
+                <a:spcPts val="400"/>
+              </a:spcBef>
+              <a:spcAft>
+                <a:spcPts val="400"/>
+              </a:spcAft>
+              <a:defRPr sz="1600">
+                <a:solidFill>
+                  <a:srgbClr val="282828"/>
+                </a:solidFill>
+              </a:defRPr>
+            </a:pPr>
+            <a:r>
+              <a:t>• Reactive decision-making instead of proactive insights</a:t>
+            </a:r>
+          </a:p>
+          <a:p>
+            <a:pPr>
+              <a:lnSpc>
+                <a:spcPct val="120000"/>
+              </a:lnSpc>
+              <a:spcBef>
+                <a:spcPts val="400"/>
+              </a:spcBef>
+              <a:spcAft>
+                <a:spcPts val="400"/>
+              </a:spcAft>
+              <a:defRPr sz="1600">
+                <a:solidFill>
+                  <a:srgbClr val="282828"/>
+                </a:solidFill>
+              </a:defRPr>
+            </a:pPr>
+            <a:r>
+              <a:t>• Difficulty identifying anomalies and trends quickly</a:t>
+            </a:r>
+          </a:p>
+          <a:p>
+            <a:pPr>
+              <a:lnSpc>
+                <a:spcPct val="120000"/>
+              </a:lnSpc>
+              <a:spcBef>
+                <a:spcPts val="400"/>
+              </a:spcBef>
+              <a:spcAft>
+                <a:spcPts val="400"/>
+              </a:spcAft>
+              <a:defRPr sz="1600">
+                <a:solidFill>
+                  <a:srgbClr val="282828"/>
+                </a:solidFill>
+              </a:defRPr>
+            </a:pPr>
+          </a:p>
+          <a:p>
+            <a:pPr>
+              <a:lnSpc>
+                <a:spcPct val="120000"/>
+              </a:lnSpc>
+              <a:spcBef>
+                <a:spcPts val="400"/>
+              </a:spcBef>
+              <a:spcAft>
+                <a:spcPts val="400"/>
+              </a:spcAft>
+              <a:defRPr sz="1600">
+                <a:solidFill>
+                  <a:srgbClr val="282828"/>
+                </a:solidFill>
+              </a:defRPr>
+            </a:pPr>
+            <a:r>
+              <a:t>Impact: Delayed decisions, missed opportunities, and operational inefficiencies</a:t>
             </a:r>
           </a:p>
         </p:txBody>
@@ -8826,187 +9319,292 @@
               </a:defRPr>
             </a:pPr>
             <a:r>
-              <a:t>Time Saved Per Person: 10+ hours/week</a:t>
-            </a:r>
-          </a:p>
-          <a:p>
-            <a:pPr>
-              <a:lnSpc>
-                <a:spcPct val="120000"/>
-              </a:lnSpc>
-              <a:spcBef>
-                <a:spcPts val="400"/>
-              </a:spcBef>
-              <a:spcAft>
-                <a:spcPts val="400"/>
-              </a:spcAft>
-              <a:defRPr sz="1600">
-                <a:solidFill>
-                  <a:srgbClr val="282828"/>
-                </a:solidFill>
-              </a:defRPr>
-            </a:pPr>
-            <a:r>
-              <a:t>→ For 10 analysts: 100 hours/week = $10k+/week</a:t>
-            </a:r>
-          </a:p>
-          <a:p>
-            <a:pPr>
-              <a:lnSpc>
-                <a:spcPct val="120000"/>
-              </a:lnSpc>
-              <a:spcBef>
-                <a:spcPts val="400"/>
-              </a:spcBef>
-              <a:spcAft>
-                <a:spcPts val="400"/>
-              </a:spcAft>
-              <a:defRPr sz="1600">
-                <a:solidFill>
-                  <a:srgbClr val="282828"/>
-                </a:solidFill>
-              </a:defRPr>
-            </a:pPr>
-          </a:p>
-          <a:p>
-            <a:pPr>
-              <a:lnSpc>
-                <a:spcPct val="120000"/>
-              </a:lnSpc>
-              <a:spcBef>
-                <a:spcPts val="400"/>
-              </a:spcBef>
-              <a:spcAft>
-                <a:spcPts val="400"/>
-              </a:spcAft>
-              <a:defRPr sz="1600">
-                <a:solidFill>
-                  <a:srgbClr val="282828"/>
-                </a:solidFill>
-              </a:defRPr>
-            </a:pPr>
-            <a:r>
-              <a:t>Better Decisions: 20% faster market response</a:t>
-            </a:r>
-          </a:p>
-          <a:p>
-            <a:pPr>
-              <a:lnSpc>
-                <a:spcPct val="120000"/>
-              </a:lnSpc>
-              <a:spcBef>
-                <a:spcPts val="400"/>
-              </a:spcBef>
-              <a:spcAft>
-                <a:spcPts val="400"/>
-              </a:spcAft>
-              <a:defRPr sz="1600">
-                <a:solidFill>
-                  <a:srgbClr val="282828"/>
-                </a:solidFill>
-              </a:defRPr>
-            </a:pPr>
-            <a:r>
-              <a:t>→ Capture missed sales opportunities</a:t>
-            </a:r>
-          </a:p>
-          <a:p>
-            <a:pPr>
-              <a:lnSpc>
-                <a:spcPct val="120000"/>
-              </a:lnSpc>
-              <a:spcBef>
-                <a:spcPts val="400"/>
-              </a:spcBef>
-              <a:spcAft>
-                <a:spcPts val="400"/>
-              </a:spcAft>
-              <a:defRPr sz="1600">
-                <a:solidFill>
-                  <a:srgbClr val="282828"/>
-                </a:solidFill>
-              </a:defRPr>
-            </a:pPr>
-          </a:p>
-          <a:p>
-            <a:pPr>
-              <a:lnSpc>
-                <a:spcPct val="120000"/>
-              </a:lnSpc>
-              <a:spcBef>
-                <a:spcPts val="400"/>
-              </a:spcBef>
-              <a:spcAft>
-                <a:spcPts val="400"/>
-              </a:spcAft>
-              <a:defRPr sz="1600">
-                <a:solidFill>
-                  <a:srgbClr val="282828"/>
-                </a:solidFill>
-              </a:defRPr>
-            </a:pPr>
-            <a:r>
-              <a:t>Improved Accuracy: 95%+ vs 60% manual</a:t>
-            </a:r>
-          </a:p>
-          <a:p>
-            <a:pPr>
-              <a:lnSpc>
-                <a:spcPct val="120000"/>
-              </a:lnSpc>
-              <a:spcBef>
-                <a:spcPts val="400"/>
-              </a:spcBef>
-              <a:spcAft>
-                <a:spcPts val="400"/>
-              </a:spcAft>
-              <a:defRPr sz="1600">
-                <a:solidFill>
-                  <a:srgbClr val="282828"/>
-                </a:solidFill>
-              </a:defRPr>
-            </a:pPr>
-            <a:r>
-              <a:t>→ Reduce decision errors</a:t>
-            </a:r>
-          </a:p>
-          <a:p>
-            <a:pPr>
-              <a:lnSpc>
-                <a:spcPct val="120000"/>
-              </a:lnSpc>
-              <a:spcBef>
-                <a:spcPts val="400"/>
-              </a:spcBef>
-              <a:spcAft>
-                <a:spcPts val="400"/>
-              </a:spcAft>
-              <a:defRPr sz="1600">
-                <a:solidFill>
-                  <a:srgbClr val="282828"/>
-                </a:solidFill>
-              </a:defRPr>
-            </a:pPr>
-          </a:p>
-          <a:p>
-            <a:pPr>
-              <a:lnSpc>
-                <a:spcPct val="120000"/>
-              </a:lnSpc>
-              <a:spcBef>
-                <a:spcPts val="400"/>
-              </a:spcBef>
-              <a:spcAft>
-                <a:spcPts val="400"/>
-              </a:spcAft>
-              <a:defRPr sz="1600">
-                <a:solidFill>
-                  <a:srgbClr val="282828"/>
-                </a:solidFill>
-              </a:defRPr>
-            </a:pPr>
-            <a:r>
-              <a:t>Total Payback: 2-3 months typical</a:t>
+              <a:t>⏱️ Time Efficiency: 80% reduction in analysis time</a:t>
+            </a:r>
+          </a:p>
+          <a:p>
+            <a:pPr>
+              <a:lnSpc>
+                <a:spcPct val="120000"/>
+              </a:lnSpc>
+              <a:spcBef>
+                <a:spcPts val="400"/>
+              </a:spcBef>
+              <a:spcAft>
+                <a:spcPts val="400"/>
+              </a:spcAft>
+              <a:defRPr sz="1600">
+                <a:solidFill>
+                  <a:srgbClr val="282828"/>
+                </a:solidFill>
+              </a:defRPr>
+            </a:pPr>
+            <a:r>
+              <a:t>   • 10+ hours saved per analyst per week</a:t>
+            </a:r>
+          </a:p>
+          <a:p>
+            <a:pPr>
+              <a:lnSpc>
+                <a:spcPct val="120000"/>
+              </a:lnSpc>
+              <a:spcBef>
+                <a:spcPts val="400"/>
+              </a:spcBef>
+              <a:spcAft>
+                <a:spcPts val="400"/>
+              </a:spcAft>
+              <a:defRPr sz="1600">
+                <a:solidFill>
+                  <a:srgbClr val="282828"/>
+                </a:solidFill>
+              </a:defRPr>
+            </a:pPr>
+            <a:r>
+              <a:t>   • Faster response to business questions</a:t>
+            </a:r>
+          </a:p>
+          <a:p>
+            <a:pPr>
+              <a:lnSpc>
+                <a:spcPct val="120000"/>
+              </a:lnSpc>
+              <a:spcBef>
+                <a:spcPts val="400"/>
+              </a:spcBef>
+              <a:spcAft>
+                <a:spcPts val="400"/>
+              </a:spcAft>
+              <a:defRPr sz="1600">
+                <a:solidFill>
+                  <a:srgbClr val="282828"/>
+                </a:solidFill>
+              </a:defRPr>
+            </a:pPr>
+          </a:p>
+          <a:p>
+            <a:pPr>
+              <a:lnSpc>
+                <a:spcPct val="120000"/>
+              </a:lnSpc>
+              <a:spcBef>
+                <a:spcPts val="400"/>
+              </a:spcBef>
+              <a:spcAft>
+                <a:spcPts val="400"/>
+              </a:spcAft>
+              <a:defRPr sz="1600">
+                <a:solidFill>
+                  <a:srgbClr val="282828"/>
+                </a:solidFill>
+              </a:defRPr>
+            </a:pPr>
+            <a:r>
+              <a:t>💡 Decision Quality: Data-driven insights</a:t>
+            </a:r>
+          </a:p>
+          <a:p>
+            <a:pPr>
+              <a:lnSpc>
+                <a:spcPct val="120000"/>
+              </a:lnSpc>
+              <a:spcBef>
+                <a:spcPts val="400"/>
+              </a:spcBef>
+              <a:spcAft>
+                <a:spcPts val="400"/>
+              </a:spcAft>
+              <a:defRPr sz="1600">
+                <a:solidFill>
+                  <a:srgbClr val="282828"/>
+                </a:solidFill>
+              </a:defRPr>
+            </a:pPr>
+            <a:r>
+              <a:t>   • 95%+ accuracy vs 60% manual analysis</a:t>
+            </a:r>
+          </a:p>
+          <a:p>
+            <a:pPr>
+              <a:lnSpc>
+                <a:spcPct val="120000"/>
+              </a:lnSpc>
+              <a:spcBef>
+                <a:spcPts val="400"/>
+              </a:spcBef>
+              <a:spcAft>
+                <a:spcPts val="400"/>
+              </a:spcAft>
+              <a:defRPr sz="1600">
+                <a:solidFill>
+                  <a:srgbClr val="282828"/>
+                </a:solidFill>
+              </a:defRPr>
+            </a:pPr>
+            <a:r>
+              <a:t>   • Proactive anomaly detection</a:t>
+            </a:r>
+          </a:p>
+          <a:p>
+            <a:pPr>
+              <a:lnSpc>
+                <a:spcPct val="120000"/>
+              </a:lnSpc>
+              <a:spcBef>
+                <a:spcPts val="400"/>
+              </a:spcBef>
+              <a:spcAft>
+                <a:spcPts val="400"/>
+              </a:spcAft>
+              <a:defRPr sz="1600">
+                <a:solidFill>
+                  <a:srgbClr val="282828"/>
+                </a:solidFill>
+              </a:defRPr>
+            </a:pPr>
+          </a:p>
+          <a:p>
+            <a:pPr>
+              <a:lnSpc>
+                <a:spcPct val="120000"/>
+              </a:lnSpc>
+              <a:spcBef>
+                <a:spcPts val="400"/>
+              </a:spcBef>
+              <a:spcAft>
+                <a:spcPts val="400"/>
+              </a:spcAft>
+              <a:defRPr sz="1600">
+                <a:solidFill>
+                  <a:srgbClr val="282828"/>
+                </a:solidFill>
+              </a:defRPr>
+            </a:pPr>
+            <a:r>
+              <a:t>💰 Revenue Impact: Strategic optimization</a:t>
+            </a:r>
+          </a:p>
+          <a:p>
+            <a:pPr>
+              <a:lnSpc>
+                <a:spcPct val="120000"/>
+              </a:lnSpc>
+              <a:spcBef>
+                <a:spcPts val="400"/>
+              </a:spcBef>
+              <a:spcAft>
+                <a:spcPts val="400"/>
+              </a:spcAft>
+              <a:defRPr sz="1600">
+                <a:solidFill>
+                  <a:srgbClr val="282828"/>
+                </a:solidFill>
+              </a:defRPr>
+            </a:pPr>
+            <a:r>
+              <a:t>   • Better pricing and promotion decisions</a:t>
+            </a:r>
+          </a:p>
+          <a:p>
+            <a:pPr>
+              <a:lnSpc>
+                <a:spcPct val="120000"/>
+              </a:lnSpc>
+              <a:spcBef>
+                <a:spcPts val="400"/>
+              </a:spcBef>
+              <a:spcAft>
+                <a:spcPts val="400"/>
+              </a:spcAft>
+              <a:defRPr sz="1600">
+                <a:solidFill>
+                  <a:srgbClr val="282828"/>
+                </a:solidFill>
+              </a:defRPr>
+            </a:pPr>
+            <a:r>
+              <a:t>   • Reduced operational costs</a:t>
+            </a:r>
+          </a:p>
+          <a:p>
+            <a:pPr>
+              <a:lnSpc>
+                <a:spcPct val="120000"/>
+              </a:lnSpc>
+              <a:spcBef>
+                <a:spcPts val="400"/>
+              </a:spcBef>
+              <a:spcAft>
+                <a:spcPts val="400"/>
+              </a:spcAft>
+              <a:defRPr sz="1600">
+                <a:solidFill>
+                  <a:srgbClr val="282828"/>
+                </a:solidFill>
+              </a:defRPr>
+            </a:pPr>
+          </a:p>
+          <a:p>
+            <a:pPr>
+              <a:lnSpc>
+                <a:spcPct val="120000"/>
+              </a:lnSpc>
+              <a:spcBef>
+                <a:spcPts val="400"/>
+              </a:spcBef>
+              <a:spcAft>
+                <a:spcPts val="400"/>
+              </a:spcAft>
+              <a:defRPr sz="1600">
+                <a:solidFill>
+                  <a:srgbClr val="282828"/>
+                </a:solidFill>
+              </a:defRPr>
+            </a:pPr>
+            <a:r>
+              <a:t>📊 Business Value:</a:t>
+            </a:r>
+          </a:p>
+          <a:p>
+            <a:pPr>
+              <a:lnSpc>
+                <a:spcPct val="120000"/>
+              </a:lnSpc>
+              <a:spcBef>
+                <a:spcPts val="400"/>
+              </a:spcBef>
+              <a:spcAft>
+                <a:spcPts val="400"/>
+              </a:spcAft>
+              <a:defRPr sz="1600">
+                <a:solidFill>
+                  <a:srgbClr val="282828"/>
+                </a:solidFill>
+              </a:defRPr>
+            </a:pPr>
+            <a:r>
+              <a:t>   • Typical payback period: 2-3 months</a:t>
+            </a:r>
+          </a:p>
+          <a:p>
+            <a:pPr>
+              <a:lnSpc>
+                <a:spcPct val="120000"/>
+              </a:lnSpc>
+              <a:spcBef>
+                <a:spcPts val="400"/>
+              </a:spcBef>
+              <a:spcAft>
+                <a:spcPts val="400"/>
+              </a:spcAft>
+              <a:defRPr sz="1600">
+                <a:solidFill>
+                  <a:srgbClr val="282828"/>
+                </a:solidFill>
+              </a:defRPr>
+            </a:pPr>
+            <a:r>
+              <a:t>   • Ongoing value through continuous monitoring</a:t>
             </a:r>
           </a:p>
         </p:txBody>
@@ -9129,7 +9727,7 @@
               </a:defRPr>
             </a:pPr>
             <a:r>
-              <a:t>How We'll Implement</a:t>
+              <a:t>Implementation Roadmap</a:t>
             </a:r>
           </a:p>
         </p:txBody>
@@ -9308,190 +9906,274 @@
               </a:defRPr>
             </a:pPr>
             <a:r>
-              <a:t>Phase 1 (Week 1): Data setup and configuration</a:t>
-            </a:r>
-          </a:p>
-          <a:p>
-            <a:pPr>
-              <a:lnSpc>
-                <a:spcPct val="120000"/>
-              </a:lnSpc>
-              <a:spcBef>
-                <a:spcPts val="400"/>
-              </a:spcBef>
-              <a:spcAft>
-                <a:spcPts val="400"/>
-              </a:spcAft>
-              <a:defRPr sz="1600">
-                <a:solidFill>
-                  <a:srgbClr val="282828"/>
-                </a:solidFill>
-              </a:defRPr>
-            </a:pPr>
-            <a:r>
-              <a:t>   • Upload your historical data</a:t>
-            </a:r>
-          </a:p>
-          <a:p>
-            <a:pPr>
-              <a:lnSpc>
-                <a:spcPct val="120000"/>
-              </a:lnSpc>
-              <a:spcBef>
-                <a:spcPts val="400"/>
-              </a:spcBef>
-              <a:spcAft>
-                <a:spcPts val="400"/>
-              </a:spcAft>
-              <a:defRPr sz="1600">
-                <a:solidFill>
-                  <a:srgbClr val="282828"/>
-                </a:solidFill>
-              </a:defRPr>
-            </a:pPr>
-            <a:r>
-              <a:t>   • Configure the system</a:t>
-            </a:r>
-          </a:p>
-          <a:p>
-            <a:pPr>
-              <a:lnSpc>
-                <a:spcPct val="120000"/>
-              </a:lnSpc>
-              <a:spcBef>
-                <a:spcPts val="400"/>
-              </a:spcBef>
-              <a:spcAft>
-                <a:spcPts val="400"/>
-              </a:spcAft>
-              <a:defRPr sz="1600">
-                <a:solidFill>
-                  <a:srgbClr val="282828"/>
-                </a:solidFill>
-              </a:defRPr>
-            </a:pPr>
-          </a:p>
-          <a:p>
-            <a:pPr>
-              <a:lnSpc>
-                <a:spcPct val="120000"/>
-              </a:lnSpc>
-              <a:spcBef>
-                <a:spcPts val="400"/>
-              </a:spcBef>
-              <a:spcAft>
-                <a:spcPts val="400"/>
-              </a:spcAft>
-              <a:defRPr sz="1600">
-                <a:solidFill>
-                  <a:srgbClr val="282828"/>
-                </a:solidFill>
-              </a:defRPr>
-            </a:pPr>
-            <a:r>
-              <a:t>Phase 2 (Week 2): Team training</a:t>
-            </a:r>
-          </a:p>
-          <a:p>
-            <a:pPr>
-              <a:lnSpc>
-                <a:spcPct val="120000"/>
-              </a:lnSpc>
-              <a:spcBef>
-                <a:spcPts val="400"/>
-              </a:spcBef>
-              <a:spcAft>
-                <a:spcPts val="400"/>
-              </a:spcAft>
-              <a:defRPr sz="1600">
-                <a:solidFill>
-                  <a:srgbClr val="282828"/>
-                </a:solidFill>
-              </a:defRPr>
-            </a:pPr>
-            <a:r>
-              <a:t>   • Show your team how to use it</a:t>
-            </a:r>
-          </a:p>
-          <a:p>
-            <a:pPr>
-              <a:lnSpc>
-                <a:spcPct val="120000"/>
-              </a:lnSpc>
-              <a:spcBef>
-                <a:spcPts val="400"/>
-              </a:spcBef>
-              <a:spcAft>
-                <a:spcPts val="400"/>
-              </a:spcAft>
-              <a:defRPr sz="1600">
-                <a:solidFill>
-                  <a:srgbClr val="282828"/>
-                </a:solidFill>
-              </a:defRPr>
-            </a:pPr>
-            <a:r>
-              <a:t>   • Answer questions</a:t>
-            </a:r>
-          </a:p>
-          <a:p>
-            <a:pPr>
-              <a:lnSpc>
-                <a:spcPct val="120000"/>
-              </a:lnSpc>
-              <a:spcBef>
-                <a:spcPts val="400"/>
-              </a:spcBef>
-              <a:spcAft>
-                <a:spcPts val="400"/>
-              </a:spcAft>
-              <a:defRPr sz="1600">
-                <a:solidFill>
-                  <a:srgbClr val="282828"/>
-                </a:solidFill>
-              </a:defRPr>
-            </a:pPr>
-          </a:p>
-          <a:p>
-            <a:pPr>
-              <a:lnSpc>
-                <a:spcPct val="120000"/>
-              </a:lnSpc>
-              <a:spcBef>
-                <a:spcPts val="400"/>
-              </a:spcBef>
-              <a:spcAft>
-                <a:spcPts val="400"/>
-              </a:spcAft>
-              <a:defRPr sz="1600">
-                <a:solidFill>
-                  <a:srgbClr val="282828"/>
-                </a:solidFill>
-              </a:defRPr>
-            </a:pPr>
-            <a:r>
-              <a:t>Phase 3 (Week 3+): Full rollout</a:t>
-            </a:r>
-          </a:p>
-          <a:p>
-            <a:pPr>
-              <a:lnSpc>
-                <a:spcPct val="120000"/>
-              </a:lnSpc>
-              <a:spcBef>
-                <a:spcPts val="400"/>
-              </a:spcBef>
-              <a:spcAft>
-                <a:spcPts val="400"/>
-              </a:spcAft>
-              <a:defRPr sz="1600">
-                <a:solidFill>
-                  <a:srgbClr val="282828"/>
-                </a:solidFill>
-              </a:defRPr>
-            </a:pPr>
-            <a:r>
-              <a:t>   • All teams start using the system</a:t>
+              <a:t>Phase 1: Setup &amp; Configuration (Week 1)</a:t>
+            </a:r>
+          </a:p>
+          <a:p>
+            <a:pPr>
+              <a:lnSpc>
+                <a:spcPct val="120000"/>
+              </a:lnSpc>
+              <a:spcBef>
+                <a:spcPts val="400"/>
+              </a:spcBef>
+              <a:spcAft>
+                <a:spcPts val="400"/>
+              </a:spcAft>
+              <a:defRPr sz="1600">
+                <a:solidFill>
+                  <a:srgbClr val="282828"/>
+                </a:solidFill>
+              </a:defRPr>
+            </a:pPr>
+            <a:r>
+              <a:t>   • Data upload and validation</a:t>
+            </a:r>
+          </a:p>
+          <a:p>
+            <a:pPr>
+              <a:lnSpc>
+                <a:spcPct val="120000"/>
+              </a:lnSpc>
+              <a:spcBef>
+                <a:spcPts val="400"/>
+              </a:spcBef>
+              <a:spcAft>
+                <a:spcPts val="400"/>
+              </a:spcAft>
+              <a:defRPr sz="1600">
+                <a:solidFill>
+                  <a:srgbClr val="282828"/>
+                </a:solidFill>
+              </a:defRPr>
+            </a:pPr>
+            <a:r>
+              <a:t>   • System configuration and customization</a:t>
+            </a:r>
+          </a:p>
+          <a:p>
+            <a:pPr>
+              <a:lnSpc>
+                <a:spcPct val="120000"/>
+              </a:lnSpc>
+              <a:spcBef>
+                <a:spcPts val="400"/>
+              </a:spcBef>
+              <a:spcAft>
+                <a:spcPts val="400"/>
+              </a:spcAft>
+              <a:defRPr sz="1600">
+                <a:solidFill>
+                  <a:srgbClr val="282828"/>
+                </a:solidFill>
+              </a:defRPr>
+            </a:pPr>
+            <a:r>
+              <a:t>   • Initial testing and validation</a:t>
+            </a:r>
+          </a:p>
+          <a:p>
+            <a:pPr>
+              <a:lnSpc>
+                <a:spcPct val="120000"/>
+              </a:lnSpc>
+              <a:spcBef>
+                <a:spcPts val="400"/>
+              </a:spcBef>
+              <a:spcAft>
+                <a:spcPts val="400"/>
+              </a:spcAft>
+              <a:defRPr sz="1600">
+                <a:solidFill>
+                  <a:srgbClr val="282828"/>
+                </a:solidFill>
+              </a:defRPr>
+            </a:pPr>
+          </a:p>
+          <a:p>
+            <a:pPr>
+              <a:lnSpc>
+                <a:spcPct val="120000"/>
+              </a:lnSpc>
+              <a:spcBef>
+                <a:spcPts val="400"/>
+              </a:spcBef>
+              <a:spcAft>
+                <a:spcPts val="400"/>
+              </a:spcAft>
+              <a:defRPr sz="1600">
+                <a:solidFill>
+                  <a:srgbClr val="282828"/>
+                </a:solidFill>
+              </a:defRPr>
+            </a:pPr>
+            <a:r>
+              <a:t>Phase 2: Training &amp; Onboarding (Week 2)</a:t>
+            </a:r>
+          </a:p>
+          <a:p>
+            <a:pPr>
+              <a:lnSpc>
+                <a:spcPct val="120000"/>
+              </a:lnSpc>
+              <a:spcBef>
+                <a:spcPts val="400"/>
+              </a:spcBef>
+              <a:spcAft>
+                <a:spcPts val="400"/>
+              </a:spcAft>
+              <a:defRPr sz="1600">
+                <a:solidFill>
+                  <a:srgbClr val="282828"/>
+                </a:solidFill>
+              </a:defRPr>
+            </a:pPr>
+            <a:r>
+              <a:t>   • Comprehensive user training</a:t>
+            </a:r>
+          </a:p>
+          <a:p>
+            <a:pPr>
+              <a:lnSpc>
+                <a:spcPct val="120000"/>
+              </a:lnSpc>
+              <a:spcBef>
+                <a:spcPts val="400"/>
+              </a:spcBef>
+              <a:spcAft>
+                <a:spcPts val="400"/>
+              </a:spcAft>
+              <a:defRPr sz="1600">
+                <a:solidFill>
+                  <a:srgbClr val="282828"/>
+                </a:solidFill>
+              </a:defRPr>
+            </a:pPr>
+            <a:r>
+              <a:t>   • Best practices and workflows</a:t>
+            </a:r>
+          </a:p>
+          <a:p>
+            <a:pPr>
+              <a:lnSpc>
+                <a:spcPct val="120000"/>
+              </a:lnSpc>
+              <a:spcBef>
+                <a:spcPts val="400"/>
+              </a:spcBef>
+              <a:spcAft>
+                <a:spcPts val="400"/>
+              </a:spcAft>
+              <a:defRPr sz="1600">
+                <a:solidFill>
+                  <a:srgbClr val="282828"/>
+                </a:solidFill>
+              </a:defRPr>
+            </a:pPr>
+            <a:r>
+              <a:t>   • Q&amp;A and support sessions</a:t>
+            </a:r>
+          </a:p>
+          <a:p>
+            <a:pPr>
+              <a:lnSpc>
+                <a:spcPct val="120000"/>
+              </a:lnSpc>
+              <a:spcBef>
+                <a:spcPts val="400"/>
+              </a:spcBef>
+              <a:spcAft>
+                <a:spcPts val="400"/>
+              </a:spcAft>
+              <a:defRPr sz="1600">
+                <a:solidFill>
+                  <a:srgbClr val="282828"/>
+                </a:solidFill>
+              </a:defRPr>
+            </a:pPr>
+          </a:p>
+          <a:p>
+            <a:pPr>
+              <a:lnSpc>
+                <a:spcPct val="120000"/>
+              </a:lnSpc>
+              <a:spcBef>
+                <a:spcPts val="400"/>
+              </a:spcBef>
+              <a:spcAft>
+                <a:spcPts val="400"/>
+              </a:spcAft>
+              <a:defRPr sz="1600">
+                <a:solidFill>
+                  <a:srgbClr val="282828"/>
+                </a:solidFill>
+              </a:defRPr>
+            </a:pPr>
+            <a:r>
+              <a:t>Phase 3: Full Deployment (Week 3+)</a:t>
+            </a:r>
+          </a:p>
+          <a:p>
+            <a:pPr>
+              <a:lnSpc>
+                <a:spcPct val="120000"/>
+              </a:lnSpc>
+              <a:spcBef>
+                <a:spcPts val="400"/>
+              </a:spcBef>
+              <a:spcAft>
+                <a:spcPts val="400"/>
+              </a:spcAft>
+              <a:defRPr sz="1600">
+                <a:solidFill>
+                  <a:srgbClr val="282828"/>
+                </a:solidFill>
+              </a:defRPr>
+            </a:pPr>
+            <a:r>
+              <a:t>   • Organization-wide rollout</a:t>
+            </a:r>
+          </a:p>
+          <a:p>
+            <a:pPr>
+              <a:lnSpc>
+                <a:spcPct val="120000"/>
+              </a:lnSpc>
+              <a:spcBef>
+                <a:spcPts val="400"/>
+              </a:spcBef>
+              <a:spcAft>
+                <a:spcPts val="400"/>
+              </a:spcAft>
+              <a:defRPr sz="1600">
+                <a:solidFill>
+                  <a:srgbClr val="282828"/>
+                </a:solidFill>
+              </a:defRPr>
+            </a:pPr>
+            <a:r>
+              <a:t>   • Ongoing support and optimization</a:t>
+            </a:r>
+          </a:p>
+          <a:p>
+            <a:pPr>
+              <a:lnSpc>
+                <a:spcPct val="120000"/>
+              </a:lnSpc>
+              <a:spcBef>
+                <a:spcPts val="400"/>
+              </a:spcBef>
+              <a:spcAft>
+                <a:spcPts val="400"/>
+              </a:spcAft>
+              <a:defRPr sz="1600">
+                <a:solidFill>
+                  <a:srgbClr val="282828"/>
+                </a:solidFill>
+              </a:defRPr>
+            </a:pPr>
+            <a:r>
+              <a:t>   • Continuous improvement</a:t>
             </a:r>
           </a:p>
         </p:txBody>
@@ -9614,7 +10296,7 @@
               </a:defRPr>
             </a:pPr>
             <a:r>
-              <a:t>Results from Early Users</a:t>
+              <a:t>Expected Business Outcomes</a:t>
             </a:r>
           </a:p>
         </p:txBody>
@@ -9793,211 +10475,274 @@
               </a:defRPr>
             </a:pPr>
             <a:r>
-              <a:t>Company A (Beverages):</a:t>
-            </a:r>
-          </a:p>
-          <a:p>
-            <a:pPr>
-              <a:lnSpc>
-                <a:spcPct val="120000"/>
-              </a:lnSpc>
-              <a:spcBef>
-                <a:spcPts val="400"/>
-              </a:spcBef>
-              <a:spcAft>
-                <a:spcPts val="400"/>
-              </a:spcAft>
-              <a:defRPr sz="1600">
-                <a:solidFill>
-                  <a:srgbClr val="282828"/>
-                </a:solidFill>
-              </a:defRPr>
-            </a:pPr>
-            <a:r>
-              <a:t>   • Reduced analysis time by 85%</a:t>
-            </a:r>
-          </a:p>
-          <a:p>
-            <a:pPr>
-              <a:lnSpc>
-                <a:spcPct val="120000"/>
-              </a:lnSpc>
-              <a:spcBef>
-                <a:spcPts val="400"/>
-              </a:spcBef>
-              <a:spcAft>
-                <a:spcPts val="400"/>
-              </a:spcAft>
-              <a:defRPr sz="1600">
-                <a:solidFill>
-                  <a:srgbClr val="282828"/>
-                </a:solidFill>
-              </a:defRPr>
-            </a:pPr>
-            <a:r>
-              <a:t>   • Found 3 major pricing optimization opportunities</a:t>
-            </a:r>
-          </a:p>
-          <a:p>
-            <a:pPr>
-              <a:lnSpc>
-                <a:spcPct val="120000"/>
-              </a:lnSpc>
-              <a:spcBef>
-                <a:spcPts val="400"/>
-              </a:spcBef>
-              <a:spcAft>
-                <a:spcPts val="400"/>
-              </a:spcAft>
-              <a:defRPr sz="1600">
-                <a:solidFill>
-                  <a:srgbClr val="282828"/>
-                </a:solidFill>
-              </a:defRPr>
-            </a:pPr>
-          </a:p>
-          <a:p>
-            <a:pPr>
-              <a:lnSpc>
-                <a:spcPct val="120000"/>
-              </a:lnSpc>
-              <a:spcBef>
-                <a:spcPts val="400"/>
-              </a:spcBef>
-              <a:spcAft>
-                <a:spcPts val="400"/>
-              </a:spcAft>
-              <a:defRPr sz="1600">
-                <a:solidFill>
-                  <a:srgbClr val="282828"/>
-                </a:solidFill>
-              </a:defRPr>
-            </a:pPr>
-            <a:r>
-              <a:t>Company B (Snacks):</a:t>
-            </a:r>
-          </a:p>
-          <a:p>
-            <a:pPr>
-              <a:lnSpc>
-                <a:spcPct val="120000"/>
-              </a:lnSpc>
-              <a:spcBef>
-                <a:spcPts val="400"/>
-              </a:spcBef>
-              <a:spcAft>
-                <a:spcPts val="400"/>
-              </a:spcAft>
-              <a:defRPr sz="1600">
-                <a:solidFill>
-                  <a:srgbClr val="282828"/>
-                </a:solidFill>
-              </a:defRPr>
-            </a:pPr>
-            <a:r>
-              <a:t>   • Identified anomalies 2 weeks faster</a:t>
-            </a:r>
-          </a:p>
-          <a:p>
-            <a:pPr>
-              <a:lnSpc>
-                <a:spcPct val="120000"/>
-              </a:lnSpc>
-              <a:spcBef>
-                <a:spcPts val="400"/>
-              </a:spcBef>
-              <a:spcAft>
-                <a:spcPts val="400"/>
-              </a:spcAft>
-              <a:defRPr sz="1600">
-                <a:solidFill>
-                  <a:srgbClr val="282828"/>
-                </a:solidFill>
-              </a:defRPr>
-            </a:pPr>
-            <a:r>
-              <a:t>   • Saved $500k in inventory costs</a:t>
-            </a:r>
-          </a:p>
-          <a:p>
-            <a:pPr>
-              <a:lnSpc>
-                <a:spcPct val="120000"/>
-              </a:lnSpc>
-              <a:spcBef>
-                <a:spcPts val="400"/>
-              </a:spcBef>
-              <a:spcAft>
-                <a:spcPts val="400"/>
-              </a:spcAft>
-              <a:defRPr sz="1600">
-                <a:solidFill>
-                  <a:srgbClr val="282828"/>
-                </a:solidFill>
-              </a:defRPr>
-            </a:pPr>
-          </a:p>
-          <a:p>
-            <a:pPr>
-              <a:lnSpc>
-                <a:spcPct val="120000"/>
-              </a:lnSpc>
-              <a:spcBef>
-                <a:spcPts val="400"/>
-              </a:spcBef>
-              <a:spcAft>
-                <a:spcPts val="400"/>
-              </a:spcAft>
-              <a:defRPr sz="1600">
-                <a:solidFill>
-                  <a:srgbClr val="282828"/>
-                </a:solidFill>
-              </a:defRPr>
-            </a:pPr>
-            <a:r>
-              <a:t>Company C (Personal Care):</a:t>
-            </a:r>
-          </a:p>
-          <a:p>
-            <a:pPr>
-              <a:lnSpc>
-                <a:spcPct val="120000"/>
-              </a:lnSpc>
-              <a:spcBef>
-                <a:spcPts val="400"/>
-              </a:spcBef>
-              <a:spcAft>
-                <a:spcPts val="400"/>
-              </a:spcAft>
-              <a:defRPr sz="1600">
-                <a:solidFill>
-                  <a:srgbClr val="282828"/>
-                </a:solidFill>
-              </a:defRPr>
-            </a:pPr>
-            <a:r>
-              <a:t>   • 10x faster promotion planning</a:t>
-            </a:r>
-          </a:p>
-          <a:p>
-            <a:pPr>
-              <a:lnSpc>
-                <a:spcPct val="120000"/>
-              </a:lnSpc>
-              <a:spcBef>
-                <a:spcPts val="400"/>
-              </a:spcBef>
-              <a:spcAft>
-                <a:spcPts val="400"/>
-              </a:spcAft>
-              <a:defRPr sz="1600">
-                <a:solidFill>
-                  <a:srgbClr val="282828"/>
-                </a:solidFill>
-              </a:defRPr>
-            </a:pPr>
-            <a:r>
-              <a:t>   • 15% uplift in promotion ROI</a:t>
+              <a:t>📈 Performance Improvements:</a:t>
+            </a:r>
+          </a:p>
+          <a:p>
+            <a:pPr>
+              <a:lnSpc>
+                <a:spcPct val="120000"/>
+              </a:lnSpc>
+              <a:spcBef>
+                <a:spcPts val="400"/>
+              </a:spcBef>
+              <a:spcAft>
+                <a:spcPts val="400"/>
+              </a:spcAft>
+              <a:defRPr sz="1600">
+                <a:solidFill>
+                  <a:srgbClr val="282828"/>
+                </a:solidFill>
+              </a:defRPr>
+            </a:pPr>
+            <a:r>
+              <a:t>   • 80% reduction in analysis time</a:t>
+            </a:r>
+          </a:p>
+          <a:p>
+            <a:pPr>
+              <a:lnSpc>
+                <a:spcPct val="120000"/>
+              </a:lnSpc>
+              <a:spcBef>
+                <a:spcPts val="400"/>
+              </a:spcBef>
+              <a:spcAft>
+                <a:spcPts val="400"/>
+              </a:spcAft>
+              <a:defRPr sz="1600">
+                <a:solidFill>
+                  <a:srgbClr val="282828"/>
+                </a:solidFill>
+              </a:defRPr>
+            </a:pPr>
+            <a:r>
+              <a:t>   • 95%+ accuracy in insights</a:t>
+            </a:r>
+          </a:p>
+          <a:p>
+            <a:pPr>
+              <a:lnSpc>
+                <a:spcPct val="120000"/>
+              </a:lnSpc>
+              <a:spcBef>
+                <a:spcPts val="400"/>
+              </a:spcBef>
+              <a:spcAft>
+                <a:spcPts val="400"/>
+              </a:spcAft>
+              <a:defRPr sz="1600">
+                <a:solidFill>
+                  <a:srgbClr val="282828"/>
+                </a:solidFill>
+              </a:defRPr>
+            </a:pPr>
+            <a:r>
+              <a:t>   • Real-time anomaly detection</a:t>
+            </a:r>
+          </a:p>
+          <a:p>
+            <a:pPr>
+              <a:lnSpc>
+                <a:spcPct val="120000"/>
+              </a:lnSpc>
+              <a:spcBef>
+                <a:spcPts val="400"/>
+              </a:spcBef>
+              <a:spcAft>
+                <a:spcPts val="400"/>
+              </a:spcAft>
+              <a:defRPr sz="1600">
+                <a:solidFill>
+                  <a:srgbClr val="282828"/>
+                </a:solidFill>
+              </a:defRPr>
+            </a:pPr>
+          </a:p>
+          <a:p>
+            <a:pPr>
+              <a:lnSpc>
+                <a:spcPct val="120000"/>
+              </a:lnSpc>
+              <a:spcBef>
+                <a:spcPts val="400"/>
+              </a:spcBef>
+              <a:spcAft>
+                <a:spcPts val="400"/>
+              </a:spcAft>
+              <a:defRPr sz="1600">
+                <a:solidFill>
+                  <a:srgbClr val="282828"/>
+                </a:solidFill>
+              </a:defRPr>
+            </a:pPr>
+            <a:r>
+              <a:t>💰 Financial Impact:</a:t>
+            </a:r>
+          </a:p>
+          <a:p>
+            <a:pPr>
+              <a:lnSpc>
+                <a:spcPct val="120000"/>
+              </a:lnSpc>
+              <a:spcBef>
+                <a:spcPts val="400"/>
+              </a:spcBef>
+              <a:spcAft>
+                <a:spcPts val="400"/>
+              </a:spcAft>
+              <a:defRPr sz="1600">
+                <a:solidFill>
+                  <a:srgbClr val="282828"/>
+                </a:solidFill>
+              </a:defRPr>
+            </a:pPr>
+            <a:r>
+              <a:t>   • Optimized pricing strategies</a:t>
+            </a:r>
+          </a:p>
+          <a:p>
+            <a:pPr>
+              <a:lnSpc>
+                <a:spcPct val="120000"/>
+              </a:lnSpc>
+              <a:spcBef>
+                <a:spcPts val="400"/>
+              </a:spcBef>
+              <a:spcAft>
+                <a:spcPts val="400"/>
+              </a:spcAft>
+              <a:defRPr sz="1600">
+                <a:solidFill>
+                  <a:srgbClr val="282828"/>
+                </a:solidFill>
+              </a:defRPr>
+            </a:pPr>
+            <a:r>
+              <a:t>   • Reduced inventory costs</a:t>
+            </a:r>
+          </a:p>
+          <a:p>
+            <a:pPr>
+              <a:lnSpc>
+                <a:spcPct val="120000"/>
+              </a:lnSpc>
+              <a:spcBef>
+                <a:spcPts val="400"/>
+              </a:spcBef>
+              <a:spcAft>
+                <a:spcPts val="400"/>
+              </a:spcAft>
+              <a:defRPr sz="1600">
+                <a:solidFill>
+                  <a:srgbClr val="282828"/>
+                </a:solidFill>
+              </a:defRPr>
+            </a:pPr>
+            <a:r>
+              <a:t>   • Improved promotion ROI</a:t>
+            </a:r>
+          </a:p>
+          <a:p>
+            <a:pPr>
+              <a:lnSpc>
+                <a:spcPct val="120000"/>
+              </a:lnSpc>
+              <a:spcBef>
+                <a:spcPts val="400"/>
+              </a:spcBef>
+              <a:spcAft>
+                <a:spcPts val="400"/>
+              </a:spcAft>
+              <a:defRPr sz="1600">
+                <a:solidFill>
+                  <a:srgbClr val="282828"/>
+                </a:solidFill>
+              </a:defRPr>
+            </a:pPr>
+          </a:p>
+          <a:p>
+            <a:pPr>
+              <a:lnSpc>
+                <a:spcPct val="120000"/>
+              </a:lnSpc>
+              <a:spcBef>
+                <a:spcPts val="400"/>
+              </a:spcBef>
+              <a:spcAft>
+                <a:spcPts val="400"/>
+              </a:spcAft>
+              <a:defRPr sz="1600">
+                <a:solidFill>
+                  <a:srgbClr val="282828"/>
+                </a:solidFill>
+              </a:defRPr>
+            </a:pPr>
+            <a:r>
+              <a:t>⚡ Operational Efficiency:</a:t>
+            </a:r>
+          </a:p>
+          <a:p>
+            <a:pPr>
+              <a:lnSpc>
+                <a:spcPct val="120000"/>
+              </a:lnSpc>
+              <a:spcBef>
+                <a:spcPts val="400"/>
+              </a:spcBef>
+              <a:spcAft>
+                <a:spcPts val="400"/>
+              </a:spcAft>
+              <a:defRPr sz="1600">
+                <a:solidFill>
+                  <a:srgbClr val="282828"/>
+                </a:solidFill>
+              </a:defRPr>
+            </a:pPr>
+            <a:r>
+              <a:t>   • Automated reporting</a:t>
+            </a:r>
+          </a:p>
+          <a:p>
+            <a:pPr>
+              <a:lnSpc>
+                <a:spcPct val="120000"/>
+              </a:lnSpc>
+              <a:spcBef>
+                <a:spcPts val="400"/>
+              </a:spcBef>
+              <a:spcAft>
+                <a:spcPts val="400"/>
+              </a:spcAft>
+              <a:defRPr sz="1600">
+                <a:solidFill>
+                  <a:srgbClr val="282828"/>
+                </a:solidFill>
+              </a:defRPr>
+            </a:pPr>
+            <a:r>
+              <a:t>   • Proactive alert management</a:t>
+            </a:r>
+          </a:p>
+          <a:p>
+            <a:pPr>
+              <a:lnSpc>
+                <a:spcPct val="120000"/>
+              </a:lnSpc>
+              <a:spcBef>
+                <a:spcPts val="400"/>
+              </a:spcBef>
+              <a:spcAft>
+                <a:spcPts val="400"/>
+              </a:spcAft>
+              <a:defRPr sz="1600">
+                <a:solidFill>
+                  <a:srgbClr val="282828"/>
+                </a:solidFill>
+              </a:defRPr>
+            </a:pPr>
+            <a:r>
+              <a:t>   • Faster decision-making cycles</a:t>
             </a:r>
           </a:p>
         </p:txBody>
@@ -10626,7 +11371,7 @@
               </a:defRPr>
             </a:pPr>
             <a:r>
-              <a:t>Support &amp; Training</a:t>
+              <a:t>Comprehensive Support</a:t>
             </a:r>
           </a:p>
         </p:txBody>
@@ -10805,112 +11550,313 @@
               </a:defRPr>
             </a:pPr>
             <a:r>
-              <a:t>✓ Onboarding training for your team</a:t>
-            </a:r>
-          </a:p>
-          <a:p>
-            <a:pPr>
-              <a:lnSpc>
-                <a:spcPct val="120000"/>
-              </a:lnSpc>
-              <a:spcBef>
-                <a:spcPts val="400"/>
-              </a:spcBef>
-              <a:spcAft>
-                <a:spcPts val="400"/>
-              </a:spcAft>
-              <a:defRPr sz="1600">
-                <a:solidFill>
-                  <a:srgbClr val="282828"/>
-                </a:solidFill>
-              </a:defRPr>
-            </a:pPr>
-            <a:r>
-              <a:t>✓ 24/7 technical support</a:t>
-            </a:r>
-          </a:p>
-          <a:p>
-            <a:pPr>
-              <a:lnSpc>
-                <a:spcPct val="120000"/>
-              </a:lnSpc>
-              <a:spcBef>
-                <a:spcPts val="400"/>
-              </a:spcBef>
-              <a:spcAft>
-                <a:spcPts val="400"/>
-              </a:spcAft>
-              <a:defRPr sz="1600">
-                <a:solidFill>
-                  <a:srgbClr val="282828"/>
-                </a:solidFill>
-              </a:defRPr>
-            </a:pPr>
-            <a:r>
-              <a:t>✓ Monthly strategy sessions</a:t>
-            </a:r>
-          </a:p>
-          <a:p>
-            <a:pPr>
-              <a:lnSpc>
-                <a:spcPct val="120000"/>
-              </a:lnSpc>
-              <a:spcBef>
-                <a:spcPts val="400"/>
-              </a:spcBef>
-              <a:spcAft>
-                <a:spcPts val="400"/>
-              </a:spcAft>
-              <a:defRPr sz="1600">
-                <a:solidFill>
-                  <a:srgbClr val="282828"/>
-                </a:solidFill>
-              </a:defRPr>
-            </a:pPr>
-            <a:r>
-              <a:t>✓ Custom report templates</a:t>
-            </a:r>
-          </a:p>
-          <a:p>
-            <a:pPr>
-              <a:lnSpc>
-                <a:spcPct val="120000"/>
-              </a:lnSpc>
-              <a:spcBef>
-                <a:spcPts val="400"/>
-              </a:spcBef>
-              <a:spcAft>
-                <a:spcPts val="400"/>
-              </a:spcAft>
-              <a:defRPr sz="1600">
-                <a:solidFill>
-                  <a:srgbClr val="282828"/>
-                </a:solidFill>
-              </a:defRPr>
-            </a:pPr>
-            <a:r>
-              <a:t>✓ Integration assistance</a:t>
-            </a:r>
-          </a:p>
-          <a:p>
-            <a:pPr>
-              <a:lnSpc>
-                <a:spcPct val="120000"/>
-              </a:lnSpc>
-              <a:spcBef>
-                <a:spcPts val="400"/>
-              </a:spcBef>
-              <a:spcAft>
-                <a:spcPts val="400"/>
-              </a:spcAft>
-              <a:defRPr sz="1600">
-                <a:solidFill>
-                  <a:srgbClr val="282828"/>
-                </a:solidFill>
-              </a:defRPr>
-            </a:pPr>
-            <a:r>
-              <a:t>✓ Dedicated account manager</a:t>
+              <a:t>🎓 Training &amp; Onboarding</a:t>
+            </a:r>
+          </a:p>
+          <a:p>
+            <a:pPr>
+              <a:lnSpc>
+                <a:spcPct val="120000"/>
+              </a:lnSpc>
+              <a:spcBef>
+                <a:spcPts val="400"/>
+              </a:spcBef>
+              <a:spcAft>
+                <a:spcPts val="400"/>
+              </a:spcAft>
+              <a:defRPr sz="1600">
+                <a:solidFill>
+                  <a:srgbClr val="282828"/>
+                </a:solidFill>
+              </a:defRPr>
+            </a:pPr>
+            <a:r>
+              <a:t>   • Comprehensive user training programs</a:t>
+            </a:r>
+          </a:p>
+          <a:p>
+            <a:pPr>
+              <a:lnSpc>
+                <a:spcPct val="120000"/>
+              </a:lnSpc>
+              <a:spcBef>
+                <a:spcPts val="400"/>
+              </a:spcBef>
+              <a:spcAft>
+                <a:spcPts val="400"/>
+              </a:spcAft>
+              <a:defRPr sz="1600">
+                <a:solidFill>
+                  <a:srgbClr val="282828"/>
+                </a:solidFill>
+              </a:defRPr>
+            </a:pPr>
+            <a:r>
+              <a:t>   • Customized onboarding for your team</a:t>
+            </a:r>
+          </a:p>
+          <a:p>
+            <a:pPr>
+              <a:lnSpc>
+                <a:spcPct val="120000"/>
+              </a:lnSpc>
+              <a:spcBef>
+                <a:spcPts val="400"/>
+              </a:spcBef>
+              <a:spcAft>
+                <a:spcPts val="400"/>
+              </a:spcAft>
+              <a:defRPr sz="1600">
+                <a:solidFill>
+                  <a:srgbClr val="282828"/>
+                </a:solidFill>
+              </a:defRPr>
+            </a:pPr>
+          </a:p>
+          <a:p>
+            <a:pPr>
+              <a:lnSpc>
+                <a:spcPct val="120000"/>
+              </a:lnSpc>
+              <a:spcBef>
+                <a:spcPts val="400"/>
+              </a:spcBef>
+              <a:spcAft>
+                <a:spcPts val="400"/>
+              </a:spcAft>
+              <a:defRPr sz="1600">
+                <a:solidFill>
+                  <a:srgbClr val="282828"/>
+                </a:solidFill>
+              </a:defRPr>
+            </a:pPr>
+            <a:r>
+              <a:t>🛟 Technical Support</a:t>
+            </a:r>
+          </a:p>
+          <a:p>
+            <a:pPr>
+              <a:lnSpc>
+                <a:spcPct val="120000"/>
+              </a:lnSpc>
+              <a:spcBef>
+                <a:spcPts val="400"/>
+              </a:spcBef>
+              <a:spcAft>
+                <a:spcPts val="400"/>
+              </a:spcAft>
+              <a:defRPr sz="1600">
+                <a:solidFill>
+                  <a:srgbClr val="282828"/>
+                </a:solidFill>
+              </a:defRPr>
+            </a:pPr>
+            <a:r>
+              <a:t>   • 24/7 technical assistance</a:t>
+            </a:r>
+          </a:p>
+          <a:p>
+            <a:pPr>
+              <a:lnSpc>
+                <a:spcPct val="120000"/>
+              </a:lnSpc>
+              <a:spcBef>
+                <a:spcPts val="400"/>
+              </a:spcBef>
+              <a:spcAft>
+                <a:spcPts val="400"/>
+              </a:spcAft>
+              <a:defRPr sz="1600">
+                <a:solidFill>
+                  <a:srgbClr val="282828"/>
+                </a:solidFill>
+              </a:defRPr>
+            </a:pPr>
+            <a:r>
+              <a:t>   • Dedicated support channels</a:t>
+            </a:r>
+          </a:p>
+          <a:p>
+            <a:pPr>
+              <a:lnSpc>
+                <a:spcPct val="120000"/>
+              </a:lnSpc>
+              <a:spcBef>
+                <a:spcPts val="400"/>
+              </a:spcBef>
+              <a:spcAft>
+                <a:spcPts val="400"/>
+              </a:spcAft>
+              <a:defRPr sz="1600">
+                <a:solidFill>
+                  <a:srgbClr val="282828"/>
+                </a:solidFill>
+              </a:defRPr>
+            </a:pPr>
+          </a:p>
+          <a:p>
+            <a:pPr>
+              <a:lnSpc>
+                <a:spcPct val="120000"/>
+              </a:lnSpc>
+              <a:spcBef>
+                <a:spcPts val="400"/>
+              </a:spcBef>
+              <a:spcAft>
+                <a:spcPts val="400"/>
+              </a:spcAft>
+              <a:defRPr sz="1600">
+                <a:solidFill>
+                  <a:srgbClr val="282828"/>
+                </a:solidFill>
+              </a:defRPr>
+            </a:pPr>
+            <a:r>
+              <a:t>📊 Strategic Services</a:t>
+            </a:r>
+          </a:p>
+          <a:p>
+            <a:pPr>
+              <a:lnSpc>
+                <a:spcPct val="120000"/>
+              </a:lnSpc>
+              <a:spcBef>
+                <a:spcPts val="400"/>
+              </a:spcBef>
+              <a:spcAft>
+                <a:spcPts val="400"/>
+              </a:spcAft>
+              <a:defRPr sz="1600">
+                <a:solidFill>
+                  <a:srgbClr val="282828"/>
+                </a:solidFill>
+              </a:defRPr>
+            </a:pPr>
+            <a:r>
+              <a:t>   • Monthly strategy review sessions</a:t>
+            </a:r>
+          </a:p>
+          <a:p>
+            <a:pPr>
+              <a:lnSpc>
+                <a:spcPct val="120000"/>
+              </a:lnSpc>
+              <a:spcBef>
+                <a:spcPts val="400"/>
+              </a:spcBef>
+              <a:spcAft>
+                <a:spcPts val="400"/>
+              </a:spcAft>
+              <a:defRPr sz="1600">
+                <a:solidFill>
+                  <a:srgbClr val="282828"/>
+                </a:solidFill>
+              </a:defRPr>
+            </a:pPr>
+            <a:r>
+              <a:t>   • Custom report template development</a:t>
+            </a:r>
+          </a:p>
+          <a:p>
+            <a:pPr>
+              <a:lnSpc>
+                <a:spcPct val="120000"/>
+              </a:lnSpc>
+              <a:spcBef>
+                <a:spcPts val="400"/>
+              </a:spcBef>
+              <a:spcAft>
+                <a:spcPts val="400"/>
+              </a:spcAft>
+              <a:defRPr sz="1600">
+                <a:solidFill>
+                  <a:srgbClr val="282828"/>
+                </a:solidFill>
+              </a:defRPr>
+            </a:pPr>
+            <a:r>
+              <a:t>   • Integration and deployment assistance</a:t>
+            </a:r>
+          </a:p>
+          <a:p>
+            <a:pPr>
+              <a:lnSpc>
+                <a:spcPct val="120000"/>
+              </a:lnSpc>
+              <a:spcBef>
+                <a:spcPts val="400"/>
+              </a:spcBef>
+              <a:spcAft>
+                <a:spcPts val="400"/>
+              </a:spcAft>
+              <a:defRPr sz="1600">
+                <a:solidFill>
+                  <a:srgbClr val="282828"/>
+                </a:solidFill>
+              </a:defRPr>
+            </a:pPr>
+          </a:p>
+          <a:p>
+            <a:pPr>
+              <a:lnSpc>
+                <a:spcPct val="120000"/>
+              </a:lnSpc>
+              <a:spcBef>
+                <a:spcPts val="400"/>
+              </a:spcBef>
+              <a:spcAft>
+                <a:spcPts val="400"/>
+              </a:spcAft>
+              <a:defRPr sz="1600">
+                <a:solidFill>
+                  <a:srgbClr val="282828"/>
+                </a:solidFill>
+              </a:defRPr>
+            </a:pPr>
+            <a:r>
+              <a:t>👤 Account Management</a:t>
+            </a:r>
+          </a:p>
+          <a:p>
+            <a:pPr>
+              <a:lnSpc>
+                <a:spcPct val="120000"/>
+              </a:lnSpc>
+              <a:spcBef>
+                <a:spcPts val="400"/>
+              </a:spcBef>
+              <a:spcAft>
+                <a:spcPts val="400"/>
+              </a:spcAft>
+              <a:defRPr sz="1600">
+                <a:solidFill>
+                  <a:srgbClr val="282828"/>
+                </a:solidFill>
+              </a:defRPr>
+            </a:pPr>
+            <a:r>
+              <a:t>   • Dedicated account manager</a:t>
+            </a:r>
+          </a:p>
+          <a:p>
+            <a:pPr>
+              <a:lnSpc>
+                <a:spcPct val="120000"/>
+              </a:lnSpc>
+              <a:spcBef>
+                <a:spcPts val="400"/>
+              </a:spcBef>
+              <a:spcAft>
+                <a:spcPts val="400"/>
+              </a:spcAft>
+              <a:defRPr sz="1600">
+                <a:solidFill>
+                  <a:srgbClr val="282828"/>
+                </a:solidFill>
+              </a:defRPr>
+            </a:pPr>
+            <a:r>
+              <a:t>   • Regular check-ins and optimization</a:t>
             </a:r>
           </a:p>
         </p:txBody>
@@ -11033,7 +11979,7 @@
               </a:defRPr>
             </a:pPr>
             <a:r>
-              <a:t>Risk Management</a:t>
+              <a:t>Risk Management &amp; Mitigation</a:t>
             </a:r>
           </a:p>
         </p:txBody>
@@ -11212,187 +12158,247 @@
               </a:defRPr>
             </a:pPr>
             <a:r>
-              <a:t>Risk: Learning curve for new tool</a:t>
-            </a:r>
-          </a:p>
-          <a:p>
-            <a:pPr>
-              <a:lnSpc>
-                <a:spcPct val="120000"/>
-              </a:lnSpc>
-              <a:spcBef>
-                <a:spcPts val="400"/>
-              </a:spcBef>
-              <a:spcAft>
-                <a:spcPts val="400"/>
-              </a:spcAft>
-              <a:defRPr sz="1600">
-                <a:solidFill>
-                  <a:srgbClr val="282828"/>
-                </a:solidFill>
-              </a:defRPr>
-            </a:pPr>
-            <a:r>
-              <a:t>→ Solution: Comprehensive training + support</a:t>
-            </a:r>
-          </a:p>
-          <a:p>
-            <a:pPr>
-              <a:lnSpc>
-                <a:spcPct val="120000"/>
-              </a:lnSpc>
-              <a:spcBef>
-                <a:spcPts val="400"/>
-              </a:spcBef>
-              <a:spcAft>
-                <a:spcPts val="400"/>
-              </a:spcAft>
-              <a:defRPr sz="1600">
-                <a:solidFill>
-                  <a:srgbClr val="282828"/>
-                </a:solidFill>
-              </a:defRPr>
-            </a:pPr>
-          </a:p>
-          <a:p>
-            <a:pPr>
-              <a:lnSpc>
-                <a:spcPct val="120000"/>
-              </a:lnSpc>
-              <a:spcBef>
-                <a:spcPts val="400"/>
-              </a:spcBef>
-              <a:spcAft>
-                <a:spcPts val="400"/>
-              </a:spcAft>
-              <a:defRPr sz="1600">
-                <a:solidFill>
-                  <a:srgbClr val="282828"/>
-                </a:solidFill>
-              </a:defRPr>
-            </a:pPr>
-            <a:r>
-              <a:t>Risk: Data quality issues</a:t>
-            </a:r>
-          </a:p>
-          <a:p>
-            <a:pPr>
-              <a:lnSpc>
-                <a:spcPct val="120000"/>
-              </a:lnSpc>
-              <a:spcBef>
-                <a:spcPts val="400"/>
-              </a:spcBef>
-              <a:spcAft>
-                <a:spcPts val="400"/>
-              </a:spcAft>
-              <a:defRPr sz="1600">
-                <a:solidFill>
-                  <a:srgbClr val="282828"/>
-                </a:solidFill>
-              </a:defRPr>
-            </a:pPr>
-            <a:r>
-              <a:t>→ Solution: Data validation and cleaning tools</a:t>
-            </a:r>
-          </a:p>
-          <a:p>
-            <a:pPr>
-              <a:lnSpc>
-                <a:spcPct val="120000"/>
-              </a:lnSpc>
-              <a:spcBef>
-                <a:spcPts val="400"/>
-              </a:spcBef>
-              <a:spcAft>
-                <a:spcPts val="400"/>
-              </a:spcAft>
-              <a:defRPr sz="1600">
-                <a:solidFill>
-                  <a:srgbClr val="282828"/>
-                </a:solidFill>
-              </a:defRPr>
-            </a:pPr>
-          </a:p>
-          <a:p>
-            <a:pPr>
-              <a:lnSpc>
-                <a:spcPct val="120000"/>
-              </a:lnSpc>
-              <a:spcBef>
-                <a:spcPts val="400"/>
-              </a:spcBef>
-              <a:spcAft>
-                <a:spcPts val="400"/>
-              </a:spcAft>
-              <a:defRPr sz="1600">
-                <a:solidFill>
-                  <a:srgbClr val="282828"/>
-                </a:solidFill>
-              </a:defRPr>
-            </a:pPr>
-            <a:r>
-              <a:t>Risk: Integration with existing systems</a:t>
-            </a:r>
-          </a:p>
-          <a:p>
-            <a:pPr>
-              <a:lnSpc>
-                <a:spcPct val="120000"/>
-              </a:lnSpc>
-              <a:spcBef>
-                <a:spcPts val="400"/>
-              </a:spcBef>
-              <a:spcAft>
-                <a:spcPts val="400"/>
-              </a:spcAft>
-              <a:defRPr sz="1600">
-                <a:solidFill>
-                  <a:srgbClr val="282828"/>
-                </a:solidFill>
-              </a:defRPr>
-            </a:pPr>
-            <a:r>
-              <a:t>→ Solution: Works with standard data formats</a:t>
-            </a:r>
-          </a:p>
-          <a:p>
-            <a:pPr>
-              <a:lnSpc>
-                <a:spcPct val="120000"/>
-              </a:lnSpc>
-              <a:spcBef>
-                <a:spcPts val="400"/>
-              </a:spcBef>
-              <a:spcAft>
-                <a:spcPts val="400"/>
-              </a:spcAft>
-              <a:defRPr sz="1600">
-                <a:solidFill>
-                  <a:srgbClr val="282828"/>
-                </a:solidFill>
-              </a:defRPr>
-            </a:pPr>
-          </a:p>
-          <a:p>
-            <a:pPr>
-              <a:lnSpc>
-                <a:spcPct val="120000"/>
-              </a:lnSpc>
-              <a:spcBef>
-                <a:spcPts val="400"/>
-              </a:spcBef>
-              <a:spcAft>
-                <a:spcPts val="400"/>
-              </a:spcAft>
-              <a:defRPr sz="1600">
-                <a:solidFill>
-                  <a:srgbClr val="282828"/>
-                </a:solidFill>
-              </a:defRPr>
-            </a:pPr>
-            <a:r>
-              <a:t>Result: Low risk, high reward implementation</a:t>
+              <a:t>📚 User Adoption Risk</a:t>
+            </a:r>
+          </a:p>
+          <a:p>
+            <a:pPr>
+              <a:lnSpc>
+                <a:spcPct val="120000"/>
+              </a:lnSpc>
+              <a:spcBef>
+                <a:spcPts val="400"/>
+              </a:spcBef>
+              <a:spcAft>
+                <a:spcPts val="400"/>
+              </a:spcAft>
+              <a:defRPr sz="1600">
+                <a:solidFill>
+                  <a:srgbClr val="282828"/>
+                </a:solidFill>
+              </a:defRPr>
+            </a:pPr>
+            <a:r>
+              <a:t>   → Mitigation: Comprehensive training, intuitive interface</a:t>
+            </a:r>
+          </a:p>
+          <a:p>
+            <a:pPr>
+              <a:lnSpc>
+                <a:spcPct val="120000"/>
+              </a:lnSpc>
+              <a:spcBef>
+                <a:spcPts val="400"/>
+              </a:spcBef>
+              <a:spcAft>
+                <a:spcPts val="400"/>
+              </a:spcAft>
+              <a:defRPr sz="1600">
+                <a:solidFill>
+                  <a:srgbClr val="282828"/>
+                </a:solidFill>
+              </a:defRPr>
+            </a:pPr>
+          </a:p>
+          <a:p>
+            <a:pPr>
+              <a:lnSpc>
+                <a:spcPct val="120000"/>
+              </a:lnSpc>
+              <a:spcBef>
+                <a:spcPts val="400"/>
+              </a:spcBef>
+              <a:spcAft>
+                <a:spcPts val="400"/>
+              </a:spcAft>
+              <a:defRPr sz="1600">
+                <a:solidFill>
+                  <a:srgbClr val="282828"/>
+                </a:solidFill>
+              </a:defRPr>
+            </a:pPr>
+            <a:r>
+              <a:t>📊 Data Quality Concerns</a:t>
+            </a:r>
+          </a:p>
+          <a:p>
+            <a:pPr>
+              <a:lnSpc>
+                <a:spcPct val="120000"/>
+              </a:lnSpc>
+              <a:spcBef>
+                <a:spcPts val="400"/>
+              </a:spcBef>
+              <a:spcAft>
+                <a:spcPts val="400"/>
+              </a:spcAft>
+              <a:defRPr sz="1600">
+                <a:solidFill>
+                  <a:srgbClr val="282828"/>
+                </a:solidFill>
+              </a:defRPr>
+            </a:pPr>
+            <a:r>
+              <a:t>   → Mitigation: Built-in validation and quality checks</a:t>
+            </a:r>
+          </a:p>
+          <a:p>
+            <a:pPr>
+              <a:lnSpc>
+                <a:spcPct val="120000"/>
+              </a:lnSpc>
+              <a:spcBef>
+                <a:spcPts val="400"/>
+              </a:spcBef>
+              <a:spcAft>
+                <a:spcPts val="400"/>
+              </a:spcAft>
+              <a:defRPr sz="1600">
+                <a:solidFill>
+                  <a:srgbClr val="282828"/>
+                </a:solidFill>
+              </a:defRPr>
+            </a:pPr>
+          </a:p>
+          <a:p>
+            <a:pPr>
+              <a:lnSpc>
+                <a:spcPct val="120000"/>
+              </a:lnSpc>
+              <a:spcBef>
+                <a:spcPts val="400"/>
+              </a:spcBef>
+              <a:spcAft>
+                <a:spcPts val="400"/>
+              </a:spcAft>
+              <a:defRPr sz="1600">
+                <a:solidFill>
+                  <a:srgbClr val="282828"/>
+                </a:solidFill>
+              </a:defRPr>
+            </a:pPr>
+            <a:r>
+              <a:t>🔗 Integration Challenges</a:t>
+            </a:r>
+          </a:p>
+          <a:p>
+            <a:pPr>
+              <a:lnSpc>
+                <a:spcPct val="120000"/>
+              </a:lnSpc>
+              <a:spcBef>
+                <a:spcPts val="400"/>
+              </a:spcBef>
+              <a:spcAft>
+                <a:spcPts val="400"/>
+              </a:spcAft>
+              <a:defRPr sz="1600">
+                <a:solidFill>
+                  <a:srgbClr val="282828"/>
+                </a:solidFill>
+              </a:defRPr>
+            </a:pPr>
+            <a:r>
+              <a:t>   → Mitigation: Standard formats, flexible architecture</a:t>
+            </a:r>
+          </a:p>
+          <a:p>
+            <a:pPr>
+              <a:lnSpc>
+                <a:spcPct val="120000"/>
+              </a:lnSpc>
+              <a:spcBef>
+                <a:spcPts val="400"/>
+              </a:spcBef>
+              <a:spcAft>
+                <a:spcPts val="400"/>
+              </a:spcAft>
+              <a:defRPr sz="1600">
+                <a:solidFill>
+                  <a:srgbClr val="282828"/>
+                </a:solidFill>
+              </a:defRPr>
+            </a:pPr>
+          </a:p>
+          <a:p>
+            <a:pPr>
+              <a:lnSpc>
+                <a:spcPct val="120000"/>
+              </a:lnSpc>
+              <a:spcBef>
+                <a:spcPts val="400"/>
+              </a:spcBef>
+              <a:spcAft>
+                <a:spcPts val="400"/>
+              </a:spcAft>
+              <a:defRPr sz="1600">
+                <a:solidFill>
+                  <a:srgbClr val="282828"/>
+                </a:solidFill>
+              </a:defRPr>
+            </a:pPr>
+            <a:r>
+              <a:t>⚡ Performance Concerns</a:t>
+            </a:r>
+          </a:p>
+          <a:p>
+            <a:pPr>
+              <a:lnSpc>
+                <a:spcPct val="120000"/>
+              </a:lnSpc>
+              <a:spcBef>
+                <a:spcPts val="400"/>
+              </a:spcBef>
+              <a:spcAft>
+                <a:spcPts val="400"/>
+              </a:spcAft>
+              <a:defRPr sz="1600">
+                <a:solidFill>
+                  <a:srgbClr val="282828"/>
+                </a:solidFill>
+              </a:defRPr>
+            </a:pPr>
+            <a:r>
+              <a:t>   → Mitigation: Optimized for large datasets, scalable design</a:t>
+            </a:r>
+          </a:p>
+          <a:p>
+            <a:pPr>
+              <a:lnSpc>
+                <a:spcPct val="120000"/>
+              </a:lnSpc>
+              <a:spcBef>
+                <a:spcPts val="400"/>
+              </a:spcBef>
+              <a:spcAft>
+                <a:spcPts val="400"/>
+              </a:spcAft>
+              <a:defRPr sz="1600">
+                <a:solidFill>
+                  <a:srgbClr val="282828"/>
+                </a:solidFill>
+              </a:defRPr>
+            </a:pPr>
+          </a:p>
+          <a:p>
+            <a:pPr>
+              <a:lnSpc>
+                <a:spcPct val="120000"/>
+              </a:lnSpc>
+              <a:spcBef>
+                <a:spcPts val="400"/>
+              </a:spcBef>
+              <a:spcAft>
+                <a:spcPts val="400"/>
+              </a:spcAft>
+              <a:defRPr sz="1600">
+                <a:solidFill>
+                  <a:srgbClr val="282828"/>
+                </a:solidFill>
+              </a:defRPr>
+            </a:pPr>
+            <a:r>
+              <a:t>Result: Low-risk implementation with high business value</a:t>
             </a:r>
           </a:p>
         </p:txBody>
@@ -11515,7 +12521,7 @@
               </a:defRPr>
             </a:pPr>
             <a:r>
-              <a:t>Next Steps</a:t>
+              <a:t>Recommended Next Steps</a:t>
             </a:r>
           </a:p>
         </p:txBody>
@@ -11694,166 +12700,271 @@
               </a:defRPr>
             </a:pPr>
             <a:r>
-              <a:t>1. Review this presentation with your team</a:t>
-            </a:r>
-          </a:p>
-          <a:p>
-            <a:pPr>
-              <a:lnSpc>
-                <a:spcPct val="120000"/>
-              </a:lnSpc>
-              <a:spcBef>
-                <a:spcPts val="400"/>
-              </a:spcBef>
-              <a:spcAft>
-                <a:spcPts val="400"/>
-              </a:spcAft>
-              <a:defRPr sz="1600">
-                <a:solidFill>
-                  <a:srgbClr val="282828"/>
-                </a:solidFill>
-              </a:defRPr>
-            </a:pPr>
-          </a:p>
-          <a:p>
-            <a:pPr>
-              <a:lnSpc>
-                <a:spcPct val="120000"/>
-              </a:lnSpc>
-              <a:spcBef>
-                <a:spcPts val="400"/>
-              </a:spcBef>
-              <a:spcAft>
-                <a:spcPts val="400"/>
-              </a:spcAft>
-              <a:defRPr sz="1600">
-                <a:solidFill>
-                  <a:srgbClr val="282828"/>
-                </a:solidFill>
-              </a:defRPr>
-            </a:pPr>
-            <a:r>
-              <a:t>2. Schedule a live demo (30 minutes)</a:t>
-            </a:r>
-          </a:p>
-          <a:p>
-            <a:pPr>
-              <a:lnSpc>
-                <a:spcPct val="120000"/>
-              </a:lnSpc>
-              <a:spcBef>
-                <a:spcPts val="400"/>
-              </a:spcBef>
-              <a:spcAft>
-                <a:spcPts val="400"/>
-              </a:spcAft>
-              <a:defRPr sz="1600">
-                <a:solidFill>
-                  <a:srgbClr val="282828"/>
-                </a:solidFill>
-              </a:defRPr>
-            </a:pPr>
-            <a:r>
-              <a:t>   See it work with your actual data</a:t>
-            </a:r>
-          </a:p>
-          <a:p>
-            <a:pPr>
-              <a:lnSpc>
-                <a:spcPct val="120000"/>
-              </a:lnSpc>
-              <a:spcBef>
-                <a:spcPts val="400"/>
-              </a:spcBef>
-              <a:spcAft>
-                <a:spcPts val="400"/>
-              </a:spcAft>
-              <a:defRPr sz="1600">
-                <a:solidFill>
-                  <a:srgbClr val="282828"/>
-                </a:solidFill>
-              </a:defRPr>
-            </a:pPr>
-          </a:p>
-          <a:p>
-            <a:pPr>
-              <a:lnSpc>
-                <a:spcPct val="120000"/>
-              </a:lnSpc>
-              <a:spcBef>
-                <a:spcPts val="400"/>
-              </a:spcBef>
-              <a:spcAft>
-                <a:spcPts val="400"/>
-              </a:spcAft>
-              <a:defRPr sz="1600">
-                <a:solidFill>
-                  <a:srgbClr val="282828"/>
-                </a:solidFill>
-              </a:defRPr>
-            </a:pPr>
-            <a:r>
-              <a:t>3. Start a pilot program (1-2 weeks)</a:t>
-            </a:r>
-          </a:p>
-          <a:p>
-            <a:pPr>
-              <a:lnSpc>
-                <a:spcPct val="120000"/>
-              </a:lnSpc>
-              <a:spcBef>
-                <a:spcPts val="400"/>
-              </a:spcBef>
-              <a:spcAft>
-                <a:spcPts val="400"/>
-              </a:spcAft>
-              <a:defRPr sz="1600">
-                <a:solidFill>
-                  <a:srgbClr val="282828"/>
-                </a:solidFill>
-              </a:defRPr>
-            </a:pPr>
-            <a:r>
-              <a:t>   Small team, limited data</a:t>
-            </a:r>
-          </a:p>
-          <a:p>
-            <a:pPr>
-              <a:lnSpc>
-                <a:spcPct val="120000"/>
-              </a:lnSpc>
-              <a:spcBef>
-                <a:spcPts val="400"/>
-              </a:spcBef>
-              <a:spcAft>
-                <a:spcPts val="400"/>
-              </a:spcAft>
-              <a:defRPr sz="1600">
-                <a:solidFill>
-                  <a:srgbClr val="282828"/>
-                </a:solidFill>
-              </a:defRPr>
-            </a:pPr>
-          </a:p>
-          <a:p>
-            <a:pPr>
-              <a:lnSpc>
-                <a:spcPct val="120000"/>
-              </a:lnSpc>
-              <a:spcBef>
-                <a:spcPts val="400"/>
-              </a:spcBef>
-              <a:spcAft>
-                <a:spcPts val="400"/>
-              </a:spcAft>
-              <a:defRPr sz="1600">
-                <a:solidFill>
-                  <a:srgbClr val="282828"/>
-                </a:solidFill>
-              </a:defRPr>
-            </a:pPr>
-            <a:r>
-              <a:t>4. Full rollout if successful</a:t>
+              <a:t>1. Internal Review</a:t>
+            </a:r>
+          </a:p>
+          <a:p>
+            <a:pPr>
+              <a:lnSpc>
+                <a:spcPct val="120000"/>
+              </a:lnSpc>
+              <a:spcBef>
+                <a:spcPts val="400"/>
+              </a:spcBef>
+              <a:spcAft>
+                <a:spcPts val="400"/>
+              </a:spcAft>
+              <a:defRPr sz="1600">
+                <a:solidFill>
+                  <a:srgbClr val="282828"/>
+                </a:solidFill>
+              </a:defRPr>
+            </a:pPr>
+            <a:r>
+              <a:t>   Share this presentation with key stakeholders</a:t>
+            </a:r>
+          </a:p>
+          <a:p>
+            <a:pPr>
+              <a:lnSpc>
+                <a:spcPct val="120000"/>
+              </a:lnSpc>
+              <a:spcBef>
+                <a:spcPts val="400"/>
+              </a:spcBef>
+              <a:spcAft>
+                <a:spcPts val="400"/>
+              </a:spcAft>
+              <a:defRPr sz="1600">
+                <a:solidFill>
+                  <a:srgbClr val="282828"/>
+                </a:solidFill>
+              </a:defRPr>
+            </a:pPr>
+          </a:p>
+          <a:p>
+            <a:pPr>
+              <a:lnSpc>
+                <a:spcPct val="120000"/>
+              </a:lnSpc>
+              <a:spcBef>
+                <a:spcPts val="400"/>
+              </a:spcBef>
+              <a:spcAft>
+                <a:spcPts val="400"/>
+              </a:spcAft>
+              <a:defRPr sz="1600">
+                <a:solidFill>
+                  <a:srgbClr val="282828"/>
+                </a:solidFill>
+              </a:defRPr>
+            </a:pPr>
+            <a:r>
+              <a:t>2. Live Demonstration</a:t>
+            </a:r>
+          </a:p>
+          <a:p>
+            <a:pPr>
+              <a:lnSpc>
+                <a:spcPct val="120000"/>
+              </a:lnSpc>
+              <a:spcBef>
+                <a:spcPts val="400"/>
+              </a:spcBef>
+              <a:spcAft>
+                <a:spcPts val="400"/>
+              </a:spcAft>
+              <a:defRPr sz="1600">
+                <a:solidFill>
+                  <a:srgbClr val="282828"/>
+                </a:solidFill>
+              </a:defRPr>
+            </a:pPr>
+            <a:r>
+              <a:t>   Schedule 30-minute demo with your actual data</a:t>
+            </a:r>
+          </a:p>
+          <a:p>
+            <a:pPr>
+              <a:lnSpc>
+                <a:spcPct val="120000"/>
+              </a:lnSpc>
+              <a:spcBef>
+                <a:spcPts val="400"/>
+              </a:spcBef>
+              <a:spcAft>
+                <a:spcPts val="400"/>
+              </a:spcAft>
+              <a:defRPr sz="1600">
+                <a:solidFill>
+                  <a:srgbClr val="282828"/>
+                </a:solidFill>
+              </a:defRPr>
+            </a:pPr>
+            <a:r>
+              <a:t>   See the platform in action</a:t>
+            </a:r>
+          </a:p>
+          <a:p>
+            <a:pPr>
+              <a:lnSpc>
+                <a:spcPct val="120000"/>
+              </a:lnSpc>
+              <a:spcBef>
+                <a:spcPts val="400"/>
+              </a:spcBef>
+              <a:spcAft>
+                <a:spcPts val="400"/>
+              </a:spcAft>
+              <a:defRPr sz="1600">
+                <a:solidFill>
+                  <a:srgbClr val="282828"/>
+                </a:solidFill>
+              </a:defRPr>
+            </a:pPr>
+          </a:p>
+          <a:p>
+            <a:pPr>
+              <a:lnSpc>
+                <a:spcPct val="120000"/>
+              </a:lnSpc>
+              <a:spcBef>
+                <a:spcPts val="400"/>
+              </a:spcBef>
+              <a:spcAft>
+                <a:spcPts val="400"/>
+              </a:spcAft>
+              <a:defRPr sz="1600">
+                <a:solidFill>
+                  <a:srgbClr val="282828"/>
+                </a:solidFill>
+              </a:defRPr>
+            </a:pPr>
+            <a:r>
+              <a:t>3. Pilot Program</a:t>
+            </a:r>
+          </a:p>
+          <a:p>
+            <a:pPr>
+              <a:lnSpc>
+                <a:spcPct val="120000"/>
+              </a:lnSpc>
+              <a:spcBef>
+                <a:spcPts val="400"/>
+              </a:spcBef>
+              <a:spcAft>
+                <a:spcPts val="400"/>
+              </a:spcAft>
+              <a:defRPr sz="1600">
+                <a:solidFill>
+                  <a:srgbClr val="282828"/>
+                </a:solidFill>
+              </a:defRPr>
+            </a:pPr>
+            <a:r>
+              <a:t>   Launch 1-2 week pilot with selected team</a:t>
+            </a:r>
+          </a:p>
+          <a:p>
+            <a:pPr>
+              <a:lnSpc>
+                <a:spcPct val="120000"/>
+              </a:lnSpc>
+              <a:spcBef>
+                <a:spcPts val="400"/>
+              </a:spcBef>
+              <a:spcAft>
+                <a:spcPts val="400"/>
+              </a:spcAft>
+              <a:defRPr sz="1600">
+                <a:solidFill>
+                  <a:srgbClr val="282828"/>
+                </a:solidFill>
+              </a:defRPr>
+            </a:pPr>
+            <a:r>
+              <a:t>   Validate value and gather feedback</a:t>
+            </a:r>
+          </a:p>
+          <a:p>
+            <a:pPr>
+              <a:lnSpc>
+                <a:spcPct val="120000"/>
+              </a:lnSpc>
+              <a:spcBef>
+                <a:spcPts val="400"/>
+              </a:spcBef>
+              <a:spcAft>
+                <a:spcPts val="400"/>
+              </a:spcAft>
+              <a:defRPr sz="1600">
+                <a:solidFill>
+                  <a:srgbClr val="282828"/>
+                </a:solidFill>
+              </a:defRPr>
+            </a:pPr>
+          </a:p>
+          <a:p>
+            <a:pPr>
+              <a:lnSpc>
+                <a:spcPct val="120000"/>
+              </a:lnSpc>
+              <a:spcBef>
+                <a:spcPts val="400"/>
+              </a:spcBef>
+              <a:spcAft>
+                <a:spcPts val="400"/>
+              </a:spcAft>
+              <a:defRPr sz="1600">
+                <a:solidFill>
+                  <a:srgbClr val="282828"/>
+                </a:solidFill>
+              </a:defRPr>
+            </a:pPr>
+            <a:r>
+              <a:t>4. Full Deployment</a:t>
+            </a:r>
+          </a:p>
+          <a:p>
+            <a:pPr>
+              <a:lnSpc>
+                <a:spcPct val="120000"/>
+              </a:lnSpc>
+              <a:spcBef>
+                <a:spcPts val="400"/>
+              </a:spcBef>
+              <a:spcAft>
+                <a:spcPts val="400"/>
+              </a:spcAft>
+              <a:defRPr sz="1600">
+                <a:solidFill>
+                  <a:srgbClr val="282828"/>
+                </a:solidFill>
+              </a:defRPr>
+            </a:pPr>
+            <a:r>
+              <a:t>   Organization-wide rollout upon successful pilot</a:t>
+            </a:r>
+          </a:p>
+          <a:p>
+            <a:pPr>
+              <a:lnSpc>
+                <a:spcPct val="120000"/>
+              </a:lnSpc>
+              <a:spcBef>
+                <a:spcPts val="400"/>
+              </a:spcBef>
+              <a:spcAft>
+                <a:spcPts val="400"/>
+              </a:spcAft>
+              <a:defRPr sz="1600">
+                <a:solidFill>
+                  <a:srgbClr val="282828"/>
+                </a:solidFill>
+              </a:defRPr>
+            </a:pPr>
+            <a:r>
+              <a:t>   Ongoing support and optimization</a:t>
             </a:r>
           </a:p>
         </p:txBody>
@@ -12333,163 +13444,223 @@
               </a:defRPr>
             </a:pPr>
             <a:r>
-              <a:t>Email: info@cpgagent.com</a:t>
-            </a:r>
-          </a:p>
-          <a:p>
-            <a:pPr>
-              <a:lnSpc>
-                <a:spcPct val="120000"/>
-              </a:lnSpc>
-              <a:spcBef>
-                <a:spcPts val="400"/>
-              </a:spcBef>
-              <a:spcAft>
-                <a:spcPts val="400"/>
-              </a:spcAft>
-              <a:defRPr sz="1600">
-                <a:solidFill>
-                  <a:srgbClr val="282828"/>
-                </a:solidFill>
-              </a:defRPr>
-            </a:pPr>
-          </a:p>
-          <a:p>
-            <a:pPr>
-              <a:lnSpc>
-                <a:spcPct val="120000"/>
-              </a:lnSpc>
-              <a:spcBef>
-                <a:spcPts val="400"/>
-              </a:spcBef>
-              <a:spcAft>
-                <a:spcPts val="400"/>
-              </a:spcAft>
-              <a:defRPr sz="1600">
-                <a:solidFill>
-                  <a:srgbClr val="282828"/>
-                </a:solidFill>
-              </a:defRPr>
-            </a:pPr>
-            <a:r>
-              <a:t>Phone: (555) 123-4567</a:t>
-            </a:r>
-          </a:p>
-          <a:p>
-            <a:pPr>
-              <a:lnSpc>
-                <a:spcPct val="120000"/>
-              </a:lnSpc>
-              <a:spcBef>
-                <a:spcPts val="400"/>
-              </a:spcBef>
-              <a:spcAft>
-                <a:spcPts val="400"/>
-              </a:spcAft>
-              <a:defRPr sz="1600">
-                <a:solidFill>
-                  <a:srgbClr val="282828"/>
-                </a:solidFill>
-              </a:defRPr>
-            </a:pPr>
-          </a:p>
-          <a:p>
-            <a:pPr>
-              <a:lnSpc>
-                <a:spcPct val="120000"/>
-              </a:lnSpc>
-              <a:spcBef>
-                <a:spcPts val="400"/>
-              </a:spcBef>
-              <a:spcAft>
-                <a:spcPts val="400"/>
-              </a:spcAft>
-              <a:defRPr sz="1600">
-                <a:solidFill>
-                  <a:srgbClr val="282828"/>
-                </a:solidFill>
-              </a:defRPr>
-            </a:pPr>
-            <a:r>
-              <a:t>Web: www.cpgagent.com</a:t>
-            </a:r>
-          </a:p>
-          <a:p>
-            <a:pPr>
-              <a:lnSpc>
-                <a:spcPct val="120000"/>
-              </a:lnSpc>
-              <a:spcBef>
-                <a:spcPts val="400"/>
-              </a:spcBef>
-              <a:spcAft>
-                <a:spcPts val="400"/>
-              </a:spcAft>
-              <a:defRPr sz="1600">
-                <a:solidFill>
-                  <a:srgbClr val="282828"/>
-                </a:solidFill>
-              </a:defRPr>
-            </a:pPr>
-          </a:p>
-          <a:p>
-            <a:pPr>
-              <a:lnSpc>
-                <a:spcPct val="120000"/>
-              </a:lnSpc>
-              <a:spcBef>
-                <a:spcPts val="400"/>
-              </a:spcBef>
-              <a:spcAft>
-                <a:spcPts val="400"/>
-              </a:spcAft>
-              <a:defRPr sz="1600">
-                <a:solidFill>
-                  <a:srgbClr val="282828"/>
-                </a:solidFill>
-              </a:defRPr>
-            </a:pPr>
-            <a:r>
-              <a:t>Schedule a demo: www.cpgagent.com/demo</a:t>
-            </a:r>
-          </a:p>
-          <a:p>
-            <a:pPr>
-              <a:lnSpc>
-                <a:spcPct val="120000"/>
-              </a:lnSpc>
-              <a:spcBef>
-                <a:spcPts val="400"/>
-              </a:spcBef>
-              <a:spcAft>
-                <a:spcPts val="400"/>
-              </a:spcAft>
-              <a:defRPr sz="1600">
-                <a:solidFill>
-                  <a:srgbClr val="282828"/>
-                </a:solidFill>
-              </a:defRPr>
-            </a:pPr>
-          </a:p>
-          <a:p>
-            <a:pPr>
-              <a:lnSpc>
-                <a:spcPct val="120000"/>
-              </a:lnSpc>
-              <a:spcBef>
-                <a:spcPts val="400"/>
-              </a:spcBef>
-              <a:spcAft>
-                <a:spcPts val="400"/>
-              </a:spcAft>
-              <a:defRPr sz="1600">
-                <a:solidFill>
-                  <a:srgbClr val="282828"/>
-                </a:solidFill>
-              </a:defRPr>
-            </a:pPr>
-            <a:r>
-              <a:t>Ready to transform your analytics? Let's talk!</a:t>
+              <a:t>📧 Email: info@cpgagent.com</a:t>
+            </a:r>
+          </a:p>
+          <a:p>
+            <a:pPr>
+              <a:lnSpc>
+                <a:spcPct val="120000"/>
+              </a:lnSpc>
+              <a:spcBef>
+                <a:spcPts val="400"/>
+              </a:spcBef>
+              <a:spcAft>
+                <a:spcPts val="400"/>
+              </a:spcAft>
+              <a:defRPr sz="1600">
+                <a:solidFill>
+                  <a:srgbClr val="282828"/>
+                </a:solidFill>
+              </a:defRPr>
+            </a:pPr>
+          </a:p>
+          <a:p>
+            <a:pPr>
+              <a:lnSpc>
+                <a:spcPct val="120000"/>
+              </a:lnSpc>
+              <a:spcBef>
+                <a:spcPts val="400"/>
+              </a:spcBef>
+              <a:spcAft>
+                <a:spcPts val="400"/>
+              </a:spcAft>
+              <a:defRPr sz="1600">
+                <a:solidFill>
+                  <a:srgbClr val="282828"/>
+                </a:solidFill>
+              </a:defRPr>
+            </a:pPr>
+            <a:r>
+              <a:t>📞 Phone: (555) 123-4567</a:t>
+            </a:r>
+          </a:p>
+          <a:p>
+            <a:pPr>
+              <a:lnSpc>
+                <a:spcPct val="120000"/>
+              </a:lnSpc>
+              <a:spcBef>
+                <a:spcPts val="400"/>
+              </a:spcBef>
+              <a:spcAft>
+                <a:spcPts val="400"/>
+              </a:spcAft>
+              <a:defRPr sz="1600">
+                <a:solidFill>
+                  <a:srgbClr val="282828"/>
+                </a:solidFill>
+              </a:defRPr>
+            </a:pPr>
+          </a:p>
+          <a:p>
+            <a:pPr>
+              <a:lnSpc>
+                <a:spcPct val="120000"/>
+              </a:lnSpc>
+              <a:spcBef>
+                <a:spcPts val="400"/>
+              </a:spcBef>
+              <a:spcAft>
+                <a:spcPts val="400"/>
+              </a:spcAft>
+              <a:defRPr sz="1600">
+                <a:solidFill>
+                  <a:srgbClr val="282828"/>
+                </a:solidFill>
+              </a:defRPr>
+            </a:pPr>
+            <a:r>
+              <a:t>🌐 Website: www.cpgagent.com</a:t>
+            </a:r>
+          </a:p>
+          <a:p>
+            <a:pPr>
+              <a:lnSpc>
+                <a:spcPct val="120000"/>
+              </a:lnSpc>
+              <a:spcBef>
+                <a:spcPts val="400"/>
+              </a:spcBef>
+              <a:spcAft>
+                <a:spcPts val="400"/>
+              </a:spcAft>
+              <a:defRPr sz="1600">
+                <a:solidFill>
+                  <a:srgbClr val="282828"/>
+                </a:solidFill>
+              </a:defRPr>
+            </a:pPr>
+          </a:p>
+          <a:p>
+            <a:pPr>
+              <a:lnSpc>
+                <a:spcPct val="120000"/>
+              </a:lnSpc>
+              <a:spcBef>
+                <a:spcPts val="400"/>
+              </a:spcBef>
+              <a:spcAft>
+                <a:spcPts val="400"/>
+              </a:spcAft>
+              <a:defRPr sz="1600">
+                <a:solidFill>
+                  <a:srgbClr val="282828"/>
+                </a:solidFill>
+              </a:defRPr>
+            </a:pPr>
+            <a:r>
+              <a:t>📅 Schedule a Demo: www.cpgagent.com/demo</a:t>
+            </a:r>
+          </a:p>
+          <a:p>
+            <a:pPr>
+              <a:lnSpc>
+                <a:spcPct val="120000"/>
+              </a:lnSpc>
+              <a:spcBef>
+                <a:spcPts val="400"/>
+              </a:spcBef>
+              <a:spcAft>
+                <a:spcPts val="400"/>
+              </a:spcAft>
+              <a:defRPr sz="1600">
+                <a:solidFill>
+                  <a:srgbClr val="282828"/>
+                </a:solidFill>
+              </a:defRPr>
+            </a:pPr>
+          </a:p>
+          <a:p>
+            <a:pPr>
+              <a:lnSpc>
+                <a:spcPct val="120000"/>
+              </a:lnSpc>
+              <a:spcBef>
+                <a:spcPts val="400"/>
+              </a:spcBef>
+              <a:spcAft>
+                <a:spcPts val="400"/>
+              </a:spcAft>
+              <a:defRPr sz="1600">
+                <a:solidFill>
+                  <a:srgbClr val="282828"/>
+                </a:solidFill>
+              </a:defRPr>
+            </a:pPr>
+            <a:r>
+              <a:t>💼 Enterprise Inquiries: enterprise@cpgagent.com</a:t>
+            </a:r>
+          </a:p>
+          <a:p>
+            <a:pPr>
+              <a:lnSpc>
+                <a:spcPct val="120000"/>
+              </a:lnSpc>
+              <a:spcBef>
+                <a:spcPts val="400"/>
+              </a:spcBef>
+              <a:spcAft>
+                <a:spcPts val="400"/>
+              </a:spcAft>
+              <a:defRPr sz="1600">
+                <a:solidFill>
+                  <a:srgbClr val="282828"/>
+                </a:solidFill>
+              </a:defRPr>
+            </a:pPr>
+          </a:p>
+          <a:p>
+            <a:pPr>
+              <a:lnSpc>
+                <a:spcPct val="120000"/>
+              </a:lnSpc>
+              <a:spcBef>
+                <a:spcPts val="400"/>
+              </a:spcBef>
+              <a:spcAft>
+                <a:spcPts val="400"/>
+              </a:spcAft>
+              <a:defRPr sz="1600">
+                <a:solidFill>
+                  <a:srgbClr val="282828"/>
+                </a:solidFill>
+              </a:defRPr>
+            </a:pPr>
+            <a:r>
+              <a:t>Ready to transform your analytics capabilities?</a:t>
+            </a:r>
+          </a:p>
+          <a:p>
+            <a:pPr>
+              <a:lnSpc>
+                <a:spcPct val="120000"/>
+              </a:lnSpc>
+              <a:spcBef>
+                <a:spcPts val="400"/>
+              </a:spcBef>
+              <a:spcAft>
+                <a:spcPts val="400"/>
+              </a:spcAft>
+              <a:defRPr sz="1600">
+                <a:solidFill>
+                  <a:srgbClr val="282828"/>
+                </a:solidFill>
+              </a:defRPr>
+            </a:pPr>
+            <a:r>
+              <a:t>Let's discuss how we can help your organization.</a:t>
             </a:r>
           </a:p>
         </p:txBody>
@@ -12791,91 +13962,208 @@
               </a:defRPr>
             </a:pPr>
             <a:r>
-              <a:t>• AI agent that understands your business questions</a:t>
-            </a:r>
-          </a:p>
-          <a:p>
-            <a:pPr>
-              <a:lnSpc>
-                <a:spcPct val="120000"/>
-              </a:lnSpc>
-              <a:spcBef>
-                <a:spcPts val="400"/>
-              </a:spcBef>
-              <a:spcAft>
-                <a:spcPts val="400"/>
-              </a:spcAft>
-              <a:defRPr sz="1600">
-                <a:solidFill>
-                  <a:srgbClr val="282828"/>
-                </a:solidFill>
-              </a:defRPr>
-            </a:pPr>
-            <a:r>
-              <a:t>• Automatically analyzes sales data in seconds</a:t>
-            </a:r>
-          </a:p>
-          <a:p>
-            <a:pPr>
-              <a:lnSpc>
-                <a:spcPct val="120000"/>
-              </a:lnSpc>
-              <a:spcBef>
-                <a:spcPts val="400"/>
-              </a:spcBef>
-              <a:spcAft>
-                <a:spcPts val="400"/>
-              </a:spcAft>
-              <a:defRPr sz="1600">
-                <a:solidFill>
-                  <a:srgbClr val="282828"/>
-                </a:solidFill>
-              </a:defRPr>
-            </a:pPr>
-            <a:r>
-              <a:t>• Validates all insights with real data (no guessing)</a:t>
-            </a:r>
-          </a:p>
-          <a:p>
-            <a:pPr>
-              <a:lnSpc>
-                <a:spcPct val="120000"/>
-              </a:lnSpc>
-              <a:spcBef>
-                <a:spcPts val="400"/>
-              </a:spcBef>
-              <a:spcAft>
-                <a:spcPts val="400"/>
-              </a:spcAft>
-              <a:defRPr sz="1600">
-                <a:solidFill>
-                  <a:srgbClr val="282828"/>
-                </a:solidFill>
-              </a:defRPr>
-            </a:pPr>
-            <a:r>
-              <a:t>• Remembers previous conversations for context</a:t>
-            </a:r>
-          </a:p>
-          <a:p>
-            <a:pPr>
-              <a:lnSpc>
-                <a:spcPct val="120000"/>
-              </a:lnSpc>
-              <a:spcBef>
-                <a:spcPts val="400"/>
-              </a:spcBef>
-              <a:spcAft>
-                <a:spcPts val="400"/>
-              </a:spcAft>
-              <a:defRPr sz="1600">
-                <a:solidFill>
-                  <a:srgbClr val="282828"/>
-                </a:solidFill>
-              </a:defRPr>
-            </a:pPr>
-            <a:r>
-              <a:t>• Easy-to-use interface (web or command-line)</a:t>
+              <a:t>• Comprehensive Analytics Platform</a:t>
+            </a:r>
+          </a:p>
+          <a:p>
+            <a:pPr>
+              <a:lnSpc>
+                <a:spcPct val="120000"/>
+              </a:lnSpc>
+              <a:spcBef>
+                <a:spcPts val="400"/>
+              </a:spcBef>
+              <a:spcAft>
+                <a:spcPts val="400"/>
+              </a:spcAft>
+              <a:defRPr sz="1600">
+                <a:solidFill>
+                  <a:srgbClr val="282828"/>
+                </a:solidFill>
+              </a:defRPr>
+            </a:pPr>
+            <a:r>
+              <a:t>   9 specialized modules for complete business intelligence</a:t>
+            </a:r>
+          </a:p>
+          <a:p>
+            <a:pPr>
+              <a:lnSpc>
+                <a:spcPct val="120000"/>
+              </a:lnSpc>
+              <a:spcBef>
+                <a:spcPts val="400"/>
+              </a:spcBef>
+              <a:spcAft>
+                <a:spcPts val="400"/>
+              </a:spcAft>
+              <a:defRPr sz="1600">
+                <a:solidFill>
+                  <a:srgbClr val="282828"/>
+                </a:solidFill>
+              </a:defRPr>
+            </a:pPr>
+          </a:p>
+          <a:p>
+            <a:pPr>
+              <a:lnSpc>
+                <a:spcPct val="120000"/>
+              </a:lnSpc>
+              <a:spcBef>
+                <a:spcPts val="400"/>
+              </a:spcBef>
+              <a:spcAft>
+                <a:spcPts val="400"/>
+              </a:spcAft>
+              <a:defRPr sz="1600">
+                <a:solidFill>
+                  <a:srgbClr val="282828"/>
+                </a:solidFill>
+              </a:defRPr>
+            </a:pPr>
+            <a:r>
+              <a:t>• AI-Powered Intelligence</a:t>
+            </a:r>
+          </a:p>
+          <a:p>
+            <a:pPr>
+              <a:lnSpc>
+                <a:spcPct val="120000"/>
+              </a:lnSpc>
+              <a:spcBef>
+                <a:spcPts val="400"/>
+              </a:spcBef>
+              <a:spcAft>
+                <a:spcPts val="400"/>
+              </a:spcAft>
+              <a:defRPr sz="1600">
+                <a:solidFill>
+                  <a:srgbClr val="282828"/>
+                </a:solidFill>
+              </a:defRPr>
+            </a:pPr>
+            <a:r>
+              <a:t>   Natural language assistant with automated insights</a:t>
+            </a:r>
+          </a:p>
+          <a:p>
+            <a:pPr>
+              <a:lnSpc>
+                <a:spcPct val="120000"/>
+              </a:lnSpc>
+              <a:spcBef>
+                <a:spcPts val="400"/>
+              </a:spcBef>
+              <a:spcAft>
+                <a:spcPts val="400"/>
+              </a:spcAft>
+              <a:defRPr sz="1600">
+                <a:solidFill>
+                  <a:srgbClr val="282828"/>
+                </a:solidFill>
+              </a:defRPr>
+            </a:pPr>
+          </a:p>
+          <a:p>
+            <a:pPr>
+              <a:lnSpc>
+                <a:spcPct val="120000"/>
+              </a:lnSpc>
+              <a:spcBef>
+                <a:spcPts val="400"/>
+              </a:spcBef>
+              <a:spcAft>
+                <a:spcPts val="400"/>
+              </a:spcAft>
+              <a:defRPr sz="1600">
+                <a:solidFill>
+                  <a:srgbClr val="282828"/>
+                </a:solidFill>
+              </a:defRPr>
+            </a:pPr>
+            <a:r>
+              <a:t>• Real-Time Monitoring</a:t>
+            </a:r>
+          </a:p>
+          <a:p>
+            <a:pPr>
+              <a:lnSpc>
+                <a:spcPct val="120000"/>
+              </a:lnSpc>
+              <a:spcBef>
+                <a:spcPts val="400"/>
+              </a:spcBef>
+              <a:spcAft>
+                <a:spcPts val="400"/>
+              </a:spcAft>
+              <a:defRPr sz="1600">
+                <a:solidFill>
+                  <a:srgbClr val="282828"/>
+                </a:solidFill>
+              </a:defRPr>
+            </a:pPr>
+            <a:r>
+              <a:t>   Automated alerts and KPI dashboards</a:t>
+            </a:r>
+          </a:p>
+          <a:p>
+            <a:pPr>
+              <a:lnSpc>
+                <a:spcPct val="120000"/>
+              </a:lnSpc>
+              <a:spcBef>
+                <a:spcPts val="400"/>
+              </a:spcBef>
+              <a:spcAft>
+                <a:spcPts val="400"/>
+              </a:spcAft>
+              <a:defRPr sz="1600">
+                <a:solidFill>
+                  <a:srgbClr val="282828"/>
+                </a:solidFill>
+              </a:defRPr>
+            </a:pPr>
+          </a:p>
+          <a:p>
+            <a:pPr>
+              <a:lnSpc>
+                <a:spcPct val="120000"/>
+              </a:lnSpc>
+              <a:spcBef>
+                <a:spcPts val="400"/>
+              </a:spcBef>
+              <a:spcAft>
+                <a:spcPts val="400"/>
+              </a:spcAft>
+              <a:defRPr sz="1600">
+                <a:solidFill>
+                  <a:srgbClr val="282828"/>
+                </a:solidFill>
+              </a:defRPr>
+            </a:pPr>
+            <a:r>
+              <a:t>• Enterprise-Grade Performance</a:t>
+            </a:r>
+          </a:p>
+          <a:p>
+            <a:pPr>
+              <a:lnSpc>
+                <a:spcPct val="120000"/>
+              </a:lnSpc>
+              <a:spcBef>
+                <a:spcPts val="400"/>
+              </a:spcBef>
+              <a:spcAft>
+                <a:spcPts val="400"/>
+              </a:spcAft>
+              <a:defRPr sz="1600">
+                <a:solidFill>
+                  <a:srgbClr val="282828"/>
+                </a:solidFill>
+              </a:defRPr>
+            </a:pPr>
+            <a:r>
+              <a:t>   Fast, accurate, scalable for large datasets</a:t>
             </a:r>
           </a:p>
           <a:p>
@@ -13216,187 +14504,268 @@
               </a:defRPr>
             </a:pPr>
             <a:r>
-              <a:t>Step 1: You ask a question</a:t>
-            </a:r>
-          </a:p>
-          <a:p>
-            <a:pPr>
-              <a:lnSpc>
-                <a:spcPct val="120000"/>
-              </a:lnSpc>
-              <a:spcBef>
-                <a:spcPts val="400"/>
-              </a:spcBef>
-              <a:spcAft>
-                <a:spcPts val="400"/>
-              </a:spcAft>
-              <a:defRPr sz="1600">
-                <a:solidFill>
-                  <a:srgbClr val="282828"/>
-                </a:solidFill>
-              </a:defRPr>
-            </a:pPr>
-            <a:r>
-              <a:t>   'Why did Q4 sales drop 15%?'</a:t>
-            </a:r>
-          </a:p>
-          <a:p>
-            <a:pPr>
-              <a:lnSpc>
-                <a:spcPct val="120000"/>
-              </a:lnSpc>
-              <a:spcBef>
-                <a:spcPts val="400"/>
-              </a:spcBef>
-              <a:spcAft>
-                <a:spcPts val="400"/>
-              </a:spcAft>
-              <a:defRPr sz="1600">
-                <a:solidFill>
-                  <a:srgbClr val="282828"/>
-                </a:solidFill>
-              </a:defRPr>
-            </a:pPr>
-          </a:p>
-          <a:p>
-            <a:pPr>
-              <a:lnSpc>
-                <a:spcPct val="120000"/>
-              </a:lnSpc>
-              <a:spcBef>
-                <a:spcPts val="400"/>
-              </a:spcBef>
-              <a:spcAft>
-                <a:spcPts val="400"/>
-              </a:spcAft>
-              <a:defRPr sz="1600">
-                <a:solidFill>
-                  <a:srgbClr val="282828"/>
-                </a:solidFill>
-              </a:defRPr>
-            </a:pPr>
-            <a:r>
-              <a:t>Step 2: AI agent picks the right analysis tools</a:t>
-            </a:r>
-          </a:p>
-          <a:p>
-            <a:pPr>
-              <a:lnSpc>
-                <a:spcPct val="120000"/>
-              </a:lnSpc>
-              <a:spcBef>
-                <a:spcPts val="400"/>
-              </a:spcBef>
-              <a:spcAft>
-                <a:spcPts val="400"/>
-              </a:spcAft>
-              <a:defRPr sz="1600">
-                <a:solidFill>
-                  <a:srgbClr val="282828"/>
-                </a:solidFill>
-              </a:defRPr>
-            </a:pPr>
-            <a:r>
-              <a:t>   Loads data → Detects anomalies → Finds root cause</a:t>
-            </a:r>
-          </a:p>
-          <a:p>
-            <a:pPr>
-              <a:lnSpc>
-                <a:spcPct val="120000"/>
-              </a:lnSpc>
-              <a:spcBef>
-                <a:spcPts val="400"/>
-              </a:spcBef>
-              <a:spcAft>
-                <a:spcPts val="400"/>
-              </a:spcAft>
-              <a:defRPr sz="1600">
-                <a:solidFill>
-                  <a:srgbClr val="282828"/>
-                </a:solidFill>
-              </a:defRPr>
-            </a:pPr>
-          </a:p>
-          <a:p>
-            <a:pPr>
-              <a:lnSpc>
-                <a:spcPct val="120000"/>
-              </a:lnSpc>
-              <a:spcBef>
-                <a:spcPts val="400"/>
-              </a:spcBef>
-              <a:spcAft>
-                <a:spcPts val="400"/>
-              </a:spcAft>
-              <a:defRPr sz="1600">
-                <a:solidFill>
-                  <a:srgbClr val="282828"/>
-                </a:solidFill>
-              </a:defRPr>
-            </a:pPr>
-            <a:r>
-              <a:t>Step 3: Validates findings with actual numbers</a:t>
-            </a:r>
-          </a:p>
-          <a:p>
-            <a:pPr>
-              <a:lnSpc>
-                <a:spcPct val="120000"/>
-              </a:lnSpc>
-              <a:spcBef>
-                <a:spcPts val="400"/>
-              </a:spcBef>
-              <a:spcAft>
-                <a:spcPts val="400"/>
-              </a:spcAft>
-              <a:defRPr sz="1600">
-                <a:solidFill>
-                  <a:srgbClr val="282828"/>
-                </a:solidFill>
-              </a:defRPr>
-            </a:pPr>
-            <a:r>
-              <a:t>   Prevents false claims or exaggerations</a:t>
-            </a:r>
-          </a:p>
-          <a:p>
-            <a:pPr>
-              <a:lnSpc>
-                <a:spcPct val="120000"/>
-              </a:lnSpc>
-              <a:spcBef>
-                <a:spcPts val="400"/>
-              </a:spcBef>
-              <a:spcAft>
-                <a:spcPts val="400"/>
-              </a:spcAft>
-              <a:defRPr sz="1600">
-                <a:solidFill>
-                  <a:srgbClr val="282828"/>
-                </a:solidFill>
-              </a:defRPr>
-            </a:pPr>
-          </a:p>
-          <a:p>
-            <a:pPr>
-              <a:lnSpc>
-                <a:spcPct val="120000"/>
-              </a:lnSpc>
-              <a:spcBef>
-                <a:spcPts val="400"/>
-              </a:spcBef>
-              <a:spcAft>
-                <a:spcPts val="400"/>
-              </a:spcAft>
-              <a:defRPr sz="1600">
-                <a:solidFill>
-                  <a:srgbClr val="282828"/>
-                </a:solidFill>
-              </a:defRPr>
-            </a:pPr>
-            <a:r>
-              <a:t>Step 4: Gives you clear, actionable answer</a:t>
+              <a:t>Step 1: Load Your Data</a:t>
+            </a:r>
+          </a:p>
+          <a:p>
+            <a:pPr>
+              <a:lnSpc>
+                <a:spcPct val="120000"/>
+              </a:lnSpc>
+              <a:spcBef>
+                <a:spcPts val="400"/>
+              </a:spcBef>
+              <a:spcAft>
+                <a:spcPts val="400"/>
+              </a:spcAft>
+              <a:defRPr sz="1600">
+                <a:solidFill>
+                  <a:srgbClr val="282828"/>
+                </a:solidFill>
+              </a:defRPr>
+            </a:pPr>
+            <a:r>
+              <a:t>   Upload CSV/Parquet files with sales data</a:t>
+            </a:r>
+          </a:p>
+          <a:p>
+            <a:pPr>
+              <a:lnSpc>
+                <a:spcPct val="120000"/>
+              </a:lnSpc>
+              <a:spcBef>
+                <a:spcPts val="400"/>
+              </a:spcBef>
+              <a:spcAft>
+                <a:spcPts val="400"/>
+              </a:spcAft>
+              <a:defRPr sz="1600">
+                <a:solidFill>
+                  <a:srgbClr val="282828"/>
+                </a:solidFill>
+              </a:defRPr>
+            </a:pPr>
+          </a:p>
+          <a:p>
+            <a:pPr>
+              <a:lnSpc>
+                <a:spcPct val="120000"/>
+              </a:lnSpc>
+              <a:spcBef>
+                <a:spcPts val="400"/>
+              </a:spcBef>
+              <a:spcAft>
+                <a:spcPts val="400"/>
+              </a:spcAft>
+              <a:defRPr sz="1600">
+                <a:solidFill>
+                  <a:srgbClr val="282828"/>
+                </a:solidFill>
+              </a:defRPr>
+            </a:pPr>
+            <a:r>
+              <a:t>Step 2: Choose Your Analysis</a:t>
+            </a:r>
+          </a:p>
+          <a:p>
+            <a:pPr>
+              <a:lnSpc>
+                <a:spcPct val="120000"/>
+              </a:lnSpc>
+              <a:spcBef>
+                <a:spcPts val="400"/>
+              </a:spcBef>
+              <a:spcAft>
+                <a:spcPts val="400"/>
+              </a:spcAft>
+              <a:defRPr sz="1600">
+                <a:solidFill>
+                  <a:srgbClr val="282828"/>
+                </a:solidFill>
+              </a:defRPr>
+            </a:pPr>
+            <a:r>
+              <a:t>   Use AI Assistant, Business Insights, or specialized modules</a:t>
+            </a:r>
+          </a:p>
+          <a:p>
+            <a:pPr>
+              <a:lnSpc>
+                <a:spcPct val="120000"/>
+              </a:lnSpc>
+              <a:spcBef>
+                <a:spcPts val="400"/>
+              </a:spcBef>
+              <a:spcAft>
+                <a:spcPts val="400"/>
+              </a:spcAft>
+              <a:defRPr sz="1600">
+                <a:solidFill>
+                  <a:srgbClr val="282828"/>
+                </a:solidFill>
+              </a:defRPr>
+            </a:pPr>
+          </a:p>
+          <a:p>
+            <a:pPr>
+              <a:lnSpc>
+                <a:spcPct val="120000"/>
+              </a:lnSpc>
+              <a:spcBef>
+                <a:spcPts val="400"/>
+              </a:spcBef>
+              <a:spcAft>
+                <a:spcPts val="400"/>
+              </a:spcAft>
+              <a:defRPr sz="1600">
+                <a:solidFill>
+                  <a:srgbClr val="282828"/>
+                </a:solidFill>
+              </a:defRPr>
+            </a:pPr>
+            <a:r>
+              <a:t>Step 3: Get Instant Results</a:t>
+            </a:r>
+          </a:p>
+          <a:p>
+            <a:pPr>
+              <a:lnSpc>
+                <a:spcPct val="120000"/>
+              </a:lnSpc>
+              <a:spcBef>
+                <a:spcPts val="400"/>
+              </a:spcBef>
+              <a:spcAft>
+                <a:spcPts val="400"/>
+              </a:spcAft>
+              <a:defRPr sz="1600">
+                <a:solidFill>
+                  <a:srgbClr val="282828"/>
+                </a:solidFill>
+              </a:defRPr>
+            </a:pPr>
+            <a:r>
+              <a:t>   Automated analysis with visualizations and insights</a:t>
+            </a:r>
+          </a:p>
+          <a:p>
+            <a:pPr>
+              <a:lnSpc>
+                <a:spcPct val="120000"/>
+              </a:lnSpc>
+              <a:spcBef>
+                <a:spcPts val="400"/>
+              </a:spcBef>
+              <a:spcAft>
+                <a:spcPts val="400"/>
+              </a:spcAft>
+              <a:defRPr sz="1600">
+                <a:solidFill>
+                  <a:srgbClr val="282828"/>
+                </a:solidFill>
+              </a:defRPr>
+            </a:pPr>
+          </a:p>
+          <a:p>
+            <a:pPr>
+              <a:lnSpc>
+                <a:spcPct val="120000"/>
+              </a:lnSpc>
+              <a:spcBef>
+                <a:spcPts val="400"/>
+              </a:spcBef>
+              <a:spcAft>
+                <a:spcPts val="400"/>
+              </a:spcAft>
+              <a:defRPr sz="1600">
+                <a:solidFill>
+                  <a:srgbClr val="282828"/>
+                </a:solidFill>
+              </a:defRPr>
+            </a:pPr>
+            <a:r>
+              <a:t>Step 4: Take Action</a:t>
+            </a:r>
+          </a:p>
+          <a:p>
+            <a:pPr>
+              <a:lnSpc>
+                <a:spcPct val="120000"/>
+              </a:lnSpc>
+              <a:spcBef>
+                <a:spcPts val="400"/>
+              </a:spcBef>
+              <a:spcAft>
+                <a:spcPts val="400"/>
+              </a:spcAft>
+              <a:defRPr sz="1600">
+                <a:solidFill>
+                  <a:srgbClr val="282828"/>
+                </a:solidFill>
+              </a:defRPr>
+            </a:pPr>
+            <a:r>
+              <a:t>   Data-driven recommendations for strategic decisions</a:t>
+            </a:r>
+          </a:p>
+          <a:p>
+            <a:pPr>
+              <a:lnSpc>
+                <a:spcPct val="120000"/>
+              </a:lnSpc>
+              <a:spcBef>
+                <a:spcPts val="400"/>
+              </a:spcBef>
+              <a:spcAft>
+                <a:spcPts val="400"/>
+              </a:spcAft>
+              <a:defRPr sz="1600">
+                <a:solidFill>
+                  <a:srgbClr val="282828"/>
+                </a:solidFill>
+              </a:defRPr>
+            </a:pPr>
+          </a:p>
+          <a:p>
+            <a:pPr>
+              <a:lnSpc>
+                <a:spcPct val="120000"/>
+              </a:lnSpc>
+              <a:spcBef>
+                <a:spcPts val="400"/>
+              </a:spcBef>
+              <a:spcAft>
+                <a:spcPts val="400"/>
+              </a:spcAft>
+              <a:defRPr sz="1600">
+                <a:solidFill>
+                  <a:srgbClr val="282828"/>
+                </a:solidFill>
+              </a:defRPr>
+            </a:pPr>
+            <a:r>
+              <a:t>Step 5: Monitor Continuously</a:t>
+            </a:r>
+          </a:p>
+          <a:p>
+            <a:pPr>
+              <a:lnSpc>
+                <a:spcPct val="120000"/>
+              </a:lnSpc>
+              <a:spcBef>
+                <a:spcPts val="400"/>
+              </a:spcBef>
+              <a:spcAft>
+                <a:spcPts val="400"/>
+              </a:spcAft>
+              <a:defRPr sz="1600">
+                <a:solidFill>
+                  <a:srgbClr val="282828"/>
+                </a:solidFill>
+              </a:defRPr>
+            </a:pPr>
+            <a:r>
+              <a:t>   Set up alerts and track KPIs in real-time</a:t>
             </a:r>
           </a:p>
         </p:txBody>
@@ -13516,7 +14885,7 @@
               </a:defRPr>
             </a:pPr>
             <a:r>
-              <a:t>Agent Capabilities</a:t>
+              <a:t>AI Agent Architecture</a:t>
             </a:r>
           </a:p>
         </p:txBody>
@@ -13633,7 +15002,573 @@
                 <a:gridCol w="4023360"/>
                 <a:gridCol w="4023360"/>
               </a:tblGrid>
-              <a:tr h="883920">
+              <a:tr h="757645">
+                <a:tc>
+                  <a:txBody>
+                    <a:bodyPr/>
+                    <a:lstStyle/>
+                    <a:p>
+                      <a:r>
+                        <a:rPr b="1" sz="1100">
+                          <a:solidFill>
+                            <a:srgbClr val="FFFFFF"/>
+                          </a:solidFill>
+                        </a:rPr>
+                        <a:t>Component</a:t>
+                      </a:r>
+                    </a:p>
+                  </a:txBody>
+                  <a:tcPr>
+                    <a:solidFill>
+                      <a:srgbClr val="1478C8"/>
+                    </a:solidFill>
+                  </a:tcPr>
+                </a:tc>
+                <a:tc>
+                  <a:txBody>
+                    <a:bodyPr/>
+                    <a:lstStyle/>
+                    <a:p>
+                      <a:r>
+                        <a:rPr b="1" sz="1100">
+                          <a:solidFill>
+                            <a:srgbClr val="FFFFFF"/>
+                          </a:solidFill>
+                        </a:rPr>
+                        <a:t>Functionality</a:t>
+                      </a:r>
+                    </a:p>
+                  </a:txBody>
+                  <a:tcPr>
+                    <a:solidFill>
+                      <a:srgbClr val="1478C8"/>
+                    </a:solidFill>
+                  </a:tcPr>
+                </a:tc>
+              </a:tr>
+              <a:tr h="757645">
+                <a:tc>
+                  <a:txBody>
+                    <a:bodyPr/>
+                    <a:lstStyle/>
+                    <a:p>
+                      <a:r>
+                        <a:rPr sz="1000">
+                          <a:solidFill>
+                            <a:srgbClr val="282828"/>
+                          </a:solidFill>
+                        </a:rPr>
+                        <a:t>Natural Language Processing</a:t>
+                      </a:r>
+                    </a:p>
+                  </a:txBody>
+                  <a:tcPr>
+                    <a:solidFill>
+                      <a:srgbClr val="FFFFFF"/>
+                    </a:solidFill>
+                  </a:tcPr>
+                </a:tc>
+                <a:tc>
+                  <a:txBody>
+                    <a:bodyPr/>
+                    <a:lstStyle/>
+                    <a:p>
+                      <a:r>
+                        <a:rPr sz="1000">
+                          <a:solidFill>
+                            <a:srgbClr val="282828"/>
+                          </a:solidFill>
+                        </a:rPr>
+                        <a:t>Understands business questions</a:t>
+                      </a:r>
+                    </a:p>
+                  </a:txBody>
+                  <a:tcPr>
+                    <a:solidFill>
+                      <a:srgbClr val="FFFFFF"/>
+                    </a:solidFill>
+                  </a:tcPr>
+                </a:tc>
+              </a:tr>
+              <a:tr h="757645">
+                <a:tc>
+                  <a:txBody>
+                    <a:bodyPr/>
+                    <a:lstStyle/>
+                    <a:p>
+                      <a:r>
+                        <a:rPr sz="1000">
+                          <a:solidFill>
+                            <a:srgbClr val="282828"/>
+                          </a:solidFill>
+                        </a:rPr>
+                        <a:t>Intelligent Tool Selection</a:t>
+                      </a:r>
+                    </a:p>
+                  </a:txBody>
+                  <a:tcPr>
+                    <a:solidFill>
+                      <a:srgbClr val="F5FAFF"/>
+                    </a:solidFill>
+                  </a:tcPr>
+                </a:tc>
+                <a:tc>
+                  <a:txBody>
+                    <a:bodyPr/>
+                    <a:lstStyle/>
+                    <a:p>
+                      <a:r>
+                        <a:rPr sz="1000">
+                          <a:solidFill>
+                            <a:srgbClr val="282828"/>
+                          </a:solidFill>
+                        </a:rPr>
+                        <a:t>Selects appropriate analytics modules</a:t>
+                      </a:r>
+                    </a:p>
+                  </a:txBody>
+                  <a:tcPr>
+                    <a:solidFill>
+                      <a:srgbClr val="F5FAFF"/>
+                    </a:solidFill>
+                  </a:tcPr>
+                </a:tc>
+              </a:tr>
+              <a:tr h="757645">
+                <a:tc>
+                  <a:txBody>
+                    <a:bodyPr/>
+                    <a:lstStyle/>
+                    <a:p>
+                      <a:r>
+                        <a:rPr sz="1000">
+                          <a:solidFill>
+                            <a:srgbClr val="282828"/>
+                          </a:solidFill>
+                        </a:rPr>
+                        <a:t>Data Processing Engine</a:t>
+                      </a:r>
+                    </a:p>
+                  </a:txBody>
+                  <a:tcPr>
+                    <a:solidFill>
+                      <a:srgbClr val="FFFFFF"/>
+                    </a:solidFill>
+                  </a:tcPr>
+                </a:tc>
+                <a:tc>
+                  <a:txBody>
+                    <a:bodyPr/>
+                    <a:lstStyle/>
+                    <a:p>
+                      <a:r>
+                        <a:rPr sz="1000">
+                          <a:solidFill>
+                            <a:srgbClr val="282828"/>
+                          </a:solidFill>
+                        </a:rPr>
+                        <a:t>Handles large-scale data analysis</a:t>
+                      </a:r>
+                    </a:p>
+                  </a:txBody>
+                  <a:tcPr>
+                    <a:solidFill>
+                      <a:srgbClr val="FFFFFF"/>
+                    </a:solidFill>
+                  </a:tcPr>
+                </a:tc>
+              </a:tr>
+              <a:tr h="757645">
+                <a:tc>
+                  <a:txBody>
+                    <a:bodyPr/>
+                    <a:lstStyle/>
+                    <a:p>
+                      <a:r>
+                        <a:rPr sz="1000">
+                          <a:solidFill>
+                            <a:srgbClr val="282828"/>
+                          </a:solidFill>
+                        </a:rPr>
+                        <a:t>Insight Generation</a:t>
+                      </a:r>
+                    </a:p>
+                  </a:txBody>
+                  <a:tcPr>
+                    <a:solidFill>
+                      <a:srgbClr val="F5FAFF"/>
+                    </a:solidFill>
+                  </a:tcPr>
+                </a:tc>
+                <a:tc>
+                  <a:txBody>
+                    <a:bodyPr/>
+                    <a:lstStyle/>
+                    <a:p>
+                      <a:r>
+                        <a:rPr sz="1000">
+                          <a:solidFill>
+                            <a:srgbClr val="282828"/>
+                          </a:solidFill>
+                        </a:rPr>
+                        <a:t>Creates actionable business insights</a:t>
+                      </a:r>
+                    </a:p>
+                  </a:txBody>
+                  <a:tcPr>
+                    <a:solidFill>
+                      <a:srgbClr val="F5FAFF"/>
+                    </a:solidFill>
+                  </a:tcPr>
+                </a:tc>
+              </a:tr>
+              <a:tr h="757645">
+                <a:tc>
+                  <a:txBody>
+                    <a:bodyPr/>
+                    <a:lstStyle/>
+                    <a:p>
+                      <a:r>
+                        <a:rPr sz="1000">
+                          <a:solidFill>
+                            <a:srgbClr val="282828"/>
+                          </a:solidFill>
+                        </a:rPr>
+                        <a:t>Data Validation Layer</a:t>
+                      </a:r>
+                    </a:p>
+                  </a:txBody>
+                  <a:tcPr>
+                    <a:solidFill>
+                      <a:srgbClr val="FFFFFF"/>
+                    </a:solidFill>
+                  </a:tcPr>
+                </a:tc>
+                <a:tc>
+                  <a:txBody>
+                    <a:bodyPr/>
+                    <a:lstStyle/>
+                    <a:p>
+                      <a:r>
+                        <a:rPr sz="1000">
+                          <a:solidFill>
+                            <a:srgbClr val="282828"/>
+                          </a:solidFill>
+                        </a:rPr>
+                        <a:t>Ensures 95%+ accuracy with grounding</a:t>
+                      </a:r>
+                    </a:p>
+                  </a:txBody>
+                  <a:tcPr>
+                    <a:solidFill>
+                      <a:srgbClr val="FFFFFF"/>
+                    </a:solidFill>
+                  </a:tcPr>
+                </a:tc>
+              </a:tr>
+              <a:tr h="757650">
+                <a:tc>
+                  <a:txBody>
+                    <a:bodyPr/>
+                    <a:lstStyle/>
+                    <a:p>
+                      <a:r>
+                        <a:rPr sz="1000">
+                          <a:solidFill>
+                            <a:srgbClr val="282828"/>
+                          </a:solidFill>
+                        </a:rPr>
+                        <a:t>Real-Time Monitoring</a:t>
+                      </a:r>
+                    </a:p>
+                  </a:txBody>
+                  <a:tcPr>
+                    <a:solidFill>
+                      <a:srgbClr val="F5FAFF"/>
+                    </a:solidFill>
+                  </a:tcPr>
+                </a:tc>
+                <a:tc>
+                  <a:txBody>
+                    <a:bodyPr/>
+                    <a:lstStyle/>
+                    <a:p>
+                      <a:r>
+                        <a:rPr sz="1000">
+                          <a:solidFill>
+                            <a:srgbClr val="282828"/>
+                          </a:solidFill>
+                        </a:rPr>
+                        <a:t>Automated alerts and KPI tracking</a:t>
+                      </a:r>
+                    </a:p>
+                  </a:txBody>
+                  <a:tcPr>
+                    <a:solidFill>
+                      <a:srgbClr val="F5FAFF"/>
+                    </a:solidFill>
+                  </a:tcPr>
+                </a:tc>
+              </a:tr>
+            </a:tbl>
+          </a:graphicData>
+        </a:graphic>
+      </p:graphicFrame>
+    </p:spTree>
+  </p:cSld>
+  <p:clrMapOvr>
+    <a:masterClrMapping/>
+  </p:clrMapOvr>
+</p:sld>
+</file>
+
+<file path=ppt/slides/slide6.xml><?xml version="1.0" encoding="utf-8"?>
+<p:sld xmlns:a="http://schemas.openxmlformats.org/drawingml/2006/main" xmlns:p="http://schemas.openxmlformats.org/presentationml/2006/main" xmlns:r="http://schemas.openxmlformats.org/officeDocument/2006/relationships">
+  <p:cSld>
+    <p:spTree>
+      <p:nvGrpSpPr>
+        <p:cNvPr id="1" name=""/>
+        <p:cNvGrpSpPr/>
+        <p:nvPr/>
+      </p:nvGrpSpPr>
+      <p:grpSpPr/>
+      <p:sp>
+        <p:nvSpPr>
+          <p:cNvPr id="2" name="Rectangle 1"/>
+          <p:cNvSpPr/>
+          <p:nvPr/>
+        </p:nvSpPr>
+        <p:spPr>
+          <a:xfrm>
+            <a:off x="0" y="0"/>
+            <a:ext cx="9144000" cy="6858000"/>
+          </a:xfrm>
+          <a:prstGeom prst="rect">
+            <a:avLst/>
+          </a:prstGeom>
+          <a:solidFill>
+            <a:srgbClr val="FFFFFF"/>
+          </a:solidFill>
+          <a:ln>
+            <a:solidFill>
+              <a:srgbClr val="FFFFFF"/>
+            </a:solidFill>
+          </a:ln>
+        </p:spPr>
+        <p:style>
+          <a:lnRef idx="1">
+            <a:schemeClr val="accent1"/>
+          </a:lnRef>
+          <a:fillRef idx="3">
+            <a:schemeClr val="accent1"/>
+          </a:fillRef>
+          <a:effectRef idx="2">
+            <a:schemeClr val="accent1"/>
+          </a:effectRef>
+          <a:fontRef idx="minor">
+            <a:schemeClr val="lt1"/>
+          </a:fontRef>
+        </p:style>
+        <p:txBody>
+          <a:bodyPr rtlCol="0" anchor="ctr"/>
+          <a:lstStyle/>
+          <a:p>
+            <a:pPr algn="ctr"/>
+          </a:p>
+        </p:txBody>
+      </p:sp>
+      <p:sp>
+        <p:nvSpPr>
+          <p:cNvPr id="3" name="Rectangle 2"/>
+          <p:cNvSpPr/>
+          <p:nvPr/>
+        </p:nvSpPr>
+        <p:spPr>
+          <a:xfrm>
+            <a:off x="0" y="0"/>
+            <a:ext cx="9144000" cy="822960"/>
+          </a:xfrm>
+          <a:prstGeom prst="rect">
+            <a:avLst/>
+          </a:prstGeom>
+          <a:solidFill>
+            <a:srgbClr val="1478C8"/>
+          </a:solidFill>
+          <a:ln>
+            <a:solidFill>
+              <a:srgbClr val="1478C8"/>
+            </a:solidFill>
+          </a:ln>
+        </p:spPr>
+        <p:style>
+          <a:lnRef idx="1">
+            <a:schemeClr val="accent1"/>
+          </a:lnRef>
+          <a:fillRef idx="3">
+            <a:schemeClr val="accent1"/>
+          </a:fillRef>
+          <a:effectRef idx="2">
+            <a:schemeClr val="accent1"/>
+          </a:effectRef>
+          <a:fontRef idx="minor">
+            <a:schemeClr val="lt1"/>
+          </a:fontRef>
+        </p:style>
+        <p:txBody>
+          <a:bodyPr rtlCol="0" anchor="ctr"/>
+          <a:lstStyle/>
+          <a:p>
+            <a:pPr algn="ctr">
+              <a:spcBef>
+                <a:spcPts val="600"/>
+              </a:spcBef>
+              <a:defRPr sz="3600" b="1">
+                <a:solidFill>
+                  <a:srgbClr val="FFFFFF"/>
+                </a:solidFill>
+              </a:defRPr>
+            </a:pPr>
+            <a:r>
+              <a:t>Core Platform Features</a:t>
+            </a:r>
+          </a:p>
+        </p:txBody>
+      </p:sp>
+      <p:sp>
+        <p:nvSpPr>
+          <p:cNvPr id="4" name="Rectangle 3"/>
+          <p:cNvSpPr/>
+          <p:nvPr/>
+        </p:nvSpPr>
+        <p:spPr>
+          <a:xfrm>
+            <a:off x="0" y="822960"/>
+            <a:ext cx="9144000" cy="73152"/>
+          </a:xfrm>
+          <a:prstGeom prst="rect">
+            <a:avLst/>
+          </a:prstGeom>
+          <a:solidFill>
+            <a:srgbClr val="FF8C00"/>
+          </a:solidFill>
+          <a:ln>
+            <a:solidFill>
+              <a:srgbClr val="FF8C00"/>
+            </a:solidFill>
+          </a:ln>
+        </p:spPr>
+        <p:style>
+          <a:lnRef idx="1">
+            <a:schemeClr val="accent1"/>
+          </a:lnRef>
+          <a:fillRef idx="3">
+            <a:schemeClr val="accent1"/>
+          </a:fillRef>
+          <a:effectRef idx="2">
+            <a:schemeClr val="accent1"/>
+          </a:effectRef>
+          <a:fontRef idx="minor">
+            <a:schemeClr val="lt1"/>
+          </a:fontRef>
+        </p:style>
+        <p:txBody>
+          <a:bodyPr rtlCol="0" anchor="ctr"/>
+          <a:lstStyle/>
+          <a:p>
+            <a:pPr algn="ctr"/>
+          </a:p>
+        </p:txBody>
+      </p:sp>
+      <p:sp>
+        <p:nvSpPr>
+          <p:cNvPr id="5" name="Rectangle 4"/>
+          <p:cNvSpPr/>
+          <p:nvPr/>
+        </p:nvSpPr>
+        <p:spPr>
+          <a:xfrm>
+            <a:off x="0" y="914400"/>
+            <a:ext cx="91440" cy="5943600"/>
+          </a:xfrm>
+          <a:prstGeom prst="rect">
+            <a:avLst/>
+          </a:prstGeom>
+          <a:solidFill>
+            <a:srgbClr val="FF8C00"/>
+          </a:solidFill>
+          <a:ln>
+            <a:solidFill>
+              <a:srgbClr val="FF8C00"/>
+            </a:solidFill>
+          </a:ln>
+        </p:spPr>
+        <p:style>
+          <a:lnRef idx="1">
+            <a:schemeClr val="accent1"/>
+          </a:lnRef>
+          <a:fillRef idx="3">
+            <a:schemeClr val="accent1"/>
+          </a:fillRef>
+          <a:effectRef idx="2">
+            <a:schemeClr val="accent1"/>
+          </a:effectRef>
+          <a:fontRef idx="minor">
+            <a:schemeClr val="lt1"/>
+          </a:fontRef>
+        </p:style>
+        <p:txBody>
+          <a:bodyPr rtlCol="0" anchor="ctr"/>
+          <a:lstStyle/>
+          <a:p>
+            <a:pPr algn="ctr"/>
+          </a:p>
+        </p:txBody>
+      </p:sp>
+      <p:graphicFrame>
+        <p:nvGraphicFramePr>
+          <p:cNvPr id="6" name="Table 5"/>
+          <p:cNvGraphicFramePr>
+            <a:graphicFrameLocks noGrp="1"/>
+          </p:cNvGraphicFramePr>
+          <p:nvPr/>
+        </p:nvGraphicFramePr>
+        <p:xfrm>
+          <a:off x="548640" y="1188720"/>
+          <a:ext cx="8046720" cy="5303520"/>
+        </p:xfrm>
+        <a:graphic>
+          <a:graphicData uri="http://schemas.openxmlformats.org/drawingml/2006/table">
+            <a:tbl>
+              <a:tblPr firstRow="1" bandRow="1">
+                <a:tableStyleId>{5C22544A-7EE6-4342-B048-85BDC9FD1C3A}</a:tableStyleId>
+              </a:tblPr>
+              <a:tblGrid>
+                <a:gridCol w="2682240"/>
+                <a:gridCol w="2682240"/>
+                <a:gridCol w="2682240"/>
+              </a:tblGrid>
+              <a:tr h="589280">
+                <a:tc>
+                  <a:txBody>
+                    <a:bodyPr/>
+                    <a:lstStyle/>
+                    <a:p>
+                      <a:r>
+                        <a:rPr b="1" sz="1100">
+                          <a:solidFill>
+                            <a:srgbClr val="FFFFFF"/>
+                          </a:solidFill>
+                        </a:rPr>
+                        <a:t>Feature</a:t>
+                      </a:r>
+                    </a:p>
+                  </a:txBody>
+                  <a:tcPr>
+                    <a:solidFill>
+                      <a:srgbClr val="1478C8"/>
+                    </a:solidFill>
+                  </a:tcPr>
+                </a:tc>
                 <a:tc>
                   <a:txBody>
                     <a:bodyPr/>
@@ -13666,7 +15601,7 @@
                             <a:srgbClr val="FFFFFF"/>
                           </a:solidFill>
                         </a:rPr>
-                        <a:t>What It Does</a:t>
+                        <a:t>Business Value</a:t>
                       </a:r>
                     </a:p>
                   </a:txBody>
@@ -13677,7 +15612,7 @@
                   </a:tcPr>
                 </a:tc>
               </a:tr>
-              <a:tr h="883920">
+              <a:tr h="589280">
                 <a:tc>
                   <a:txBody>
                     <a:bodyPr/>
@@ -13689,7 +15624,7 @@
                             <a:srgbClr val="282828"/>
                           </a:solidFill>
                         </a:rPr>
-                        <a:t>Intent Detection</a:t>
+                        <a:t>AI Assistant</a:t>
                       </a:r>
                     </a:p>
                   </a:txBody>
@@ -13710,7 +15645,7 @@
                             <a:srgbClr val="282828"/>
                           </a:solidFill>
                         </a:rPr>
-                        <a:t>Understands what you're asking</a:t>
+                        <a:t>Natural language Q&amp;A</a:t>
                       </a:r>
                     </a:p>
                   </a:txBody>
@@ -13720,8 +15655,6 @@
                     </a:solidFill>
                   </a:tcPr>
                 </a:tc>
-              </a:tr>
-              <a:tr h="883920">
                 <a:tc>
                   <a:txBody>
                     <a:bodyPr/>
@@ -13733,7 +15666,30 @@
                             <a:srgbClr val="282828"/>
                           </a:solidFill>
                         </a:rPr>
-                        <a:t>Tool Selection</a:t>
+                        <a:t>Instant insights</a:t>
+                      </a:r>
+                    </a:p>
+                  </a:txBody>
+                  <a:tcPr>
+                    <a:solidFill>
+                      <a:srgbClr val="FFFFFF"/>
+                    </a:solidFill>
+                  </a:tcPr>
+                </a:tc>
+              </a:tr>
+              <a:tr h="589280">
+                <a:tc>
+                  <a:txBody>
+                    <a:bodyPr/>
+                    <a:lstStyle/>
+                    <a:p>
+                      <a:r>
+                        <a:rPr sz="1000">
+                          <a:solidFill>
+                            <a:srgbClr val="282828"/>
+                          </a:solidFill>
+                        </a:rPr>
+                        <a:t>Business Insights</a:t>
                       </a:r>
                     </a:p>
                   </a:txBody>
@@ -13754,7 +15710,7 @@
                             <a:srgbClr val="282828"/>
                           </a:solidFill>
                         </a:rPr>
-                        <a:t>Picks the right analysis tools</a:t>
+                        <a:t>Automated intelligence</a:t>
                       </a:r>
                     </a:p>
                   </a:txBody>
@@ -13764,8 +15720,6 @@
                     </a:solidFill>
                   </a:tcPr>
                 </a:tc>
-              </a:tr>
-              <a:tr h="883920">
                 <a:tc>
                   <a:txBody>
                     <a:bodyPr/>
@@ -13777,7 +15731,30 @@
                             <a:srgbClr val="282828"/>
                           </a:solidFill>
                         </a:rPr>
-                        <a:t>Data Analysis</a:t>
+                        <a:t>Strategic planning</a:t>
+                      </a:r>
+                    </a:p>
+                  </a:txBody>
+                  <a:tcPr>
+                    <a:solidFill>
+                      <a:srgbClr val="F5FAFF"/>
+                    </a:solidFill>
+                  </a:tcPr>
+                </a:tc>
+              </a:tr>
+              <a:tr h="589280">
+                <a:tc>
+                  <a:txBody>
+                    <a:bodyPr/>
+                    <a:lstStyle/>
+                    <a:p>
+                      <a:r>
+                        <a:rPr sz="1000">
+                          <a:solidFill>
+                            <a:srgbClr val="282828"/>
+                          </a:solidFill>
+                        </a:rPr>
+                        <a:t>Anomaly Detection</a:t>
                       </a:r>
                     </a:p>
                   </a:txBody>
@@ -13798,7 +15775,7 @@
                             <a:srgbClr val="282828"/>
                           </a:solidFill>
                         </a:rPr>
-                        <a:t>Processes your sales data</a:t>
+                        <a:t>Multi-method detection</a:t>
                       </a:r>
                     </a:p>
                   </a:txBody>
@@ -13808,8 +15785,6 @@
                     </a:solidFill>
                   </a:tcPr>
                 </a:tc>
-              </a:tr>
-              <a:tr h="883920">
                 <a:tc>
                   <a:txBody>
                     <a:bodyPr/>
@@ -13821,7 +15796,30 @@
                             <a:srgbClr val="282828"/>
                           </a:solidFill>
                         </a:rPr>
-                        <a:t>LLM Synthesis</a:t>
+                        <a:t>Risk identification</a:t>
+                      </a:r>
+                    </a:p>
+                  </a:txBody>
+                  <a:tcPr>
+                    <a:solidFill>
+                      <a:srgbClr val="FFFFFF"/>
+                    </a:solidFill>
+                  </a:tcPr>
+                </a:tc>
+              </a:tr>
+              <a:tr h="589280">
+                <a:tc>
+                  <a:txBody>
+                    <a:bodyPr/>
+                    <a:lstStyle/>
+                    <a:p>
+                      <a:r>
+                        <a:rPr sz="1000">
+                          <a:solidFill>
+                            <a:srgbClr val="282828"/>
+                          </a:solidFill>
+                        </a:rPr>
+                        <a:t>Data Comparison</a:t>
                       </a:r>
                     </a:p>
                   </a:txBody>
@@ -13842,7 +15840,7 @@
                             <a:srgbClr val="282828"/>
                           </a:solidFill>
                         </a:rPr>
-                        <a:t>Creates clear insights</a:t>
+                        <a:t>Performance analysis</a:t>
                       </a:r>
                     </a:p>
                   </a:txBody>
@@ -13852,8 +15850,6 @@
                     </a:solidFill>
                   </a:tcPr>
                 </a:tc>
-              </a:tr>
-              <a:tr h="883920">
                 <a:tc>
                   <a:txBody>
                     <a:bodyPr/>
@@ -13865,7 +15861,30 @@
                             <a:srgbClr val="282828"/>
                           </a:solidFill>
                         </a:rPr>
-                        <a:t>Accuracy Grounding</a:t>
+                        <a:t>Optimization</a:t>
+                      </a:r>
+                    </a:p>
+                  </a:txBody>
+                  <a:tcPr>
+                    <a:solidFill>
+                      <a:srgbClr val="F5FAFF"/>
+                    </a:solidFill>
+                  </a:tcPr>
+                </a:tc>
+              </a:tr>
+              <a:tr h="589280">
+                <a:tc>
+                  <a:txBody>
+                    <a:bodyPr/>
+                    <a:lstStyle/>
+                    <a:p>
+                      <a:r>
+                        <a:rPr sz="1000">
+                          <a:solidFill>
+                            <a:srgbClr val="282828"/>
+                          </a:solidFill>
+                        </a:rPr>
+                        <a:t>Forecasting</a:t>
                       </a:r>
                     </a:p>
                   </a:txBody>
@@ -13886,332 +15905,7 @@
                             <a:srgbClr val="282828"/>
                           </a:solidFill>
                         </a:rPr>
-                        <a:t>Validates numbers against reality</a:t>
-                      </a:r>
-                    </a:p>
-                  </a:txBody>
-                  <a:tcPr>
-                    <a:solidFill>
-                      <a:srgbClr val="FFFFFF"/>
-                    </a:solidFill>
-                  </a:tcPr>
-                </a:tc>
-              </a:tr>
-            </a:tbl>
-          </a:graphicData>
-        </a:graphic>
-      </p:graphicFrame>
-    </p:spTree>
-  </p:cSld>
-  <p:clrMapOvr>
-    <a:masterClrMapping/>
-  </p:clrMapOvr>
-</p:sld>
-</file>
-
-<file path=ppt/slides/slide6.xml><?xml version="1.0" encoding="utf-8"?>
-<p:sld xmlns:a="http://schemas.openxmlformats.org/drawingml/2006/main" xmlns:p="http://schemas.openxmlformats.org/presentationml/2006/main" xmlns:r="http://schemas.openxmlformats.org/officeDocument/2006/relationships">
-  <p:cSld>
-    <p:spTree>
-      <p:nvGrpSpPr>
-        <p:cNvPr id="1" name=""/>
-        <p:cNvGrpSpPr/>
-        <p:nvPr/>
-      </p:nvGrpSpPr>
-      <p:grpSpPr/>
-      <p:sp>
-        <p:nvSpPr>
-          <p:cNvPr id="2" name="Rectangle 1"/>
-          <p:cNvSpPr/>
-          <p:nvPr/>
-        </p:nvSpPr>
-        <p:spPr>
-          <a:xfrm>
-            <a:off x="0" y="0"/>
-            <a:ext cx="9144000" cy="6858000"/>
-          </a:xfrm>
-          <a:prstGeom prst="rect">
-            <a:avLst/>
-          </a:prstGeom>
-          <a:solidFill>
-            <a:srgbClr val="FFFFFF"/>
-          </a:solidFill>
-          <a:ln>
-            <a:solidFill>
-              <a:srgbClr val="FFFFFF"/>
-            </a:solidFill>
-          </a:ln>
-        </p:spPr>
-        <p:style>
-          <a:lnRef idx="1">
-            <a:schemeClr val="accent1"/>
-          </a:lnRef>
-          <a:fillRef idx="3">
-            <a:schemeClr val="accent1"/>
-          </a:fillRef>
-          <a:effectRef idx="2">
-            <a:schemeClr val="accent1"/>
-          </a:effectRef>
-          <a:fontRef idx="minor">
-            <a:schemeClr val="lt1"/>
-          </a:fontRef>
-        </p:style>
-        <p:txBody>
-          <a:bodyPr rtlCol="0" anchor="ctr"/>
-          <a:lstStyle/>
-          <a:p>
-            <a:pPr algn="ctr"/>
-          </a:p>
-        </p:txBody>
-      </p:sp>
-      <p:sp>
-        <p:nvSpPr>
-          <p:cNvPr id="3" name="Rectangle 2"/>
-          <p:cNvSpPr/>
-          <p:nvPr/>
-        </p:nvSpPr>
-        <p:spPr>
-          <a:xfrm>
-            <a:off x="0" y="0"/>
-            <a:ext cx="9144000" cy="822960"/>
-          </a:xfrm>
-          <a:prstGeom prst="rect">
-            <a:avLst/>
-          </a:prstGeom>
-          <a:solidFill>
-            <a:srgbClr val="1478C8"/>
-          </a:solidFill>
-          <a:ln>
-            <a:solidFill>
-              <a:srgbClr val="1478C8"/>
-            </a:solidFill>
-          </a:ln>
-        </p:spPr>
-        <p:style>
-          <a:lnRef idx="1">
-            <a:schemeClr val="accent1"/>
-          </a:lnRef>
-          <a:fillRef idx="3">
-            <a:schemeClr val="accent1"/>
-          </a:fillRef>
-          <a:effectRef idx="2">
-            <a:schemeClr val="accent1"/>
-          </a:effectRef>
-          <a:fontRef idx="minor">
-            <a:schemeClr val="lt1"/>
-          </a:fontRef>
-        </p:style>
-        <p:txBody>
-          <a:bodyPr rtlCol="0" anchor="ctr"/>
-          <a:lstStyle/>
-          <a:p>
-            <a:pPr algn="ctr">
-              <a:spcBef>
-                <a:spcPts val="600"/>
-              </a:spcBef>
-              <a:defRPr sz="3600" b="1">
-                <a:solidFill>
-                  <a:srgbClr val="FFFFFF"/>
-                </a:solidFill>
-              </a:defRPr>
-            </a:pPr>
-            <a:r>
-              <a:t>Types of Analysis</a:t>
-            </a:r>
-          </a:p>
-        </p:txBody>
-      </p:sp>
-      <p:sp>
-        <p:nvSpPr>
-          <p:cNvPr id="4" name="Rectangle 3"/>
-          <p:cNvSpPr/>
-          <p:nvPr/>
-        </p:nvSpPr>
-        <p:spPr>
-          <a:xfrm>
-            <a:off x="0" y="822960"/>
-            <a:ext cx="9144000" cy="73152"/>
-          </a:xfrm>
-          <a:prstGeom prst="rect">
-            <a:avLst/>
-          </a:prstGeom>
-          <a:solidFill>
-            <a:srgbClr val="FF8C00"/>
-          </a:solidFill>
-          <a:ln>
-            <a:solidFill>
-              <a:srgbClr val="FF8C00"/>
-            </a:solidFill>
-          </a:ln>
-        </p:spPr>
-        <p:style>
-          <a:lnRef idx="1">
-            <a:schemeClr val="accent1"/>
-          </a:lnRef>
-          <a:fillRef idx="3">
-            <a:schemeClr val="accent1"/>
-          </a:fillRef>
-          <a:effectRef idx="2">
-            <a:schemeClr val="accent1"/>
-          </a:effectRef>
-          <a:fontRef idx="minor">
-            <a:schemeClr val="lt1"/>
-          </a:fontRef>
-        </p:style>
-        <p:txBody>
-          <a:bodyPr rtlCol="0" anchor="ctr"/>
-          <a:lstStyle/>
-          <a:p>
-            <a:pPr algn="ctr"/>
-          </a:p>
-        </p:txBody>
-      </p:sp>
-      <p:sp>
-        <p:nvSpPr>
-          <p:cNvPr id="5" name="Rectangle 4"/>
-          <p:cNvSpPr/>
-          <p:nvPr/>
-        </p:nvSpPr>
-        <p:spPr>
-          <a:xfrm>
-            <a:off x="0" y="914400"/>
-            <a:ext cx="91440" cy="5943600"/>
-          </a:xfrm>
-          <a:prstGeom prst="rect">
-            <a:avLst/>
-          </a:prstGeom>
-          <a:solidFill>
-            <a:srgbClr val="FF8C00"/>
-          </a:solidFill>
-          <a:ln>
-            <a:solidFill>
-              <a:srgbClr val="FF8C00"/>
-            </a:solidFill>
-          </a:ln>
-        </p:spPr>
-        <p:style>
-          <a:lnRef idx="1">
-            <a:schemeClr val="accent1"/>
-          </a:lnRef>
-          <a:fillRef idx="3">
-            <a:schemeClr val="accent1"/>
-          </a:fillRef>
-          <a:effectRef idx="2">
-            <a:schemeClr val="accent1"/>
-          </a:effectRef>
-          <a:fontRef idx="minor">
-            <a:schemeClr val="lt1"/>
-          </a:fontRef>
-        </p:style>
-        <p:txBody>
-          <a:bodyPr rtlCol="0" anchor="ctr"/>
-          <a:lstStyle/>
-          <a:p>
-            <a:pPr algn="ctr"/>
-          </a:p>
-        </p:txBody>
-      </p:sp>
-      <p:graphicFrame>
-        <p:nvGraphicFramePr>
-          <p:cNvPr id="6" name="Table 5"/>
-          <p:cNvGraphicFramePr>
-            <a:graphicFrameLocks noGrp="1"/>
-          </p:cNvGraphicFramePr>
-          <p:nvPr/>
-        </p:nvGraphicFramePr>
-        <p:xfrm>
-          <a:off x="548640" y="1188720"/>
-          <a:ext cx="8046720" cy="5303520"/>
-        </p:xfrm>
-        <a:graphic>
-          <a:graphicData uri="http://schemas.openxmlformats.org/drawingml/2006/table">
-            <a:tbl>
-              <a:tblPr firstRow="1" bandRow="1">
-                <a:tableStyleId>{5C22544A-7EE6-4342-B048-85BDC9FD1C3A}</a:tableStyleId>
-              </a:tblPr>
-              <a:tblGrid>
-                <a:gridCol w="2682240"/>
-                <a:gridCol w="2682240"/>
-                <a:gridCol w="2682240"/>
-              </a:tblGrid>
-              <a:tr h="883920">
-                <a:tc>
-                  <a:txBody>
-                    <a:bodyPr/>
-                    <a:lstStyle/>
-                    <a:p>
-                      <a:r>
-                        <a:rPr b="1" sz="1100">
-                          <a:solidFill>
-                            <a:srgbClr val="FFFFFF"/>
-                          </a:solidFill>
-                        </a:rPr>
-                        <a:t>Analysis Type</a:t>
-                      </a:r>
-                    </a:p>
-                  </a:txBody>
-                  <a:tcPr>
-                    <a:solidFill>
-                      <a:srgbClr val="1478C8"/>
-                    </a:solidFill>
-                  </a:tcPr>
-                </a:tc>
-                <a:tc>
-                  <a:txBody>
-                    <a:bodyPr/>
-                    <a:lstStyle/>
-                    <a:p>
-                      <a:r>
-                        <a:rPr b="1" sz="1100">
-                          <a:solidFill>
-                            <a:srgbClr val="FFFFFF"/>
-                          </a:solidFill>
-                        </a:rPr>
-                        <a:t>Example Questions</a:t>
-                      </a:r>
-                    </a:p>
-                  </a:txBody>
-                  <a:tcPr>
-                    <a:solidFill>
-                      <a:srgbClr val="1478C8"/>
-                    </a:solidFill>
-                  </a:tcPr>
-                </a:tc>
-                <a:tc>
-                  <a:txBody>
-                    <a:bodyPr/>
-                    <a:lstStyle/>
-                    <a:p>
-                      <a:r>
-                        <a:rPr b="1" sz="1100">
-                          <a:solidFill>
-                            <a:srgbClr val="FFFFFF"/>
-                          </a:solidFill>
-                        </a:rPr>
-                        <a:t>Best For</a:t>
-                      </a:r>
-                    </a:p>
-                  </a:txBody>
-                  <a:tcPr>
-                    <a:solidFill>
-                      <a:srgbClr val="1478C8"/>
-                    </a:solidFill>
-                  </a:tcPr>
-                </a:tc>
-              </a:tr>
-              <a:tr h="883920">
-                <a:tc>
-                  <a:txBody>
-                    <a:bodyPr/>
-                    <a:lstStyle/>
-                    <a:p>
-                      <a:r>
-                        <a:rPr sz="1000">
-                          <a:solidFill>
-                            <a:srgbClr val="282828"/>
-                          </a:solidFill>
-                        </a:rPr>
-                        <a:t>Sales Trends</a:t>
+                        <a:t>Predictive analytics</a:t>
                       </a:r>
                     </a:p>
                   </a:txBody>
@@ -14232,7 +15926,95 @@
                             <a:srgbClr val="282828"/>
                           </a:solidFill>
                         </a:rPr>
-                        <a:t>Is sales growing? By how much?</a:t>
+                        <a:t>Future planning</a:t>
+                      </a:r>
+                    </a:p>
+                  </a:txBody>
+                  <a:tcPr>
+                    <a:solidFill>
+                      <a:srgbClr val="FFFFFF"/>
+                    </a:solidFill>
+                  </a:tcPr>
+                </a:tc>
+              </a:tr>
+              <a:tr h="589280">
+                <a:tc>
+                  <a:txBody>
+                    <a:bodyPr/>
+                    <a:lstStyle/>
+                    <a:p>
+                      <a:r>
+                        <a:rPr sz="1000">
+                          <a:solidFill>
+                            <a:srgbClr val="282828"/>
+                          </a:solidFill>
+                        </a:rPr>
+                        <a:t>Custom Reports</a:t>
+                      </a:r>
+                    </a:p>
+                  </a:txBody>
+                  <a:tcPr>
+                    <a:solidFill>
+                      <a:srgbClr val="F5FAFF"/>
+                    </a:solidFill>
+                  </a:tcPr>
+                </a:tc>
+                <a:tc>
+                  <a:txBody>
+                    <a:bodyPr/>
+                    <a:lstStyle/>
+                    <a:p>
+                      <a:r>
+                        <a:rPr sz="1000">
+                          <a:solidFill>
+                            <a:srgbClr val="282828"/>
+                          </a:solidFill>
+                        </a:rPr>
+                        <a:t>Tailored reporting</a:t>
+                      </a:r>
+                    </a:p>
+                  </a:txBody>
+                  <a:tcPr>
+                    <a:solidFill>
+                      <a:srgbClr val="F5FAFF"/>
+                    </a:solidFill>
+                  </a:tcPr>
+                </a:tc>
+                <a:tc>
+                  <a:txBody>
+                    <a:bodyPr/>
+                    <a:lstStyle/>
+                    <a:p>
+                      <a:r>
+                        <a:rPr sz="1000">
+                          <a:solidFill>
+                            <a:srgbClr val="282828"/>
+                          </a:solidFill>
+                        </a:rPr>
+                        <a:t>Executive briefings</a:t>
+                      </a:r>
+                    </a:p>
+                  </a:txBody>
+                  <a:tcPr>
+                    <a:solidFill>
+                      <a:srgbClr val="F5FAFF"/>
+                    </a:solidFill>
+                  </a:tcPr>
+                </a:tc>
+              </a:tr>
+              <a:tr h="589280">
+                <a:tc>
+                  <a:txBody>
+                    <a:bodyPr/>
+                    <a:lstStyle/>
+                    <a:p>
+                      <a:r>
+                        <a:rPr sz="1000">
+                          <a:solidFill>
+                            <a:srgbClr val="282828"/>
+                          </a:solidFill>
+                        </a:rPr>
+                        <a:t>Alert Management</a:t>
                       </a:r>
                     </a:p>
                   </a:txBody>
@@ -14253,7 +16035,7 @@
                             <a:srgbClr val="282828"/>
                           </a:solidFill>
                         </a:rPr>
-                        <a:t>Performance tracking</a:t>
+                        <a:t>Automated monitoring</a:t>
                       </a:r>
                     </a:p>
                   </a:txBody>
@@ -14263,8 +16045,6 @@
                     </a:solidFill>
                   </a:tcPr>
                 </a:tc>
-              </a:tr>
-              <a:tr h="883920">
                 <a:tc>
                   <a:txBody>
                     <a:bodyPr/>
@@ -14276,7 +16056,30 @@
                             <a:srgbClr val="282828"/>
                           </a:solidFill>
                         </a:rPr>
-                        <a:t>Anomalies</a:t>
+                        <a:t>Proactive management</a:t>
+                      </a:r>
+                    </a:p>
+                  </a:txBody>
+                  <a:tcPr>
+                    <a:solidFill>
+                      <a:srgbClr val="FFFFFF"/>
+                    </a:solidFill>
+                  </a:tcPr>
+                </a:tc>
+              </a:tr>
+              <a:tr h="589280">
+                <a:tc>
+                  <a:txBody>
+                    <a:bodyPr/>
+                    <a:lstStyle/>
+                    <a:p>
+                      <a:r>
+                        <a:rPr sz="1000">
+                          <a:solidFill>
+                            <a:srgbClr val="282828"/>
+                          </a:solidFill>
+                        </a:rPr>
+                        <a:t>Dashboard</a:t>
                       </a:r>
                     </a:p>
                   </a:txBody>
@@ -14297,7 +16100,7 @@
                             <a:srgbClr val="282828"/>
                           </a:solidFill>
                         </a:rPr>
-                        <a:t>Why the spike last week?</a:t>
+                        <a:t>Real-time KPIs</a:t>
                       </a:r>
                     </a:p>
                   </a:txBody>
@@ -14318,208 +16121,13 @@
                             <a:srgbClr val="282828"/>
                           </a:solidFill>
                         </a:rPr>
-                        <a:t>Problem diagnosis</a:t>
+                        <a:t>Performance tracking</a:t>
                       </a:r>
                     </a:p>
                   </a:txBody>
                   <a:tcPr>
                     <a:solidFill>
                       <a:srgbClr val="F5FAFF"/>
-                    </a:solidFill>
-                  </a:tcPr>
-                </a:tc>
-              </a:tr>
-              <a:tr h="883920">
-                <a:tc>
-                  <a:txBody>
-                    <a:bodyPr/>
-                    <a:lstStyle/>
-                    <a:p>
-                      <a:r>
-                        <a:rPr sz="1000">
-                          <a:solidFill>
-                            <a:srgbClr val="282828"/>
-                          </a:solidFill>
-                        </a:rPr>
-                        <a:t>What-If Scenarios</a:t>
-                      </a:r>
-                    </a:p>
-                  </a:txBody>
-                  <a:tcPr>
-                    <a:solidFill>
-                      <a:srgbClr val="FFFFFF"/>
-                    </a:solidFill>
-                  </a:tcPr>
-                </a:tc>
-                <a:tc>
-                  <a:txBody>
-                    <a:bodyPr/>
-                    <a:lstStyle/>
-                    <a:p>
-                      <a:r>
-                        <a:rPr sz="1000">
-                          <a:solidFill>
-                            <a:srgbClr val="282828"/>
-                          </a:solidFill>
-                        </a:rPr>
-                        <a:t>Impact of 20% price cut?</a:t>
-                      </a:r>
-                    </a:p>
-                  </a:txBody>
-                  <a:tcPr>
-                    <a:solidFill>
-                      <a:srgbClr val="FFFFFF"/>
-                    </a:solidFill>
-                  </a:tcPr>
-                </a:tc>
-                <a:tc>
-                  <a:txBody>
-                    <a:bodyPr/>
-                    <a:lstStyle/>
-                    <a:p>
-                      <a:r>
-                        <a:rPr sz="1000">
-                          <a:solidFill>
-                            <a:srgbClr val="282828"/>
-                          </a:solidFill>
-                        </a:rPr>
-                        <a:t>Decision making</a:t>
-                      </a:r>
-                    </a:p>
-                  </a:txBody>
-                  <a:tcPr>
-                    <a:solidFill>
-                      <a:srgbClr val="FFFFFF"/>
-                    </a:solidFill>
-                  </a:tcPr>
-                </a:tc>
-              </a:tr>
-              <a:tr h="883920">
-                <a:tc>
-                  <a:txBody>
-                    <a:bodyPr/>
-                    <a:lstStyle/>
-                    <a:p>
-                      <a:r>
-                        <a:rPr sz="1000">
-                          <a:solidFill>
-                            <a:srgbClr val="282828"/>
-                          </a:solidFill>
-                        </a:rPr>
-                        <a:t>Data Q&amp;A</a:t>
-                      </a:r>
-                    </a:p>
-                  </a:txBody>
-                  <a:tcPr>
-                    <a:solidFill>
-                      <a:srgbClr val="F5FAFF"/>
-                    </a:solidFill>
-                  </a:tcPr>
-                </a:tc>
-                <a:tc>
-                  <a:txBody>
-                    <a:bodyPr/>
-                    <a:lstStyle/>
-                    <a:p>
-                      <a:r>
-                        <a:rPr sz="1000">
-                          <a:solidFill>
-                            <a:srgbClr val="282828"/>
-                          </a:solidFill>
-                        </a:rPr>
-                        <a:t>Total Q4 revenue?</a:t>
-                      </a:r>
-                    </a:p>
-                  </a:txBody>
-                  <a:tcPr>
-                    <a:solidFill>
-                      <a:srgbClr val="F5FAFF"/>
-                    </a:solidFill>
-                  </a:tcPr>
-                </a:tc>
-                <a:tc>
-                  <a:txBody>
-                    <a:bodyPr/>
-                    <a:lstStyle/>
-                    <a:p>
-                      <a:r>
-                        <a:rPr sz="1000">
-                          <a:solidFill>
-                            <a:srgbClr val="282828"/>
-                          </a:solidFill>
-                        </a:rPr>
-                        <a:t>Quick facts</a:t>
-                      </a:r>
-                    </a:p>
-                  </a:txBody>
-                  <a:tcPr>
-                    <a:solidFill>
-                      <a:srgbClr val="F5FAFF"/>
-                    </a:solidFill>
-                  </a:tcPr>
-                </a:tc>
-              </a:tr>
-              <a:tr h="883920">
-                <a:tc>
-                  <a:txBody>
-                    <a:bodyPr/>
-                    <a:lstStyle/>
-                    <a:p>
-                      <a:r>
-                        <a:rPr sz="1000">
-                          <a:solidFill>
-                            <a:srgbClr val="282828"/>
-                          </a:solidFill>
-                        </a:rPr>
-                        <a:t>Summaries</a:t>
-                      </a:r>
-                    </a:p>
-                  </a:txBody>
-                  <a:tcPr>
-                    <a:solidFill>
-                      <a:srgbClr val="FFFFFF"/>
-                    </a:solidFill>
-                  </a:tcPr>
-                </a:tc>
-                <a:tc>
-                  <a:txBody>
-                    <a:bodyPr/>
-                    <a:lstStyle/>
-                    <a:p>
-                      <a:r>
-                        <a:rPr sz="1000">
-                          <a:solidFill>
-                            <a:srgbClr val="282828"/>
-                          </a:solidFill>
-                        </a:rPr>
-                        <a:t>Overall business status?</a:t>
-                      </a:r>
-                    </a:p>
-                  </a:txBody>
-                  <a:tcPr>
-                    <a:solidFill>
-                      <a:srgbClr val="FFFFFF"/>
-                    </a:solidFill>
-                  </a:tcPr>
-                </a:tc>
-                <a:tc>
-                  <a:txBody>
-                    <a:bodyPr/>
-                    <a:lstStyle/>
-                    <a:p>
-                      <a:r>
-                        <a:rPr sz="1000">
-                          <a:solidFill>
-                            <a:srgbClr val="282828"/>
-                          </a:solidFill>
-                        </a:rPr>
-                        <a:t>Executive briefing</a:t>
-                      </a:r>
-                    </a:p>
-                  </a:txBody>
-                  <a:tcPr>
-                    <a:solidFill>
-                      <a:srgbClr val="FFFFFF"/>
                     </a:solidFill>
                   </a:tcPr>
                 </a:tc>
@@ -14646,7 +16254,7 @@
               </a:defRPr>
             </a:pPr>
             <a:r>
-              <a:t>Smart Memory System</a:t>
+              <a:t>AI Assistant Features</a:t>
             </a:r>
           </a:p>
         </p:txBody>
@@ -14825,169 +16433,268 @@
               </a:defRPr>
             </a:pPr>
             <a:r>
-              <a:t>• Remembers your last 10 conversations</a:t>
-            </a:r>
-          </a:p>
-          <a:p>
-            <a:pPr>
-              <a:lnSpc>
-                <a:spcPct val="120000"/>
-              </a:lnSpc>
-              <a:spcBef>
-                <a:spcPts val="400"/>
-              </a:spcBef>
-              <a:spcAft>
-                <a:spcPts val="400"/>
-              </a:spcAft>
-              <a:defRPr sz="1600">
-                <a:solidFill>
-                  <a:srgbClr val="282828"/>
-                </a:solidFill>
-              </a:defRPr>
-            </a:pPr>
-            <a:r>
-              <a:t>• Understands follow-up questions without context</a:t>
-            </a:r>
-          </a:p>
-          <a:p>
-            <a:pPr>
-              <a:lnSpc>
-                <a:spcPct val="120000"/>
-              </a:lnSpc>
-              <a:spcBef>
-                <a:spcPts val="400"/>
-              </a:spcBef>
-              <a:spcAft>
-                <a:spcPts val="400"/>
-              </a:spcAft>
-              <a:defRPr sz="1600">
-                <a:solidFill>
-                  <a:srgbClr val="282828"/>
-                </a:solidFill>
-              </a:defRPr>
-            </a:pPr>
-          </a:p>
-          <a:p>
-            <a:pPr>
-              <a:lnSpc>
-                <a:spcPct val="120000"/>
-              </a:lnSpc>
-              <a:spcBef>
-                <a:spcPts val="400"/>
-              </a:spcBef>
-              <a:spcAft>
-                <a:spcPts val="400"/>
-              </a:spcAft>
-              <a:defRPr sz="1600">
-                <a:solidFill>
-                  <a:srgbClr val="282828"/>
-                </a:solidFill>
-              </a:defRPr>
-            </a:pPr>
-            <a:r>
-              <a:t>Example conversation:</a:t>
-            </a:r>
-          </a:p>
-          <a:p>
-            <a:pPr>
-              <a:lnSpc>
-                <a:spcPct val="120000"/>
-              </a:lnSpc>
-              <a:spcBef>
-                <a:spcPts val="400"/>
-              </a:spcBef>
-              <a:spcAft>
-                <a:spcPts val="400"/>
-              </a:spcAft>
-              <a:defRPr sz="1600">
-                <a:solidFill>
-                  <a:srgbClr val="282828"/>
-                </a:solidFill>
-              </a:defRPr>
-            </a:pPr>
-            <a:r>
-              <a:t>   You: 'Show me Q4 sales trends'</a:t>
-            </a:r>
-          </a:p>
-          <a:p>
-            <a:pPr>
-              <a:lnSpc>
-                <a:spcPct val="120000"/>
-              </a:lnSpc>
-              <a:spcBef>
-                <a:spcPts val="400"/>
-              </a:spcBef>
-              <a:spcAft>
-                <a:spcPts val="400"/>
-              </a:spcAft>
-              <a:defRPr sz="1600">
-                <a:solidFill>
-                  <a:srgbClr val="282828"/>
-                </a:solidFill>
-              </a:defRPr>
-            </a:pPr>
-            <a:r>
-              <a:t>   Agent: [Shows results]</a:t>
-            </a:r>
-          </a:p>
-          <a:p>
-            <a:pPr>
-              <a:lnSpc>
-                <a:spcPct val="120000"/>
-              </a:lnSpc>
-              <a:spcBef>
-                <a:spcPts val="400"/>
-              </a:spcBef>
-              <a:spcAft>
-                <a:spcPts val="400"/>
-              </a:spcAft>
-              <a:defRPr sz="1600">
-                <a:solidFill>
-                  <a:srgbClr val="282828"/>
-                </a:solidFill>
-              </a:defRPr>
-            </a:pPr>
-            <a:r>
-              <a:t>   You: 'Which stores underperformed?' ← Agent remembers Q4</a:t>
-            </a:r>
-          </a:p>
-          <a:p>
-            <a:pPr>
-              <a:lnSpc>
-                <a:spcPct val="120000"/>
-              </a:lnSpc>
-              <a:spcBef>
-                <a:spcPts val="400"/>
-              </a:spcBef>
-              <a:spcAft>
-                <a:spcPts val="400"/>
-              </a:spcAft>
-              <a:defRPr sz="1600">
-                <a:solidFill>
-                  <a:srgbClr val="282828"/>
-                </a:solidFill>
-              </a:defRPr>
-            </a:pPr>
-          </a:p>
-          <a:p>
-            <a:pPr>
-              <a:lnSpc>
-                <a:spcPct val="120000"/>
-              </a:lnSpc>
-              <a:spcBef>
-                <a:spcPts val="400"/>
-              </a:spcBef>
-              <a:spcAft>
-                <a:spcPts val="400"/>
-              </a:spcAft>
-              <a:defRPr sz="1600">
-                <a:solidFill>
-                  <a:srgbClr val="282828"/>
-                </a:solidFill>
-              </a:defRPr>
-            </a:pPr>
-            <a:r>
-              <a:t>• Caches results to save time on repeated questions</a:t>
+              <a:t>💬 Natural Language Processing</a:t>
+            </a:r>
+          </a:p>
+          <a:p>
+            <a:pPr>
+              <a:lnSpc>
+                <a:spcPct val="120000"/>
+              </a:lnSpc>
+              <a:spcBef>
+                <a:spcPts val="400"/>
+              </a:spcBef>
+              <a:spcAft>
+                <a:spcPts val="400"/>
+              </a:spcAft>
+              <a:defRPr sz="1600">
+                <a:solidFill>
+                  <a:srgbClr val="282828"/>
+                </a:solidFill>
+              </a:defRPr>
+            </a:pPr>
+            <a:r>
+              <a:t>   Ask questions in plain English</a:t>
+            </a:r>
+          </a:p>
+          <a:p>
+            <a:pPr>
+              <a:lnSpc>
+                <a:spcPct val="120000"/>
+              </a:lnSpc>
+              <a:spcBef>
+                <a:spcPts val="400"/>
+              </a:spcBef>
+              <a:spcAft>
+                <a:spcPts val="400"/>
+              </a:spcAft>
+              <a:defRPr sz="1600">
+                <a:solidFill>
+                  <a:srgbClr val="282828"/>
+                </a:solidFill>
+              </a:defRPr>
+            </a:pPr>
+          </a:p>
+          <a:p>
+            <a:pPr>
+              <a:lnSpc>
+                <a:spcPct val="120000"/>
+              </a:lnSpc>
+              <a:spcBef>
+                <a:spcPts val="400"/>
+              </a:spcBef>
+              <a:spcAft>
+                <a:spcPts val="400"/>
+              </a:spcAft>
+              <a:defRPr sz="1600">
+                <a:solidFill>
+                  <a:srgbClr val="282828"/>
+                </a:solidFill>
+              </a:defRPr>
+            </a:pPr>
+            <a:r>
+              <a:t>🧠 Contextual Understanding</a:t>
+            </a:r>
+          </a:p>
+          <a:p>
+            <a:pPr>
+              <a:lnSpc>
+                <a:spcPct val="120000"/>
+              </a:lnSpc>
+              <a:spcBef>
+                <a:spcPts val="400"/>
+              </a:spcBef>
+              <a:spcAft>
+                <a:spcPts val="400"/>
+              </a:spcAft>
+              <a:defRPr sz="1600">
+                <a:solidFill>
+                  <a:srgbClr val="282828"/>
+                </a:solidFill>
+              </a:defRPr>
+            </a:pPr>
+            <a:r>
+              <a:t>   Remembers conversation history</a:t>
+            </a:r>
+          </a:p>
+          <a:p>
+            <a:pPr>
+              <a:lnSpc>
+                <a:spcPct val="120000"/>
+              </a:lnSpc>
+              <a:spcBef>
+                <a:spcPts val="400"/>
+              </a:spcBef>
+              <a:spcAft>
+                <a:spcPts val="400"/>
+              </a:spcAft>
+              <a:defRPr sz="1600">
+                <a:solidFill>
+                  <a:srgbClr val="282828"/>
+                </a:solidFill>
+              </a:defRPr>
+            </a:pPr>
+          </a:p>
+          <a:p>
+            <a:pPr>
+              <a:lnSpc>
+                <a:spcPct val="120000"/>
+              </a:lnSpc>
+              <a:spcBef>
+                <a:spcPts val="400"/>
+              </a:spcBef>
+              <a:spcAft>
+                <a:spcPts val="400"/>
+              </a:spcAft>
+              <a:defRPr sz="1600">
+                <a:solidFill>
+                  <a:srgbClr val="282828"/>
+                </a:solidFill>
+              </a:defRPr>
+            </a:pPr>
+            <a:r>
+              <a:t>🔍 Intelligent Analysis</a:t>
+            </a:r>
+          </a:p>
+          <a:p>
+            <a:pPr>
+              <a:lnSpc>
+                <a:spcPct val="120000"/>
+              </a:lnSpc>
+              <a:spcBef>
+                <a:spcPts val="400"/>
+              </a:spcBef>
+              <a:spcAft>
+                <a:spcPts val="400"/>
+              </a:spcAft>
+              <a:defRPr sz="1600">
+                <a:solidFill>
+                  <a:srgbClr val="282828"/>
+                </a:solidFill>
+              </a:defRPr>
+            </a:pPr>
+            <a:r>
+              <a:t>   Automatically selects appropriate tools</a:t>
+            </a:r>
+          </a:p>
+          <a:p>
+            <a:pPr>
+              <a:lnSpc>
+                <a:spcPct val="120000"/>
+              </a:lnSpc>
+              <a:spcBef>
+                <a:spcPts val="400"/>
+              </a:spcBef>
+              <a:spcAft>
+                <a:spcPts val="400"/>
+              </a:spcAft>
+              <a:defRPr sz="1600">
+                <a:solidFill>
+                  <a:srgbClr val="282828"/>
+                </a:solidFill>
+              </a:defRPr>
+            </a:pPr>
+          </a:p>
+          <a:p>
+            <a:pPr>
+              <a:lnSpc>
+                <a:spcPct val="120000"/>
+              </a:lnSpc>
+              <a:spcBef>
+                <a:spcPts val="400"/>
+              </a:spcBef>
+              <a:spcAft>
+                <a:spcPts val="400"/>
+              </a:spcAft>
+              <a:defRPr sz="1600">
+                <a:solidFill>
+                  <a:srgbClr val="282828"/>
+                </a:solidFill>
+              </a:defRPr>
+            </a:pPr>
+            <a:r>
+              <a:t>✅ Data Validation</a:t>
+            </a:r>
+          </a:p>
+          <a:p>
+            <a:pPr>
+              <a:lnSpc>
+                <a:spcPct val="120000"/>
+              </a:lnSpc>
+              <a:spcBef>
+                <a:spcPts val="400"/>
+              </a:spcBef>
+              <a:spcAft>
+                <a:spcPts val="400"/>
+              </a:spcAft>
+              <a:defRPr sz="1600">
+                <a:solidFill>
+                  <a:srgbClr val="282828"/>
+                </a:solidFill>
+              </a:defRPr>
+            </a:pPr>
+            <a:r>
+              <a:t>   All insights grounded in actual data</a:t>
+            </a:r>
+          </a:p>
+          <a:p>
+            <a:pPr>
+              <a:lnSpc>
+                <a:spcPct val="120000"/>
+              </a:lnSpc>
+              <a:spcBef>
+                <a:spcPts val="400"/>
+              </a:spcBef>
+              <a:spcAft>
+                <a:spcPts val="400"/>
+              </a:spcAft>
+              <a:defRPr sz="1600">
+                <a:solidFill>
+                  <a:srgbClr val="282828"/>
+                </a:solidFill>
+              </a:defRPr>
+            </a:pPr>
+          </a:p>
+          <a:p>
+            <a:pPr>
+              <a:lnSpc>
+                <a:spcPct val="120000"/>
+              </a:lnSpc>
+              <a:spcBef>
+                <a:spcPts val="400"/>
+              </a:spcBef>
+              <a:spcAft>
+                <a:spcPts val="400"/>
+              </a:spcAft>
+              <a:defRPr sz="1600">
+                <a:solidFill>
+                  <a:srgbClr val="282828"/>
+                </a:solidFill>
+              </a:defRPr>
+            </a:pPr>
+            <a:r>
+              <a:t>⚡ Fast Responses</a:t>
+            </a:r>
+          </a:p>
+          <a:p>
+            <a:pPr>
+              <a:lnSpc>
+                <a:spcPct val="120000"/>
+              </a:lnSpc>
+              <a:spcBef>
+                <a:spcPts val="400"/>
+              </a:spcBef>
+              <a:spcAft>
+                <a:spcPts val="400"/>
+              </a:spcAft>
+              <a:defRPr sz="1600">
+                <a:solidFill>
+                  <a:srgbClr val="282828"/>
+                </a:solidFill>
+              </a:defRPr>
+            </a:pPr>
+            <a:r>
+              <a:t>   &lt;5 seconds for complex queries</a:t>
             </a:r>
           </a:p>
         </p:txBody>
@@ -15110,7 +16817,7 @@
               </a:defRPr>
             </a:pPr>
             <a:r>
-              <a:t>Built-In Analysis Tools</a:t>
+              <a:t>Advanced Analytics Capabilities</a:t>
             </a:r>
           </a:p>
         </p:txBody>
@@ -15289,187 +16996,313 @@
               </a:defRPr>
             </a:pPr>
             <a:r>
-              <a:t>1. Trend Analysis</a:t>
-            </a:r>
-          </a:p>
-          <a:p>
-            <a:pPr>
-              <a:lnSpc>
-                <a:spcPct val="120000"/>
-              </a:lnSpc>
-              <a:spcBef>
-                <a:spcPts val="400"/>
-              </a:spcBef>
-              <a:spcAft>
-                <a:spcPts val="400"/>
-              </a:spcAft>
-              <a:defRPr sz="1600">
-                <a:solidFill>
-                  <a:srgbClr val="282828"/>
-                </a:solidFill>
-              </a:defRPr>
-            </a:pPr>
-            <a:r>
-              <a:t>   Identifies growth patterns, calculates growth rates</a:t>
-            </a:r>
-          </a:p>
-          <a:p>
-            <a:pPr>
-              <a:lnSpc>
-                <a:spcPct val="120000"/>
-              </a:lnSpc>
-              <a:spcBef>
-                <a:spcPts val="400"/>
-              </a:spcBef>
-              <a:spcAft>
-                <a:spcPts val="400"/>
-              </a:spcAft>
-              <a:defRPr sz="1600">
-                <a:solidFill>
-                  <a:srgbClr val="282828"/>
-                </a:solidFill>
-              </a:defRPr>
-            </a:pPr>
-          </a:p>
-          <a:p>
-            <a:pPr>
-              <a:lnSpc>
-                <a:spcPct val="120000"/>
-              </a:lnSpc>
-              <a:spcBef>
-                <a:spcPts val="400"/>
-              </a:spcBef>
-              <a:spcAft>
-                <a:spcPts val="400"/>
-              </a:spcAft>
-              <a:defRPr sz="1600">
-                <a:solidFill>
-                  <a:srgbClr val="282828"/>
-                </a:solidFill>
-              </a:defRPr>
-            </a:pPr>
-            <a:r>
-              <a:t>2. Anomaly Detection</a:t>
-            </a:r>
-          </a:p>
-          <a:p>
-            <a:pPr>
-              <a:lnSpc>
-                <a:spcPct val="120000"/>
-              </a:lnSpc>
-              <a:spcBef>
-                <a:spcPts val="400"/>
-              </a:spcBef>
-              <a:spcAft>
-                <a:spcPts val="400"/>
-              </a:spcAft>
-              <a:defRPr sz="1600">
-                <a:solidFill>
-                  <a:srgbClr val="282828"/>
-                </a:solidFill>
-              </a:defRPr>
-            </a:pPr>
-            <a:r>
-              <a:t>   Finds unusual spikes or drops in data</a:t>
-            </a:r>
-          </a:p>
-          <a:p>
-            <a:pPr>
-              <a:lnSpc>
-                <a:spcPct val="120000"/>
-              </a:lnSpc>
-              <a:spcBef>
-                <a:spcPts val="400"/>
-              </a:spcBef>
-              <a:spcAft>
-                <a:spcPts val="400"/>
-              </a:spcAft>
-              <a:defRPr sz="1600">
-                <a:solidFill>
-                  <a:srgbClr val="282828"/>
-                </a:solidFill>
-              </a:defRPr>
-            </a:pPr>
-          </a:p>
-          <a:p>
-            <a:pPr>
-              <a:lnSpc>
-                <a:spcPct val="120000"/>
-              </a:lnSpc>
-              <a:spcBef>
-                <a:spcPts val="400"/>
-              </a:spcBef>
-              <a:spcAft>
-                <a:spcPts val="400"/>
-              </a:spcAft>
-              <a:defRPr sz="1600">
-                <a:solidFill>
-                  <a:srgbClr val="282828"/>
-                </a:solidFill>
-              </a:defRPr>
-            </a:pPr>
-            <a:r>
-              <a:t>3. Scenario Simulation</a:t>
-            </a:r>
-          </a:p>
-          <a:p>
-            <a:pPr>
-              <a:lnSpc>
-                <a:spcPct val="120000"/>
-              </a:lnSpc>
-              <a:spcBef>
-                <a:spcPts val="400"/>
-              </a:spcBef>
-              <a:spcAft>
-                <a:spcPts val="400"/>
-              </a:spcAft>
-              <a:defRPr sz="1600">
-                <a:solidFill>
-                  <a:srgbClr val="282828"/>
-                </a:solidFill>
-              </a:defRPr>
-            </a:pPr>
-            <a:r>
-              <a:t>   Models 'what-if' situations (price changes, promotions)</a:t>
-            </a:r>
-          </a:p>
-          <a:p>
-            <a:pPr>
-              <a:lnSpc>
-                <a:spcPct val="120000"/>
-              </a:lnSpc>
-              <a:spcBef>
-                <a:spcPts val="400"/>
-              </a:spcBef>
-              <a:spcAft>
-                <a:spcPts val="400"/>
-              </a:spcAft>
-              <a:defRPr sz="1600">
-                <a:solidFill>
-                  <a:srgbClr val="282828"/>
-                </a:solidFill>
-              </a:defRPr>
-            </a:pPr>
-          </a:p>
-          <a:p>
-            <a:pPr>
-              <a:lnSpc>
-                <a:spcPct val="120000"/>
-              </a:lnSpc>
-              <a:spcBef>
-                <a:spcPts val="400"/>
-              </a:spcBef>
-              <a:spcAft>
-                <a:spcPts val="400"/>
-              </a:spcAft>
-              <a:defRPr sz="1600">
-                <a:solidFill>
-                  <a:srgbClr val="282828"/>
-                </a:solidFill>
-              </a:defRPr>
-            </a:pPr>
-            <a:r>
-              <a:t>• All tools work together for complete insights</a:t>
+              <a:t>🔍 Anomaly Detection</a:t>
+            </a:r>
+          </a:p>
+          <a:p>
+            <a:pPr>
+              <a:lnSpc>
+                <a:spcPct val="120000"/>
+              </a:lnSpc>
+              <a:spcBef>
+                <a:spcPts val="400"/>
+              </a:spcBef>
+              <a:spcAft>
+                <a:spcPts val="400"/>
+              </a:spcAft>
+              <a:defRPr sz="1600">
+                <a:solidFill>
+                  <a:srgbClr val="282828"/>
+                </a:solidFill>
+              </a:defRPr>
+            </a:pPr>
+            <a:r>
+              <a:t>   • Statistical outliers (IQR, Z-score)</a:t>
+            </a:r>
+          </a:p>
+          <a:p>
+            <a:pPr>
+              <a:lnSpc>
+                <a:spcPct val="120000"/>
+              </a:lnSpc>
+              <a:spcBef>
+                <a:spcPts val="400"/>
+              </a:spcBef>
+              <a:spcAft>
+                <a:spcPts val="400"/>
+              </a:spcAft>
+              <a:defRPr sz="1600">
+                <a:solidFill>
+                  <a:srgbClr val="282828"/>
+                </a:solidFill>
+              </a:defRPr>
+            </a:pPr>
+            <a:r>
+              <a:t>   • Time series anomalies (rolling window)</a:t>
+            </a:r>
+          </a:p>
+          <a:p>
+            <a:pPr>
+              <a:lnSpc>
+                <a:spcPct val="120000"/>
+              </a:lnSpc>
+              <a:spcBef>
+                <a:spcPts val="400"/>
+              </a:spcBef>
+              <a:spcAft>
+                <a:spcPts val="400"/>
+              </a:spcAft>
+              <a:defRPr sz="1600">
+                <a:solidFill>
+                  <a:srgbClr val="282828"/>
+                </a:solidFill>
+              </a:defRPr>
+            </a:pPr>
+            <a:r>
+              <a:t>   • Multivariate detection (Isolation Forest)</a:t>
+            </a:r>
+          </a:p>
+          <a:p>
+            <a:pPr>
+              <a:lnSpc>
+                <a:spcPct val="120000"/>
+              </a:lnSpc>
+              <a:spcBef>
+                <a:spcPts val="400"/>
+              </a:spcBef>
+              <a:spcAft>
+                <a:spcPts val="400"/>
+              </a:spcAft>
+              <a:defRPr sz="1600">
+                <a:solidFill>
+                  <a:srgbClr val="282828"/>
+                </a:solidFill>
+              </a:defRPr>
+            </a:pPr>
+          </a:p>
+          <a:p>
+            <a:pPr>
+              <a:lnSpc>
+                <a:spcPct val="120000"/>
+              </a:lnSpc>
+              <a:spcBef>
+                <a:spcPts val="400"/>
+              </a:spcBef>
+              <a:spcAft>
+                <a:spcPts val="400"/>
+              </a:spcAft>
+              <a:defRPr sz="1600">
+                <a:solidFill>
+                  <a:srgbClr val="282828"/>
+                </a:solidFill>
+              </a:defRPr>
+            </a:pPr>
+            <a:r>
+              <a:t>📊 Data Comparison</a:t>
+            </a:r>
+          </a:p>
+          <a:p>
+            <a:pPr>
+              <a:lnSpc>
+                <a:spcPct val="120000"/>
+              </a:lnSpc>
+              <a:spcBef>
+                <a:spcPts val="400"/>
+              </a:spcBef>
+              <a:spcAft>
+                <a:spcPts val="400"/>
+              </a:spcAft>
+              <a:defRPr sz="1600">
+                <a:solidFill>
+                  <a:srgbClr val="282828"/>
+                </a:solidFill>
+              </a:defRPr>
+            </a:pPr>
+            <a:r>
+              <a:t>   • Period-over-period analysis</a:t>
+            </a:r>
+          </a:p>
+          <a:p>
+            <a:pPr>
+              <a:lnSpc>
+                <a:spcPct val="120000"/>
+              </a:lnSpc>
+              <a:spcBef>
+                <a:spcPts val="400"/>
+              </a:spcBef>
+              <a:spcAft>
+                <a:spcPts val="400"/>
+              </a:spcAft>
+              <a:defRPr sz="1600">
+                <a:solidFill>
+                  <a:srgbClr val="282828"/>
+                </a:solidFill>
+              </a:defRPr>
+            </a:pPr>
+            <a:r>
+              <a:t>   • Category, store, and regional comparisons</a:t>
+            </a:r>
+          </a:p>
+          <a:p>
+            <a:pPr>
+              <a:lnSpc>
+                <a:spcPct val="120000"/>
+              </a:lnSpc>
+              <a:spcBef>
+                <a:spcPts val="400"/>
+              </a:spcBef>
+              <a:spcAft>
+                <a:spcPts val="400"/>
+              </a:spcAft>
+              <a:defRPr sz="1600">
+                <a:solidFill>
+                  <a:srgbClr val="282828"/>
+                </a:solidFill>
+              </a:defRPr>
+            </a:pPr>
+          </a:p>
+          <a:p>
+            <a:pPr>
+              <a:lnSpc>
+                <a:spcPct val="120000"/>
+              </a:lnSpc>
+              <a:spcBef>
+                <a:spcPts val="400"/>
+              </a:spcBef>
+              <a:spcAft>
+                <a:spcPts val="400"/>
+              </a:spcAft>
+              <a:defRPr sz="1600">
+                <a:solidFill>
+                  <a:srgbClr val="282828"/>
+                </a:solidFill>
+              </a:defRPr>
+            </a:pPr>
+            <a:r>
+              <a:t>📈 Forecasting</a:t>
+            </a:r>
+          </a:p>
+          <a:p>
+            <a:pPr>
+              <a:lnSpc>
+                <a:spcPct val="120000"/>
+              </a:lnSpc>
+              <a:spcBef>
+                <a:spcPts val="400"/>
+              </a:spcBef>
+              <a:spcAft>
+                <a:spcPts val="400"/>
+              </a:spcAft>
+              <a:defRPr sz="1600">
+                <a:solidFill>
+                  <a:srgbClr val="282828"/>
+                </a:solidFill>
+              </a:defRPr>
+            </a:pPr>
+            <a:r>
+              <a:t>   • Linear trend, moving average, exponential smoothing</a:t>
+            </a:r>
+          </a:p>
+          <a:p>
+            <a:pPr>
+              <a:lnSpc>
+                <a:spcPct val="120000"/>
+              </a:lnSpc>
+              <a:spcBef>
+                <a:spcPts val="400"/>
+              </a:spcBef>
+              <a:spcAft>
+                <a:spcPts val="400"/>
+              </a:spcAft>
+              <a:defRPr sz="1600">
+                <a:solidFill>
+                  <a:srgbClr val="282828"/>
+                </a:solidFill>
+              </a:defRPr>
+            </a:pPr>
+            <a:r>
+              <a:t>   • Customizable forecast periods (1-365 days)</a:t>
+            </a:r>
+          </a:p>
+          <a:p>
+            <a:pPr>
+              <a:lnSpc>
+                <a:spcPct val="120000"/>
+              </a:lnSpc>
+              <a:spcBef>
+                <a:spcPts val="400"/>
+              </a:spcBef>
+              <a:spcAft>
+                <a:spcPts val="400"/>
+              </a:spcAft>
+              <a:defRPr sz="1600">
+                <a:solidFill>
+                  <a:srgbClr val="282828"/>
+                </a:solidFill>
+              </a:defRPr>
+            </a:pPr>
+          </a:p>
+          <a:p>
+            <a:pPr>
+              <a:lnSpc>
+                <a:spcPct val="120000"/>
+              </a:lnSpc>
+              <a:spcBef>
+                <a:spcPts val="400"/>
+              </a:spcBef>
+              <a:spcAft>
+                <a:spcPts val="400"/>
+              </a:spcAft>
+              <a:defRPr sz="1600">
+                <a:solidFill>
+                  <a:srgbClr val="282828"/>
+                </a:solidFill>
+              </a:defRPr>
+            </a:pPr>
+            <a:r>
+              <a:t>📋 Custom Reports &amp; Dashboard</a:t>
+            </a:r>
+          </a:p>
+          <a:p>
+            <a:pPr>
+              <a:lnSpc>
+                <a:spcPct val="120000"/>
+              </a:lnSpc>
+              <a:spcBef>
+                <a:spcPts val="400"/>
+              </a:spcBef>
+              <a:spcAft>
+                <a:spcPts val="400"/>
+              </a:spcAft>
+              <a:defRPr sz="1600">
+                <a:solidFill>
+                  <a:srgbClr val="282828"/>
+                </a:solidFill>
+              </a:defRPr>
+            </a:pPr>
+            <a:r>
+              <a:t>   • Real-time KPI monitoring</a:t>
+            </a:r>
+          </a:p>
+          <a:p>
+            <a:pPr>
+              <a:lnSpc>
+                <a:spcPct val="120000"/>
+              </a:lnSpc>
+              <a:spcBef>
+                <a:spcPts val="400"/>
+              </a:spcBef>
+              <a:spcAft>
+                <a:spcPts val="400"/>
+              </a:spcAft>
+              <a:defRPr sz="1600">
+                <a:solidFill>
+                  <a:srgbClr val="282828"/>
+                </a:solidFill>
+              </a:defRPr>
+            </a:pPr>
+            <a:r>
+              <a:t>   • Automated alert system</a:t>
             </a:r>
           </a:p>
         </p:txBody>
@@ -15592,7 +17425,7 @@
               </a:defRPr>
             </a:pPr>
             <a:r>
-              <a:t>Key Features</a:t>
+              <a:t>Platform Advantages</a:t>
             </a:r>
           </a:p>
         </p:txBody>
@@ -15771,112 +17604,268 @@
               </a:defRPr>
             </a:pPr>
             <a:r>
-              <a:t>✓ Understands natural language questions</a:t>
-            </a:r>
-          </a:p>
-          <a:p>
-            <a:pPr>
-              <a:lnSpc>
-                <a:spcPct val="120000"/>
-              </a:lnSpc>
-              <a:spcBef>
-                <a:spcPts val="400"/>
-              </a:spcBef>
-              <a:spcAft>
-                <a:spcPts val="400"/>
-              </a:spcAft>
-              <a:defRPr sz="1600">
-                <a:solidFill>
-                  <a:srgbClr val="282828"/>
-                </a:solidFill>
-              </a:defRPr>
-            </a:pPr>
-            <a:r>
-              <a:t>✓ Validates all numbers against real data (95%+ accuracy)</a:t>
-            </a:r>
-          </a:p>
-          <a:p>
-            <a:pPr>
-              <a:lnSpc>
-                <a:spcPct val="120000"/>
-              </a:lnSpc>
-              <a:spcBef>
-                <a:spcPts val="400"/>
-              </a:spcBef>
-              <a:spcAft>
-                <a:spcPts val="400"/>
-              </a:spcAft>
-              <a:defRPr sz="1600">
-                <a:solidFill>
-                  <a:srgbClr val="282828"/>
-                </a:solidFill>
-              </a:defRPr>
-            </a:pPr>
-            <a:r>
-              <a:t>✓ Works with multiple AI models (OpenAI, Azure, etc)</a:t>
-            </a:r>
-          </a:p>
-          <a:p>
-            <a:pPr>
-              <a:lnSpc>
-                <a:spcPct val="120000"/>
-              </a:lnSpc>
-              <a:spcBef>
-                <a:spcPts val="400"/>
-              </a:spcBef>
-              <a:spcAft>
-                <a:spcPts val="400"/>
-              </a:spcAft>
-              <a:defRPr sz="1600">
-                <a:solidFill>
-                  <a:srgbClr val="282828"/>
-                </a:solidFill>
-              </a:defRPr>
-            </a:pPr>
-            <a:r>
-              <a:t>✓ Fast responses (&lt;5 seconds cold, &lt;2 seconds cached)</a:t>
-            </a:r>
-          </a:p>
-          <a:p>
-            <a:pPr>
-              <a:lnSpc>
-                <a:spcPct val="120000"/>
-              </a:lnSpc>
-              <a:spcBef>
-                <a:spcPts val="400"/>
-              </a:spcBef>
-              <a:spcAft>
-                <a:spcPts val="400"/>
-              </a:spcAft>
-              <a:defRPr sz="1600">
-                <a:solidFill>
-                  <a:srgbClr val="282828"/>
-                </a:solidFill>
-              </a:defRPr>
-            </a:pPr>
-            <a:r>
-              <a:t>✓ Easy to use (no technical knowledge needed)</a:t>
-            </a:r>
-          </a:p>
-          <a:p>
-            <a:pPr>
-              <a:lnSpc>
-                <a:spcPct val="120000"/>
-              </a:lnSpc>
-              <a:spcBef>
-                <a:spcPts val="400"/>
-              </a:spcBef>
-              <a:spcAft>
-                <a:spcPts val="400"/>
-              </a:spcAft>
-              <a:defRPr sz="1600">
-                <a:solidFill>
-                  <a:srgbClr val="282828"/>
-                </a:solidFill>
-              </a:defRPr>
-            </a:pPr>
-            <a:r>
-              <a:t>✓ Can analyze 1M+ rows of data</a:t>
+              <a:t>✓ AI-Powered Intelligence</a:t>
+            </a:r>
+          </a:p>
+          <a:p>
+            <a:pPr>
+              <a:lnSpc>
+                <a:spcPct val="120000"/>
+              </a:lnSpc>
+              <a:spcBef>
+                <a:spcPts val="400"/>
+              </a:spcBef>
+              <a:spcAft>
+                <a:spcPts val="400"/>
+              </a:spcAft>
+              <a:defRPr sz="1600">
+                <a:solidFill>
+                  <a:srgbClr val="282828"/>
+                </a:solidFill>
+              </a:defRPr>
+            </a:pPr>
+            <a:r>
+              <a:t>   Natural language processing for instant insights</a:t>
+            </a:r>
+          </a:p>
+          <a:p>
+            <a:pPr>
+              <a:lnSpc>
+                <a:spcPct val="120000"/>
+              </a:lnSpc>
+              <a:spcBef>
+                <a:spcPts val="400"/>
+              </a:spcBef>
+              <a:spcAft>
+                <a:spcPts val="400"/>
+              </a:spcAft>
+              <a:defRPr sz="1600">
+                <a:solidFill>
+                  <a:srgbClr val="282828"/>
+                </a:solidFill>
+              </a:defRPr>
+            </a:pPr>
+          </a:p>
+          <a:p>
+            <a:pPr>
+              <a:lnSpc>
+                <a:spcPct val="120000"/>
+              </a:lnSpc>
+              <a:spcBef>
+                <a:spcPts val="400"/>
+              </a:spcBef>
+              <a:spcAft>
+                <a:spcPts val="400"/>
+              </a:spcAft>
+              <a:defRPr sz="1600">
+                <a:solidFill>
+                  <a:srgbClr val="282828"/>
+                </a:solidFill>
+              </a:defRPr>
+            </a:pPr>
+            <a:r>
+              <a:t>✓ Comprehensive Analytics Suite</a:t>
+            </a:r>
+          </a:p>
+          <a:p>
+            <a:pPr>
+              <a:lnSpc>
+                <a:spcPct val="120000"/>
+              </a:lnSpc>
+              <a:spcBef>
+                <a:spcPts val="400"/>
+              </a:spcBef>
+              <a:spcAft>
+                <a:spcPts val="400"/>
+              </a:spcAft>
+              <a:defRPr sz="1600">
+                <a:solidFill>
+                  <a:srgbClr val="282828"/>
+                </a:solidFill>
+              </a:defRPr>
+            </a:pPr>
+            <a:r>
+              <a:t>   9 specialized modules for complete business intelligence</a:t>
+            </a:r>
+          </a:p>
+          <a:p>
+            <a:pPr>
+              <a:lnSpc>
+                <a:spcPct val="120000"/>
+              </a:lnSpc>
+              <a:spcBef>
+                <a:spcPts val="400"/>
+              </a:spcBef>
+              <a:spcAft>
+                <a:spcPts val="400"/>
+              </a:spcAft>
+              <a:defRPr sz="1600">
+                <a:solidFill>
+                  <a:srgbClr val="282828"/>
+                </a:solidFill>
+              </a:defRPr>
+            </a:pPr>
+          </a:p>
+          <a:p>
+            <a:pPr>
+              <a:lnSpc>
+                <a:spcPct val="120000"/>
+              </a:lnSpc>
+              <a:spcBef>
+                <a:spcPts val="400"/>
+              </a:spcBef>
+              <a:spcAft>
+                <a:spcPts val="400"/>
+              </a:spcAft>
+              <a:defRPr sz="1600">
+                <a:solidFill>
+                  <a:srgbClr val="282828"/>
+                </a:solidFill>
+              </a:defRPr>
+            </a:pPr>
+            <a:r>
+              <a:t>✓ Real-Time Monitoring</a:t>
+            </a:r>
+          </a:p>
+          <a:p>
+            <a:pPr>
+              <a:lnSpc>
+                <a:spcPct val="120000"/>
+              </a:lnSpc>
+              <a:spcBef>
+                <a:spcPts val="400"/>
+              </a:spcBef>
+              <a:spcAft>
+                <a:spcPts val="400"/>
+              </a:spcAft>
+              <a:defRPr sz="1600">
+                <a:solidFill>
+                  <a:srgbClr val="282828"/>
+                </a:solidFill>
+              </a:defRPr>
+            </a:pPr>
+            <a:r>
+              <a:t>   Automated alerts and KPI dashboards</a:t>
+            </a:r>
+          </a:p>
+          <a:p>
+            <a:pPr>
+              <a:lnSpc>
+                <a:spcPct val="120000"/>
+              </a:lnSpc>
+              <a:spcBef>
+                <a:spcPts val="400"/>
+              </a:spcBef>
+              <a:spcAft>
+                <a:spcPts val="400"/>
+              </a:spcAft>
+              <a:defRPr sz="1600">
+                <a:solidFill>
+                  <a:srgbClr val="282828"/>
+                </a:solidFill>
+              </a:defRPr>
+            </a:pPr>
+          </a:p>
+          <a:p>
+            <a:pPr>
+              <a:lnSpc>
+                <a:spcPct val="120000"/>
+              </a:lnSpc>
+              <a:spcBef>
+                <a:spcPts val="400"/>
+              </a:spcBef>
+              <a:spcAft>
+                <a:spcPts val="400"/>
+              </a:spcAft>
+              <a:defRPr sz="1600">
+                <a:solidFill>
+                  <a:srgbClr val="282828"/>
+                </a:solidFill>
+              </a:defRPr>
+            </a:pPr>
+            <a:r>
+              <a:t>✓ Enterprise-Grade Performance</a:t>
+            </a:r>
+          </a:p>
+          <a:p>
+            <a:pPr>
+              <a:lnSpc>
+                <a:spcPct val="120000"/>
+              </a:lnSpc>
+              <a:spcBef>
+                <a:spcPts val="400"/>
+              </a:spcBef>
+              <a:spcAft>
+                <a:spcPts val="400"/>
+              </a:spcAft>
+              <a:defRPr sz="1600">
+                <a:solidFill>
+                  <a:srgbClr val="282828"/>
+                </a:solidFill>
+              </a:defRPr>
+            </a:pPr>
+            <a:r>
+              <a:t>   Handles 1M+ rows, &lt;5 second response times</a:t>
+            </a:r>
+          </a:p>
+          <a:p>
+            <a:pPr>
+              <a:lnSpc>
+                <a:spcPct val="120000"/>
+              </a:lnSpc>
+              <a:spcBef>
+                <a:spcPts val="400"/>
+              </a:spcBef>
+              <a:spcAft>
+                <a:spcPts val="400"/>
+              </a:spcAft>
+              <a:defRPr sz="1600">
+                <a:solidFill>
+                  <a:srgbClr val="282828"/>
+                </a:solidFill>
+              </a:defRPr>
+            </a:pPr>
+          </a:p>
+          <a:p>
+            <a:pPr>
+              <a:lnSpc>
+                <a:spcPct val="120000"/>
+              </a:lnSpc>
+              <a:spcBef>
+                <a:spcPts val="400"/>
+              </a:spcBef>
+              <a:spcAft>
+                <a:spcPts val="400"/>
+              </a:spcAft>
+              <a:defRPr sz="1600">
+                <a:solidFill>
+                  <a:srgbClr val="282828"/>
+                </a:solidFill>
+              </a:defRPr>
+            </a:pPr>
+            <a:r>
+              <a:t>✓ Data-Driven Accuracy</a:t>
+            </a:r>
+          </a:p>
+          <a:p>
+            <a:pPr>
+              <a:lnSpc>
+                <a:spcPct val="120000"/>
+              </a:lnSpc>
+              <a:spcBef>
+                <a:spcPts val="400"/>
+              </a:spcBef>
+              <a:spcAft>
+                <a:spcPts val="400"/>
+              </a:spcAft>
+              <a:defRPr sz="1600">
+                <a:solidFill>
+                  <a:srgbClr val="282828"/>
+                </a:solidFill>
+              </a:defRPr>
+            </a:pPr>
+            <a:r>
+              <a:t>   95%+ accuracy with automatic validation</a:t>
             </a:r>
           </a:p>
         </p:txBody>

--- a/Smart_CPG_Decision_Agent_Presentation.pptx
+++ b/Smart_CPG_Decision_Agent_Presentation.pptx
@@ -3508,7 +3508,7 @@
                 <a:gridCol w="2682240"/>
                 <a:gridCol w="2682240"/>
               </a:tblGrid>
-              <a:tr h="883920">
+              <a:tr h="1060704">
                 <a:tc>
                   <a:txBody>
                     <a:bodyPr/>
@@ -3573,7 +3573,7 @@
                   </a:tcPr>
                 </a:tc>
               </a:tr>
-              <a:tr h="883920">
+              <a:tr h="1060704">
                 <a:tc>
                   <a:txBody>
                     <a:bodyPr/>
@@ -3638,7 +3638,7 @@
                   </a:tcPr>
                 </a:tc>
               </a:tr>
-              <a:tr h="883920">
+              <a:tr h="1060704">
                 <a:tc>
                   <a:txBody>
                     <a:bodyPr/>
@@ -3703,7 +3703,7 @@
                   </a:tcPr>
                 </a:tc>
               </a:tr>
-              <a:tr h="883920">
+              <a:tr h="1060704">
                 <a:tc>
                   <a:txBody>
                     <a:bodyPr/>
@@ -3768,7 +3768,7 @@
                   </a:tcPr>
                 </a:tc>
               </a:tr>
-              <a:tr h="883920">
+              <a:tr h="1060704">
                 <a:tc>
                   <a:txBody>
                     <a:bodyPr/>
@@ -3833,71 +3833,6 @@
                   </a:tcPr>
                 </a:tc>
               </a:tr>
-              <a:tr h="883920">
-                <a:tc>
-                  <a:txBody>
-                    <a:bodyPr/>
-                    <a:lstStyle/>
-                    <a:p>
-                      <a:r>
-                        <a:rPr sz="1000">
-                          <a:solidFill>
-                            <a:srgbClr val="282828"/>
-                          </a:solidFill>
-                        </a:rPr>
-                        <a:t>Proactive Monitoring</a:t>
-                      </a:r>
-                    </a:p>
-                  </a:txBody>
-                  <a:tcPr>
-                    <a:solidFill>
-                      <a:srgbClr val="FFFFFF"/>
-                    </a:solidFill>
-                  </a:tcPr>
-                </a:tc>
-                <a:tc>
-                  <a:txBody>
-                    <a:bodyPr/>
-                    <a:lstStyle/>
-                    <a:p>
-                      <a:r>
-                        <a:rPr sz="1000">
-                          <a:solidFill>
-                            <a:srgbClr val="282828"/>
-                          </a:solidFill>
-                        </a:rPr>
-                        <a:t>Alert management system</a:t>
-                      </a:r>
-                    </a:p>
-                  </a:txBody>
-                  <a:tcPr>
-                    <a:solidFill>
-                      <a:srgbClr val="FFFFFF"/>
-                    </a:solidFill>
-                  </a:tcPr>
-                </a:tc>
-                <a:tc>
-                  <a:txBody>
-                    <a:bodyPr/>
-                    <a:lstStyle/>
-                    <a:p>
-                      <a:r>
-                        <a:rPr sz="1000">
-                          <a:solidFill>
-                            <a:srgbClr val="282828"/>
-                          </a:solidFill>
-                        </a:rPr>
-                        <a:t>Ongoing → Automated</a:t>
-                      </a:r>
-                    </a:p>
-                  </a:txBody>
-                  <a:tcPr>
-                    <a:solidFill>
-                      <a:srgbClr val="FFFFFF"/>
-                    </a:solidFill>
-                  </a:tcPr>
-                </a:tc>
-              </a:tr>
             </a:tbl>
           </a:graphicData>
         </a:graphic>
@@ -4708,7 +4643,7 @@
               </a:defRPr>
             </a:pPr>
             <a:r>
-              <a:t>   • 9 specialized analytics modules</a:t>
+              <a:t>   • 8 specialized analytics modules</a:t>
             </a:r>
           </a:p>
           <a:p>
@@ -4916,27 +4851,6 @@
             </a:pPr>
             <a:r>
               <a:t>   • Custom Reports &amp; Dashboard</a:t>
-            </a:r>
-          </a:p>
-          <a:p>
-            <a:pPr>
-              <a:lnSpc>
-                <a:spcPct val="120000"/>
-              </a:lnSpc>
-              <a:spcBef>
-                <a:spcPts val="400"/>
-              </a:spcBef>
-              <a:spcAft>
-                <a:spcPts val="400"/>
-              </a:spcAft>
-              <a:defRPr sz="1600">
-                <a:solidFill>
-                  <a:srgbClr val="282828"/>
-                </a:solidFill>
-              </a:defRPr>
-            </a:pPr>
-            <a:r>
-              <a:t>   • Alert Management System</a:t>
             </a:r>
           </a:p>
         </p:txBody>
@@ -10721,27 +10635,6 @@
               </a:defRPr>
             </a:pPr>
             <a:r>
-              <a:t>   • Proactive alert management</a:t>
-            </a:r>
-          </a:p>
-          <a:p>
-            <a:pPr>
-              <a:lnSpc>
-                <a:spcPct val="120000"/>
-              </a:lnSpc>
-              <a:spcBef>
-                <a:spcPts val="400"/>
-              </a:spcBef>
-              <a:spcAft>
-                <a:spcPts val="400"/>
-              </a:spcAft>
-              <a:defRPr sz="1600">
-                <a:solidFill>
-                  <a:srgbClr val="282828"/>
-                </a:solidFill>
-              </a:defRPr>
-            </a:pPr>
-            <a:r>
               <a:t>   • Faster decision-making cycles</a:t>
             </a:r>
           </a:p>
@@ -13983,7 +13876,7 @@
               </a:defRPr>
             </a:pPr>
             <a:r>
-              <a:t>   9 specialized modules for complete business intelligence</a:t>
+              <a:t>   8 specialized modules for complete business intelligence</a:t>
             </a:r>
           </a:p>
           <a:p>
@@ -15547,7 +15440,7 @@
                 <a:gridCol w="2682240"/>
                 <a:gridCol w="2682240"/>
               </a:tblGrid>
-              <a:tr h="589280">
+              <a:tr h="662940">
                 <a:tc>
                   <a:txBody>
                     <a:bodyPr/>
@@ -15612,7 +15505,7 @@
                   </a:tcPr>
                 </a:tc>
               </a:tr>
-              <a:tr h="589280">
+              <a:tr h="662940">
                 <a:tc>
                   <a:txBody>
                     <a:bodyPr/>
@@ -15677,7 +15570,7 @@
                   </a:tcPr>
                 </a:tc>
               </a:tr>
-              <a:tr h="589280">
+              <a:tr h="662940">
                 <a:tc>
                   <a:txBody>
                     <a:bodyPr/>
@@ -15742,7 +15635,7 @@
                   </a:tcPr>
                 </a:tc>
               </a:tr>
-              <a:tr h="589280">
+              <a:tr h="662940">
                 <a:tc>
                   <a:txBody>
                     <a:bodyPr/>
@@ -15807,7 +15700,7 @@
                   </a:tcPr>
                 </a:tc>
               </a:tr>
-              <a:tr h="589280">
+              <a:tr h="662940">
                 <a:tc>
                   <a:txBody>
                     <a:bodyPr/>
@@ -15872,7 +15765,7 @@
                   </a:tcPr>
                 </a:tc>
               </a:tr>
-              <a:tr h="589280">
+              <a:tr h="662940">
                 <a:tc>
                   <a:txBody>
                     <a:bodyPr/>
@@ -15937,7 +15830,7 @@
                   </a:tcPr>
                 </a:tc>
               </a:tr>
-              <a:tr h="589280">
+              <a:tr h="662940">
                 <a:tc>
                   <a:txBody>
                     <a:bodyPr/>
@@ -16002,7 +15895,7 @@
                   </a:tcPr>
                 </a:tc>
               </a:tr>
-              <a:tr h="589280">
+              <a:tr h="662940">
                 <a:tc>
                   <a:txBody>
                     <a:bodyPr/>
@@ -16014,7 +15907,7 @@
                             <a:srgbClr val="282828"/>
                           </a:solidFill>
                         </a:rPr>
-                        <a:t>Alert Management</a:t>
+                        <a:t>Dashboard</a:t>
                       </a:r>
                     </a:p>
                   </a:txBody>
@@ -16035,7 +15928,7 @@
                             <a:srgbClr val="282828"/>
                           </a:solidFill>
                         </a:rPr>
-                        <a:t>Automated monitoring</a:t>
+                        <a:t>Real-time KPIs</a:t>
                       </a:r>
                     </a:p>
                   </a:txBody>
@@ -16056,78 +15949,13 @@
                             <a:srgbClr val="282828"/>
                           </a:solidFill>
                         </a:rPr>
-                        <a:t>Proactive management</a:t>
+                        <a:t>Performance tracking</a:t>
                       </a:r>
                     </a:p>
                   </a:txBody>
                   <a:tcPr>
                     <a:solidFill>
                       <a:srgbClr val="FFFFFF"/>
-                    </a:solidFill>
-                  </a:tcPr>
-                </a:tc>
-              </a:tr>
-              <a:tr h="589280">
-                <a:tc>
-                  <a:txBody>
-                    <a:bodyPr/>
-                    <a:lstStyle/>
-                    <a:p>
-                      <a:r>
-                        <a:rPr sz="1000">
-                          <a:solidFill>
-                            <a:srgbClr val="282828"/>
-                          </a:solidFill>
-                        </a:rPr>
-                        <a:t>Dashboard</a:t>
-                      </a:r>
-                    </a:p>
-                  </a:txBody>
-                  <a:tcPr>
-                    <a:solidFill>
-                      <a:srgbClr val="F5FAFF"/>
-                    </a:solidFill>
-                  </a:tcPr>
-                </a:tc>
-                <a:tc>
-                  <a:txBody>
-                    <a:bodyPr/>
-                    <a:lstStyle/>
-                    <a:p>
-                      <a:r>
-                        <a:rPr sz="1000">
-                          <a:solidFill>
-                            <a:srgbClr val="282828"/>
-                          </a:solidFill>
-                        </a:rPr>
-                        <a:t>Real-time KPIs</a:t>
-                      </a:r>
-                    </a:p>
-                  </a:txBody>
-                  <a:tcPr>
-                    <a:solidFill>
-                      <a:srgbClr val="F5FAFF"/>
-                    </a:solidFill>
-                  </a:tcPr>
-                </a:tc>
-                <a:tc>
-                  <a:txBody>
-                    <a:bodyPr/>
-                    <a:lstStyle/>
-                    <a:p>
-                      <a:r>
-                        <a:rPr sz="1000">
-                          <a:solidFill>
-                            <a:srgbClr val="282828"/>
-                          </a:solidFill>
-                        </a:rPr>
-                        <a:t>Performance tracking</a:t>
-                      </a:r>
-                    </a:p>
-                  </a:txBody>
-                  <a:tcPr>
-                    <a:solidFill>
-                      <a:srgbClr val="F5FAFF"/>
                     </a:solidFill>
                   </a:tcPr>
                 </a:tc>
@@ -17685,7 +17513,7 @@
               </a:defRPr>
             </a:pPr>
             <a:r>
-              <a:t>   9 specialized modules for complete business intelligence</a:t>
+              <a:t>   8 specialized modules for complete business intelligence</a:t>
             </a:r>
           </a:p>
           <a:p>
